--- a/appleStockResultsandViz.pptx
+++ b/appleStockResultsandViz.pptx
@@ -119,12 +119,2582 @@
 </p:presentation>
 </file>
 
-<file path=ppt/revisionInfo.xml><?xml version="1.0" encoding="utf-8"?>
-<p1510:revInfo xmlns:a="http://schemas.openxmlformats.org/drawingml/2006/main" xmlns:r="http://schemas.openxmlformats.org/officeDocument/2006/relationships" xmlns:p1510="http://schemas.microsoft.com/office/powerpoint/2015/10/main">
-  <p1510:revLst>
-    <p1510:client id="{2245EF3B-B653-40B3-9F86-8AC38326967B}" v="4" dt="2024-09-19T16:04:05.957"/>
-  </p1510:revLst>
-</p1510:revInfo>
+<file path=ppt/diagrams/colors1.xml><?xml version="1.0" encoding="utf-8"?>
+<dgm:colorsDef xmlns:dgm="http://schemas.openxmlformats.org/drawingml/2006/diagram" xmlns:a="http://schemas.openxmlformats.org/drawingml/2006/main" uniqueId="urn:microsoft.com/office/officeart/2018/5/colors/Iconchunking_neutralbg_accent0_3">
+  <dgm:title val=""/>
+  <dgm:desc val=""/>
+  <dgm:catLst>
+    <dgm:cat type="mainScheme" pri="10300"/>
+  </dgm:catLst>
+  <dgm:styleLbl name="node0">
+    <dgm:fillClrLst meth="repeat">
+      <a:schemeClr val="dk2"/>
+    </dgm:fillClrLst>
+    <dgm:linClrLst meth="repeat">
+      <a:schemeClr val="lt2"/>
+    </dgm:linClrLst>
+    <dgm:effectClrLst/>
+    <dgm:txLinClrLst/>
+    <dgm:txFillClrLst/>
+    <dgm:txEffectClrLst/>
+  </dgm:styleLbl>
+  <dgm:styleLbl name="alignNode1">
+    <dgm:fillClrLst meth="repeat">
+      <a:schemeClr val="dk2"/>
+    </dgm:fillClrLst>
+    <dgm:linClrLst meth="repeat">
+      <a:schemeClr val="dk2"/>
+    </dgm:linClrLst>
+    <dgm:effectClrLst/>
+    <dgm:txLinClrLst/>
+    <dgm:txFillClrLst/>
+    <dgm:txEffectClrLst/>
+  </dgm:styleLbl>
+  <dgm:styleLbl name="node1">
+    <dgm:fillClrLst meth="repeat">
+      <a:schemeClr val="dk2"/>
+    </dgm:fillClrLst>
+    <dgm:linClrLst meth="repeat">
+      <a:schemeClr val="lt2">
+        <a:alpha val="0"/>
+      </a:schemeClr>
+    </dgm:linClrLst>
+    <dgm:effectClrLst/>
+    <dgm:txLinClrLst/>
+    <dgm:txFillClrLst/>
+    <dgm:txEffectClrLst/>
+  </dgm:styleLbl>
+  <dgm:styleLbl name="lnNode1">
+    <dgm:fillClrLst meth="repeat">
+      <a:schemeClr val="dk2"/>
+    </dgm:fillClrLst>
+    <dgm:linClrLst meth="repeat">
+      <a:schemeClr val="lt2"/>
+    </dgm:linClrLst>
+    <dgm:effectClrLst/>
+    <dgm:txLinClrLst/>
+    <dgm:txFillClrLst/>
+    <dgm:txEffectClrLst/>
+  </dgm:styleLbl>
+  <dgm:styleLbl name="vennNode1">
+    <dgm:fillClrLst meth="repeat">
+      <a:schemeClr val="dk2">
+        <a:alpha val="50000"/>
+      </a:schemeClr>
+    </dgm:fillClrLst>
+    <dgm:linClrLst meth="repeat">
+      <a:schemeClr val="lt2"/>
+    </dgm:linClrLst>
+    <dgm:effectClrLst/>
+    <dgm:txLinClrLst/>
+    <dgm:txFillClrLst/>
+    <dgm:txEffectClrLst/>
+  </dgm:styleLbl>
+  <dgm:styleLbl name="node2">
+    <dgm:fillClrLst meth="repeat">
+      <a:schemeClr val="dk2"/>
+    </dgm:fillClrLst>
+    <dgm:linClrLst meth="repeat">
+      <a:schemeClr val="lt2"/>
+    </dgm:linClrLst>
+    <dgm:effectClrLst/>
+    <dgm:txLinClrLst/>
+    <dgm:txFillClrLst/>
+    <dgm:txEffectClrLst/>
+  </dgm:styleLbl>
+  <dgm:styleLbl name="node3">
+    <dgm:fillClrLst meth="repeat">
+      <a:schemeClr val="dk2"/>
+    </dgm:fillClrLst>
+    <dgm:linClrLst meth="repeat">
+      <a:schemeClr val="lt2"/>
+    </dgm:linClrLst>
+    <dgm:effectClrLst/>
+    <dgm:txLinClrLst/>
+    <dgm:txFillClrLst/>
+    <dgm:txEffectClrLst/>
+  </dgm:styleLbl>
+  <dgm:styleLbl name="node4">
+    <dgm:fillClrLst meth="repeat">
+      <a:schemeClr val="dk2"/>
+    </dgm:fillClrLst>
+    <dgm:linClrLst meth="repeat">
+      <a:schemeClr val="lt2"/>
+    </dgm:linClrLst>
+    <dgm:effectClrLst/>
+    <dgm:txLinClrLst/>
+    <dgm:txFillClrLst/>
+    <dgm:txEffectClrLst/>
+  </dgm:styleLbl>
+  <dgm:styleLbl name="fgImgPlace1">
+    <dgm:fillClrLst meth="repeat">
+      <a:schemeClr val="dk2">
+        <a:tint val="50000"/>
+      </a:schemeClr>
+    </dgm:fillClrLst>
+    <dgm:linClrLst meth="repeat">
+      <a:schemeClr val="lt2"/>
+    </dgm:linClrLst>
+    <dgm:effectClrLst/>
+    <dgm:txLinClrLst/>
+    <dgm:txFillClrLst meth="repeat">
+      <a:schemeClr val="lt2"/>
+    </dgm:txFillClrLst>
+    <dgm:txEffectClrLst/>
+  </dgm:styleLbl>
+  <dgm:styleLbl name="alignImgPlace1">
+    <dgm:fillClrLst meth="repeat">
+      <a:schemeClr val="dk2">
+        <a:tint val="50000"/>
+      </a:schemeClr>
+    </dgm:fillClrLst>
+    <dgm:linClrLst meth="repeat">
+      <a:schemeClr val="dk2">
+        <a:shade val="80000"/>
+      </a:schemeClr>
+    </dgm:linClrLst>
+    <dgm:effectClrLst/>
+    <dgm:txLinClrLst/>
+    <dgm:txFillClrLst meth="repeat">
+      <a:schemeClr val="lt2"/>
+    </dgm:txFillClrLst>
+    <dgm:txEffectClrLst/>
+  </dgm:styleLbl>
+  <dgm:styleLbl name="bgImgPlace1">
+    <dgm:fillClrLst meth="repeat">
+      <a:schemeClr val="dk2">
+        <a:tint val="50000"/>
+      </a:schemeClr>
+    </dgm:fillClrLst>
+    <dgm:linClrLst meth="repeat">
+      <a:schemeClr val="dk2">
+        <a:shade val="80000"/>
+      </a:schemeClr>
+    </dgm:linClrLst>
+    <dgm:effectClrLst/>
+    <dgm:txLinClrLst/>
+    <dgm:txFillClrLst meth="repeat">
+      <a:schemeClr val="lt2"/>
+    </dgm:txFillClrLst>
+    <dgm:txEffectClrLst/>
+  </dgm:styleLbl>
+  <dgm:styleLbl name="sibTrans2D1">
+    <dgm:fillClrLst meth="repeat">
+      <a:schemeClr val="dk2">
+        <a:tint val="60000"/>
+      </a:schemeClr>
+    </dgm:fillClrLst>
+    <dgm:linClrLst meth="repeat">
+      <a:schemeClr val="dk2">
+        <a:tint val="60000"/>
+      </a:schemeClr>
+    </dgm:linClrLst>
+    <dgm:effectClrLst/>
+    <dgm:txLinClrLst/>
+    <dgm:txFillClrLst/>
+    <dgm:txEffectClrLst/>
+  </dgm:styleLbl>
+  <dgm:styleLbl name="fgSibTrans2D1">
+    <dgm:fillClrLst meth="repeat">
+      <a:schemeClr val="dk2">
+        <a:tint val="60000"/>
+      </a:schemeClr>
+    </dgm:fillClrLst>
+    <dgm:linClrLst meth="repeat">
+      <a:schemeClr val="dk2">
+        <a:tint val="60000"/>
+      </a:schemeClr>
+    </dgm:linClrLst>
+    <dgm:effectClrLst/>
+    <dgm:txLinClrLst/>
+    <dgm:txFillClrLst/>
+    <dgm:txEffectClrLst/>
+  </dgm:styleLbl>
+  <dgm:styleLbl name="bgSibTrans2D1">
+    <dgm:fillClrLst meth="repeat">
+      <a:schemeClr val="dk2">
+        <a:tint val="60000"/>
+      </a:schemeClr>
+    </dgm:fillClrLst>
+    <dgm:linClrLst meth="repeat">
+      <a:schemeClr val="dk2">
+        <a:tint val="60000"/>
+      </a:schemeClr>
+    </dgm:linClrLst>
+    <dgm:effectClrLst/>
+    <dgm:txLinClrLst/>
+    <dgm:txFillClrLst/>
+    <dgm:txEffectClrLst/>
+  </dgm:styleLbl>
+  <dgm:styleLbl name="sibTrans1D1">
+    <dgm:fillClrLst meth="repeat">
+      <a:schemeClr val="dk2"/>
+    </dgm:fillClrLst>
+    <dgm:linClrLst meth="repeat">
+      <a:schemeClr val="dk2"/>
+    </dgm:linClrLst>
+    <dgm:effectClrLst/>
+    <dgm:txLinClrLst/>
+    <dgm:txFillClrLst meth="repeat">
+      <a:schemeClr val="lt2"/>
+    </dgm:txFillClrLst>
+    <dgm:txEffectClrLst/>
+  </dgm:styleLbl>
+  <dgm:styleLbl name="callout">
+    <dgm:fillClrLst meth="repeat">
+      <a:schemeClr val="dk2"/>
+    </dgm:fillClrLst>
+    <dgm:linClrLst meth="repeat">
+      <a:schemeClr val="dk2">
+        <a:tint val="50000"/>
+      </a:schemeClr>
+    </dgm:linClrLst>
+    <dgm:effectClrLst/>
+    <dgm:txLinClrLst/>
+    <dgm:txFillClrLst meth="repeat">
+      <a:schemeClr val="lt2"/>
+    </dgm:txFillClrLst>
+    <dgm:txEffectClrLst/>
+  </dgm:styleLbl>
+  <dgm:styleLbl name="asst0">
+    <dgm:fillClrLst meth="repeat">
+      <a:schemeClr val="dk2"/>
+    </dgm:fillClrLst>
+    <dgm:linClrLst meth="repeat">
+      <a:schemeClr val="lt2"/>
+    </dgm:linClrLst>
+    <dgm:effectClrLst/>
+    <dgm:txLinClrLst/>
+    <dgm:txFillClrLst/>
+    <dgm:txEffectClrLst/>
+  </dgm:styleLbl>
+  <dgm:styleLbl name="asst1">
+    <dgm:fillClrLst meth="repeat">
+      <a:schemeClr val="dk2"/>
+    </dgm:fillClrLst>
+    <dgm:linClrLst meth="repeat">
+      <a:schemeClr val="lt2"/>
+    </dgm:linClrLst>
+    <dgm:effectClrLst/>
+    <dgm:txLinClrLst/>
+    <dgm:txFillClrLst/>
+    <dgm:txEffectClrLst/>
+  </dgm:styleLbl>
+  <dgm:styleLbl name="asst2">
+    <dgm:fillClrLst meth="repeat">
+      <a:schemeClr val="dk2"/>
+    </dgm:fillClrLst>
+    <dgm:linClrLst meth="repeat">
+      <a:schemeClr val="lt2"/>
+    </dgm:linClrLst>
+    <dgm:effectClrLst/>
+    <dgm:txLinClrLst/>
+    <dgm:txFillClrLst/>
+    <dgm:txEffectClrLst/>
+  </dgm:styleLbl>
+  <dgm:styleLbl name="asst3">
+    <dgm:fillClrLst meth="repeat">
+      <a:schemeClr val="dk2"/>
+    </dgm:fillClrLst>
+    <dgm:linClrLst meth="repeat">
+      <a:schemeClr val="lt2"/>
+    </dgm:linClrLst>
+    <dgm:effectClrLst/>
+    <dgm:txLinClrLst/>
+    <dgm:txFillClrLst/>
+    <dgm:txEffectClrLst/>
+  </dgm:styleLbl>
+  <dgm:styleLbl name="asst4">
+    <dgm:fillClrLst meth="repeat">
+      <a:schemeClr val="dk2"/>
+    </dgm:fillClrLst>
+    <dgm:linClrLst meth="repeat">
+      <a:schemeClr val="lt2"/>
+    </dgm:linClrLst>
+    <dgm:effectClrLst/>
+    <dgm:txLinClrLst/>
+    <dgm:txFillClrLst/>
+    <dgm:txEffectClrLst/>
+  </dgm:styleLbl>
+  <dgm:styleLbl name="parChTrans2D1">
+    <dgm:fillClrLst meth="repeat">
+      <a:schemeClr val="dk2">
+        <a:tint val="60000"/>
+      </a:schemeClr>
+    </dgm:fillClrLst>
+    <dgm:linClrLst meth="repeat">
+      <a:schemeClr val="dk2">
+        <a:tint val="60000"/>
+      </a:schemeClr>
+    </dgm:linClrLst>
+    <dgm:effectClrLst/>
+    <dgm:txLinClrLst/>
+    <dgm:txFillClrLst meth="repeat">
+      <a:schemeClr val="lt2"/>
+    </dgm:txFillClrLst>
+    <dgm:txEffectClrLst/>
+  </dgm:styleLbl>
+  <dgm:styleLbl name="parChTrans2D2">
+    <dgm:fillClrLst meth="repeat">
+      <a:schemeClr val="dk2"/>
+    </dgm:fillClrLst>
+    <dgm:linClrLst meth="repeat">
+      <a:schemeClr val="dk2"/>
+    </dgm:linClrLst>
+    <dgm:effectClrLst/>
+    <dgm:txLinClrLst/>
+    <dgm:txFillClrLst meth="repeat">
+      <a:schemeClr val="lt2"/>
+    </dgm:txFillClrLst>
+    <dgm:txEffectClrLst/>
+  </dgm:styleLbl>
+  <dgm:styleLbl name="parChTrans2D3">
+    <dgm:fillClrLst meth="repeat">
+      <a:schemeClr val="dk2"/>
+    </dgm:fillClrLst>
+    <dgm:linClrLst meth="repeat">
+      <a:schemeClr val="dk2"/>
+    </dgm:linClrLst>
+    <dgm:effectClrLst/>
+    <dgm:txLinClrLst/>
+    <dgm:txFillClrLst meth="repeat">
+      <a:schemeClr val="lt2"/>
+    </dgm:txFillClrLst>
+    <dgm:txEffectClrLst/>
+  </dgm:styleLbl>
+  <dgm:styleLbl name="parChTrans2D4">
+    <dgm:fillClrLst meth="repeat">
+      <a:schemeClr val="dk2"/>
+    </dgm:fillClrLst>
+    <dgm:linClrLst meth="repeat">
+      <a:schemeClr val="dk2"/>
+    </dgm:linClrLst>
+    <dgm:effectClrLst/>
+    <dgm:txLinClrLst/>
+    <dgm:txFillClrLst meth="repeat">
+      <a:schemeClr val="lt2"/>
+    </dgm:txFillClrLst>
+    <dgm:txEffectClrLst/>
+  </dgm:styleLbl>
+  <dgm:styleLbl name="parChTrans1D1">
+    <dgm:fillClrLst meth="repeat">
+      <a:schemeClr val="dk2"/>
+    </dgm:fillClrLst>
+    <dgm:linClrLst meth="repeat">
+      <a:schemeClr val="dk2">
+        <a:shade val="60000"/>
+      </a:schemeClr>
+    </dgm:linClrLst>
+    <dgm:effectClrLst/>
+    <dgm:txLinClrLst/>
+    <dgm:txFillClrLst meth="repeat">
+      <a:schemeClr val="tx1"/>
+    </dgm:txFillClrLst>
+    <dgm:txEffectClrLst/>
+  </dgm:styleLbl>
+  <dgm:styleLbl name="parChTrans1D2">
+    <dgm:fillClrLst meth="repeat">
+      <a:schemeClr val="dk2"/>
+    </dgm:fillClrLst>
+    <dgm:linClrLst meth="repeat">
+      <a:schemeClr val="dk2">
+        <a:shade val="60000"/>
+      </a:schemeClr>
+    </dgm:linClrLst>
+    <dgm:effectClrLst/>
+    <dgm:txLinClrLst/>
+    <dgm:txFillClrLst meth="repeat">
+      <a:schemeClr val="tx1"/>
+    </dgm:txFillClrLst>
+    <dgm:txEffectClrLst/>
+  </dgm:styleLbl>
+  <dgm:styleLbl name="parChTrans1D3">
+    <dgm:fillClrLst meth="repeat">
+      <a:schemeClr val="dk2"/>
+    </dgm:fillClrLst>
+    <dgm:linClrLst meth="repeat">
+      <a:schemeClr val="dk2">
+        <a:shade val="80000"/>
+      </a:schemeClr>
+    </dgm:linClrLst>
+    <dgm:effectClrLst/>
+    <dgm:txLinClrLst/>
+    <dgm:txFillClrLst meth="repeat">
+      <a:schemeClr val="tx1"/>
+    </dgm:txFillClrLst>
+    <dgm:txEffectClrLst/>
+  </dgm:styleLbl>
+  <dgm:styleLbl name="parChTrans1D4">
+    <dgm:fillClrLst meth="repeat">
+      <a:schemeClr val="dk2"/>
+    </dgm:fillClrLst>
+    <dgm:linClrLst meth="repeat">
+      <a:schemeClr val="dk2">
+        <a:shade val="80000"/>
+      </a:schemeClr>
+    </dgm:linClrLst>
+    <dgm:effectClrLst/>
+    <dgm:txLinClrLst/>
+    <dgm:txFillClrLst meth="repeat">
+      <a:schemeClr val="tx1"/>
+    </dgm:txFillClrLst>
+    <dgm:txEffectClrLst/>
+  </dgm:styleLbl>
+  <dgm:styleLbl name="fgAcc1">
+    <dgm:fillClrLst meth="repeat">
+      <a:schemeClr val="lt2">
+        <a:alpha val="90000"/>
+      </a:schemeClr>
+    </dgm:fillClrLst>
+    <dgm:linClrLst meth="repeat">
+      <a:schemeClr val="dk2"/>
+    </dgm:linClrLst>
+    <dgm:effectClrLst/>
+    <dgm:txLinClrLst/>
+    <dgm:txFillClrLst meth="repeat">
+      <a:schemeClr val="dk1"/>
+    </dgm:txFillClrLst>
+    <dgm:txEffectClrLst/>
+  </dgm:styleLbl>
+  <dgm:styleLbl name="conFgAcc1">
+    <dgm:fillClrLst meth="repeat">
+      <a:schemeClr val="lt2">
+        <a:alpha val="90000"/>
+      </a:schemeClr>
+    </dgm:fillClrLst>
+    <dgm:linClrLst meth="repeat">
+      <a:schemeClr val="dk2"/>
+    </dgm:linClrLst>
+    <dgm:effectClrLst/>
+    <dgm:txLinClrLst/>
+    <dgm:txFillClrLst meth="repeat">
+      <a:schemeClr val="dk1"/>
+    </dgm:txFillClrLst>
+    <dgm:txEffectClrLst/>
+  </dgm:styleLbl>
+  <dgm:styleLbl name="alignAcc1">
+    <dgm:fillClrLst meth="repeat">
+      <a:schemeClr val="lt2">
+        <a:alpha val="90000"/>
+      </a:schemeClr>
+    </dgm:fillClrLst>
+    <dgm:linClrLst meth="repeat">
+      <a:schemeClr val="dk2"/>
+    </dgm:linClrLst>
+    <dgm:effectClrLst/>
+    <dgm:txLinClrLst/>
+    <dgm:txFillClrLst meth="repeat">
+      <a:schemeClr val="dk1"/>
+    </dgm:txFillClrLst>
+    <dgm:txEffectClrLst/>
+  </dgm:styleLbl>
+  <dgm:styleLbl name="trAlignAcc1">
+    <dgm:fillClrLst meth="repeat">
+      <a:schemeClr val="lt2">
+        <a:alpha val="40000"/>
+      </a:schemeClr>
+    </dgm:fillClrLst>
+    <dgm:linClrLst meth="repeat">
+      <a:schemeClr val="dk2"/>
+    </dgm:linClrLst>
+    <dgm:effectClrLst/>
+    <dgm:txLinClrLst/>
+    <dgm:txFillClrLst meth="repeat">
+      <a:schemeClr val="dk1"/>
+    </dgm:txFillClrLst>
+    <dgm:txEffectClrLst/>
+  </dgm:styleLbl>
+  <dgm:styleLbl name="bgAcc1">
+    <dgm:fillClrLst meth="repeat">
+      <a:schemeClr val="lt2">
+        <a:alpha val="90000"/>
+      </a:schemeClr>
+    </dgm:fillClrLst>
+    <dgm:linClrLst meth="repeat">
+      <a:schemeClr val="dk2"/>
+    </dgm:linClrLst>
+    <dgm:effectClrLst/>
+    <dgm:txLinClrLst/>
+    <dgm:txFillClrLst meth="repeat">
+      <a:schemeClr val="dk1"/>
+    </dgm:txFillClrLst>
+    <dgm:txEffectClrLst/>
+  </dgm:styleLbl>
+  <dgm:styleLbl name="solidFgAcc1">
+    <dgm:fillClrLst meth="repeat">
+      <a:schemeClr val="lt2"/>
+    </dgm:fillClrLst>
+    <dgm:linClrLst meth="repeat">
+      <a:schemeClr val="dk2"/>
+    </dgm:linClrLst>
+    <dgm:effectClrLst/>
+    <dgm:txLinClrLst/>
+    <dgm:txFillClrLst meth="repeat">
+      <a:schemeClr val="dk1"/>
+    </dgm:txFillClrLst>
+    <dgm:txEffectClrLst/>
+  </dgm:styleLbl>
+  <dgm:styleLbl name="solidAlignAcc1">
+    <dgm:fillClrLst meth="repeat">
+      <a:schemeClr val="lt2"/>
+    </dgm:fillClrLst>
+    <dgm:linClrLst meth="repeat">
+      <a:schemeClr val="dk2"/>
+    </dgm:linClrLst>
+    <dgm:effectClrLst/>
+    <dgm:txLinClrLst/>
+    <dgm:txFillClrLst meth="repeat">
+      <a:schemeClr val="dk1"/>
+    </dgm:txFillClrLst>
+    <dgm:txEffectClrLst/>
+  </dgm:styleLbl>
+  <dgm:styleLbl name="solidBgAcc1">
+    <dgm:fillClrLst meth="repeat">
+      <a:schemeClr val="lt2"/>
+    </dgm:fillClrLst>
+    <dgm:linClrLst meth="repeat">
+      <a:schemeClr val="dk2"/>
+    </dgm:linClrLst>
+    <dgm:effectClrLst/>
+    <dgm:txLinClrLst/>
+    <dgm:txFillClrLst meth="repeat">
+      <a:schemeClr val="dk1"/>
+    </dgm:txFillClrLst>
+    <dgm:txEffectClrLst/>
+  </dgm:styleLbl>
+  <dgm:styleLbl name="fgAccFollowNode1">
+    <dgm:fillClrLst meth="repeat">
+      <a:schemeClr val="dk2">
+        <a:alpha val="90000"/>
+        <a:tint val="40000"/>
+      </a:schemeClr>
+    </dgm:fillClrLst>
+    <dgm:linClrLst meth="repeat">
+      <a:schemeClr val="dk2">
+        <a:alpha val="90000"/>
+        <a:tint val="40000"/>
+      </a:schemeClr>
+    </dgm:linClrLst>
+    <dgm:effectClrLst/>
+    <dgm:txLinClrLst/>
+    <dgm:txFillClrLst meth="repeat">
+      <a:schemeClr val="dk1"/>
+    </dgm:txFillClrLst>
+    <dgm:txEffectClrLst/>
+  </dgm:styleLbl>
+  <dgm:styleLbl name="alignAccFollowNode1">
+    <dgm:fillClrLst meth="repeat">
+      <a:schemeClr val="dk2">
+        <a:alpha val="90000"/>
+        <a:tint val="40000"/>
+      </a:schemeClr>
+    </dgm:fillClrLst>
+    <dgm:linClrLst meth="repeat">
+      <a:schemeClr val="dk2">
+        <a:alpha val="90000"/>
+        <a:tint val="40000"/>
+      </a:schemeClr>
+    </dgm:linClrLst>
+    <dgm:effectClrLst/>
+    <dgm:txLinClrLst/>
+    <dgm:txFillClrLst meth="repeat">
+      <a:schemeClr val="dk1"/>
+    </dgm:txFillClrLst>
+    <dgm:txEffectClrLst/>
+  </dgm:styleLbl>
+  <dgm:styleLbl name="bgAccFollowNode1">
+    <dgm:fillClrLst meth="repeat">
+      <a:schemeClr val="dk2">
+        <a:alpha val="90000"/>
+        <a:tint val="40000"/>
+      </a:schemeClr>
+    </dgm:fillClrLst>
+    <dgm:linClrLst meth="repeat">
+      <a:schemeClr val="dk2">
+        <a:alpha val="90000"/>
+        <a:tint val="40000"/>
+      </a:schemeClr>
+    </dgm:linClrLst>
+    <dgm:effectClrLst/>
+    <dgm:txLinClrLst/>
+    <dgm:txFillClrLst meth="repeat">
+      <a:schemeClr val="dk1"/>
+    </dgm:txFillClrLst>
+    <dgm:txEffectClrLst/>
+  </dgm:styleLbl>
+  <dgm:styleLbl name="fgAcc0">
+    <dgm:fillClrLst meth="repeat">
+      <a:schemeClr val="lt2">
+        <a:alpha val="90000"/>
+      </a:schemeClr>
+    </dgm:fillClrLst>
+    <dgm:linClrLst meth="repeat">
+      <a:schemeClr val="dk2"/>
+    </dgm:linClrLst>
+    <dgm:effectClrLst/>
+    <dgm:txLinClrLst/>
+    <dgm:txFillClrLst meth="repeat">
+      <a:schemeClr val="dk1"/>
+    </dgm:txFillClrLst>
+    <dgm:txEffectClrLst/>
+  </dgm:styleLbl>
+  <dgm:styleLbl name="fgAcc2">
+    <dgm:fillClrLst meth="repeat">
+      <a:schemeClr val="lt2">
+        <a:alpha val="90000"/>
+      </a:schemeClr>
+    </dgm:fillClrLst>
+    <dgm:linClrLst meth="repeat">
+      <a:schemeClr val="dk2"/>
+    </dgm:linClrLst>
+    <dgm:effectClrLst/>
+    <dgm:txLinClrLst/>
+    <dgm:txFillClrLst meth="repeat">
+      <a:schemeClr val="dk1"/>
+    </dgm:txFillClrLst>
+    <dgm:txEffectClrLst/>
+  </dgm:styleLbl>
+  <dgm:styleLbl name="fgAcc3">
+    <dgm:fillClrLst meth="repeat">
+      <a:schemeClr val="lt2">
+        <a:alpha val="90000"/>
+      </a:schemeClr>
+    </dgm:fillClrLst>
+    <dgm:linClrLst meth="repeat">
+      <a:schemeClr val="dk2"/>
+    </dgm:linClrLst>
+    <dgm:effectClrLst/>
+    <dgm:txLinClrLst/>
+    <dgm:txFillClrLst meth="repeat">
+      <a:schemeClr val="dk1"/>
+    </dgm:txFillClrLst>
+    <dgm:txEffectClrLst/>
+  </dgm:styleLbl>
+  <dgm:styleLbl name="fgAcc4">
+    <dgm:fillClrLst meth="repeat">
+      <a:schemeClr val="lt2">
+        <a:alpha val="90000"/>
+      </a:schemeClr>
+    </dgm:fillClrLst>
+    <dgm:linClrLst meth="repeat">
+      <a:schemeClr val="dk2"/>
+    </dgm:linClrLst>
+    <dgm:effectClrLst/>
+    <dgm:txLinClrLst/>
+    <dgm:txFillClrLst meth="repeat">
+      <a:schemeClr val="dk1"/>
+    </dgm:txFillClrLst>
+    <dgm:txEffectClrLst/>
+  </dgm:styleLbl>
+  <dgm:styleLbl name="bgShp">
+    <dgm:fillClrLst meth="repeat">
+      <a:schemeClr val="bg1">
+        <a:lumMod val="95000"/>
+      </a:schemeClr>
+    </dgm:fillClrLst>
+    <dgm:linClrLst meth="repeat">
+      <a:schemeClr val="dk2"/>
+    </dgm:linClrLst>
+    <dgm:effectClrLst/>
+    <dgm:txLinClrLst/>
+    <dgm:txFillClrLst meth="repeat">
+      <a:schemeClr val="dk1"/>
+    </dgm:txFillClrLst>
+    <dgm:txEffectClrLst/>
+  </dgm:styleLbl>
+  <dgm:styleLbl name="dkBgShp">
+    <dgm:fillClrLst meth="repeat">
+      <a:schemeClr val="dk2">
+        <a:shade val="80000"/>
+      </a:schemeClr>
+    </dgm:fillClrLst>
+    <dgm:linClrLst meth="repeat">
+      <a:schemeClr val="dk2"/>
+    </dgm:linClrLst>
+    <dgm:effectClrLst/>
+    <dgm:txLinClrLst/>
+    <dgm:txFillClrLst meth="repeat">
+      <a:schemeClr val="lt1"/>
+    </dgm:txFillClrLst>
+    <dgm:txEffectClrLst/>
+  </dgm:styleLbl>
+  <dgm:styleLbl name="trBgShp">
+    <dgm:fillClrLst meth="repeat">
+      <a:schemeClr val="dk2">
+        <a:tint val="50000"/>
+        <a:alpha val="40000"/>
+      </a:schemeClr>
+    </dgm:fillClrLst>
+    <dgm:linClrLst meth="repeat">
+      <a:schemeClr val="dk2"/>
+    </dgm:linClrLst>
+    <dgm:effectClrLst/>
+    <dgm:txLinClrLst/>
+    <dgm:txFillClrLst meth="repeat">
+      <a:schemeClr val="lt1"/>
+    </dgm:txFillClrLst>
+    <dgm:txEffectClrLst/>
+  </dgm:styleLbl>
+  <dgm:styleLbl name="fgShp">
+    <dgm:fillClrLst meth="repeat">
+      <a:schemeClr val="dk2">
+        <a:tint val="60000"/>
+      </a:schemeClr>
+    </dgm:fillClrLst>
+    <dgm:linClrLst meth="repeat">
+      <a:schemeClr val="lt2"/>
+    </dgm:linClrLst>
+    <dgm:effectClrLst/>
+    <dgm:txLinClrLst/>
+    <dgm:txFillClrLst meth="repeat">
+      <a:schemeClr val="dk1"/>
+    </dgm:txFillClrLst>
+    <dgm:txEffectClrLst/>
+  </dgm:styleLbl>
+  <dgm:styleLbl name="revTx">
+    <dgm:fillClrLst meth="repeat">
+      <a:schemeClr val="lt2">
+        <a:alpha val="0"/>
+      </a:schemeClr>
+    </dgm:fillClrLst>
+    <dgm:linClrLst meth="repeat">
+      <a:schemeClr val="dk1">
+        <a:alpha val="0"/>
+      </a:schemeClr>
+    </dgm:linClrLst>
+    <dgm:effectClrLst/>
+    <dgm:txLinClrLst/>
+    <dgm:txFillClrLst meth="repeat">
+      <a:schemeClr val="tx1"/>
+    </dgm:txFillClrLst>
+    <dgm:txEffectClrLst/>
+  </dgm:styleLbl>
+</dgm:colorsDef>
+</file>
+
+<file path=ppt/diagrams/data1.xml><?xml version="1.0" encoding="utf-8"?>
+<dgm:dataModel xmlns:dgm="http://schemas.openxmlformats.org/drawingml/2006/diagram" xmlns:a="http://schemas.openxmlformats.org/drawingml/2006/main">
+  <dgm:ptLst>
+    <dgm:pt modelId="{D1A1EDAA-E157-4A56-85E9-B01C06E4E8F9}" type="doc">
+      <dgm:prSet loTypeId="urn:microsoft.com/office/officeart/2018/2/layout/IconCircleList" loCatId="icon" qsTypeId="urn:microsoft.com/office/officeart/2005/8/quickstyle/simple1" qsCatId="simple" csTypeId="urn:microsoft.com/office/officeart/2018/5/colors/Iconchunking_neutralbg_accent0_3" csCatId="mainScheme" phldr="1"/>
+      <dgm:spPr/>
+      <dgm:t>
+        <a:bodyPr/>
+        <a:lstStyle/>
+        <a:p>
+          <a:endParaRPr lang="en-US"/>
+        </a:p>
+      </dgm:t>
+    </dgm:pt>
+    <dgm:pt modelId="{721DE600-6126-4C25-B027-48FDF48E0264}">
+      <dgm:prSet custT="1"/>
+      <dgm:spPr/>
+      <dgm:t>
+        <a:bodyPr/>
+        <a:lstStyle/>
+        <a:p>
+          <a:pPr>
+            <a:lnSpc>
+              <a:spcPct val="100000"/>
+            </a:lnSpc>
+          </a:pPr>
+          <a:r>
+            <a:rPr lang="en-US" sz="1400" dirty="0">
+              <a:latin typeface="Helvetica" panose="020B0604020202020204" pitchFamily="34" charset="0"/>
+              <a:cs typeface="Helvetica" panose="020B0604020202020204" pitchFamily="34" charset="0"/>
+            </a:rPr>
+            <a:t>Model 3’s accuracy demonstrates the value of understanding competitor relationships. Businesses in competitive industries can use these insights to better anticipate market trends and refine strategies.</a:t>
+          </a:r>
+        </a:p>
+      </dgm:t>
+    </dgm:pt>
+    <dgm:pt modelId="{F3F70AD7-2DD4-4989-9D11-EB383F4A1310}" type="parTrans" cxnId="{6F888BF3-7212-465A-ADEE-61D71A10A979}">
+      <dgm:prSet/>
+      <dgm:spPr/>
+      <dgm:t>
+        <a:bodyPr/>
+        <a:lstStyle/>
+        <a:p>
+          <a:endParaRPr lang="en-US"/>
+        </a:p>
+      </dgm:t>
+    </dgm:pt>
+    <dgm:pt modelId="{9D91C0B3-AD14-49FE-8D77-DCD92ADF270C}" type="sibTrans" cxnId="{6F888BF3-7212-465A-ADEE-61D71A10A979}">
+      <dgm:prSet/>
+      <dgm:spPr/>
+      <dgm:t>
+        <a:bodyPr/>
+        <a:lstStyle/>
+        <a:p>
+          <a:pPr>
+            <a:lnSpc>
+              <a:spcPct val="100000"/>
+            </a:lnSpc>
+          </a:pPr>
+          <a:endParaRPr lang="en-US"/>
+        </a:p>
+      </dgm:t>
+    </dgm:pt>
+    <dgm:pt modelId="{AB159634-C867-47EA-A65B-297086099606}">
+      <dgm:prSet custT="1"/>
+      <dgm:spPr/>
+      <dgm:t>
+        <a:bodyPr/>
+        <a:lstStyle/>
+        <a:p>
+          <a:pPr>
+            <a:lnSpc>
+              <a:spcPct val="100000"/>
+            </a:lnSpc>
+          </a:pPr>
+          <a:r>
+            <a:rPr lang="en-US" sz="1400" dirty="0">
+              <a:latin typeface="Helvetica" panose="020B0604020202020204" pitchFamily="34" charset="0"/>
+              <a:cs typeface="Helvetica" panose="020B0604020202020204" pitchFamily="34" charset="0"/>
+            </a:rPr>
+            <a:t>Model 3 outperforms all others with the lowest error (Test RMSE ~ 0.56, within $1 of actual prices) and minimal overfitting, making it ideal for practical use.</a:t>
+          </a:r>
+        </a:p>
+      </dgm:t>
+    </dgm:pt>
+    <dgm:pt modelId="{5C2CE7FF-B53A-44FC-BE2F-99EAD782ACD2}" type="parTrans" cxnId="{E8103AA0-78B4-402B-A352-DFCAEDE7C43C}">
+      <dgm:prSet/>
+      <dgm:spPr/>
+      <dgm:t>
+        <a:bodyPr/>
+        <a:lstStyle/>
+        <a:p>
+          <a:endParaRPr lang="en-US"/>
+        </a:p>
+      </dgm:t>
+    </dgm:pt>
+    <dgm:pt modelId="{6F13FC58-596B-4052-8ED7-6663F7D1B133}" type="sibTrans" cxnId="{E8103AA0-78B4-402B-A352-DFCAEDE7C43C}">
+      <dgm:prSet/>
+      <dgm:spPr/>
+      <dgm:t>
+        <a:bodyPr/>
+        <a:lstStyle/>
+        <a:p>
+          <a:endParaRPr lang="en-US"/>
+        </a:p>
+      </dgm:t>
+    </dgm:pt>
+    <dgm:pt modelId="{F9FA8E78-4D5E-468D-9990-68A1B626DDE5}" type="pres">
+      <dgm:prSet presAssocID="{D1A1EDAA-E157-4A56-85E9-B01C06E4E8F9}" presName="root" presStyleCnt="0">
+        <dgm:presLayoutVars>
+          <dgm:dir/>
+          <dgm:resizeHandles val="exact"/>
+        </dgm:presLayoutVars>
+      </dgm:prSet>
+      <dgm:spPr/>
+    </dgm:pt>
+    <dgm:pt modelId="{5FBFF60B-9C52-47A0-A68E-D1A36418E670}" type="pres">
+      <dgm:prSet presAssocID="{D1A1EDAA-E157-4A56-85E9-B01C06E4E8F9}" presName="container" presStyleCnt="0">
+        <dgm:presLayoutVars>
+          <dgm:dir/>
+          <dgm:resizeHandles val="exact"/>
+        </dgm:presLayoutVars>
+      </dgm:prSet>
+      <dgm:spPr/>
+    </dgm:pt>
+    <dgm:pt modelId="{75A14B19-0747-4261-8351-FAB0E91BC557}" type="pres">
+      <dgm:prSet presAssocID="{721DE600-6126-4C25-B027-48FDF48E0264}" presName="compNode" presStyleCnt="0"/>
+      <dgm:spPr/>
+    </dgm:pt>
+    <dgm:pt modelId="{CDDCB386-C1C5-4B04-85CF-7037FDD00948}" type="pres">
+      <dgm:prSet presAssocID="{721DE600-6126-4C25-B027-48FDF48E0264}" presName="iconBgRect" presStyleLbl="bgShp" presStyleIdx="0" presStyleCnt="2"/>
+      <dgm:spPr/>
+    </dgm:pt>
+    <dgm:pt modelId="{7D460591-2222-428A-BB8D-AFB20459FAED}" type="pres">
+      <dgm:prSet presAssocID="{721DE600-6126-4C25-B027-48FDF48E0264}" presName="iconRect" presStyleLbl="node1" presStyleIdx="0" presStyleCnt="2"/>
+      <dgm:spPr>
+        <a:blipFill>
+          <a:blip xmlns:r="http://schemas.openxmlformats.org/officeDocument/2006/relationships" r:embed="rId1">
+            <a:extLst>
+              <a:ext uri="{28A0092B-C50C-407E-A947-70E740481C1C}">
+                <a14:useLocalDpi xmlns:a14="http://schemas.microsoft.com/office/drawing/2010/main" val="0"/>
+              </a:ext>
+              <a:ext uri="{96DAC541-7B7A-43D3-8B79-37D633B846F1}">
+                <asvg:svgBlip xmlns:asvg="http://schemas.microsoft.com/office/drawing/2016/SVG/main" r:embed="rId2"/>
+              </a:ext>
+            </a:extLst>
+          </a:blip>
+          <a:stretch>
+            <a:fillRect/>
+          </a:stretch>
+        </a:blipFill>
+        <a:ln>
+          <a:noFill/>
+        </a:ln>
+      </dgm:spPr>
+      <dgm:extLst>
+        <a:ext uri="{E40237B7-FDA0-4F09-8148-C483321AD2D9}">
+          <dgm14:cNvPr xmlns:dgm14="http://schemas.microsoft.com/office/drawing/2010/diagram" id="0" name="" descr="Bullseye"/>
+        </a:ext>
+      </dgm:extLst>
+    </dgm:pt>
+    <dgm:pt modelId="{DBF320BA-F549-40DC-8245-304FA22FD6E1}" type="pres">
+      <dgm:prSet presAssocID="{721DE600-6126-4C25-B027-48FDF48E0264}" presName="spaceRect" presStyleCnt="0"/>
+      <dgm:spPr/>
+    </dgm:pt>
+    <dgm:pt modelId="{9297FB64-6A51-4C16-9EBC-C9E09AD193C1}" type="pres">
+      <dgm:prSet presAssocID="{721DE600-6126-4C25-B027-48FDF48E0264}" presName="textRect" presStyleLbl="revTx" presStyleIdx="0" presStyleCnt="2">
+        <dgm:presLayoutVars>
+          <dgm:chMax val="1"/>
+          <dgm:chPref val="1"/>
+        </dgm:presLayoutVars>
+      </dgm:prSet>
+      <dgm:spPr/>
+    </dgm:pt>
+    <dgm:pt modelId="{0AEBF7A7-703C-4AA8-A54F-0A2ABF0F0981}" type="pres">
+      <dgm:prSet presAssocID="{9D91C0B3-AD14-49FE-8D77-DCD92ADF270C}" presName="sibTrans" presStyleLbl="sibTrans2D1" presStyleIdx="0" presStyleCnt="0"/>
+      <dgm:spPr/>
+    </dgm:pt>
+    <dgm:pt modelId="{FFCE6AB2-A2DA-4139-A193-0C5DD050831B}" type="pres">
+      <dgm:prSet presAssocID="{AB159634-C867-47EA-A65B-297086099606}" presName="compNode" presStyleCnt="0"/>
+      <dgm:spPr/>
+    </dgm:pt>
+    <dgm:pt modelId="{E75DA6F9-72DA-4FBF-8819-64924BA80597}" type="pres">
+      <dgm:prSet presAssocID="{AB159634-C867-47EA-A65B-297086099606}" presName="iconBgRect" presStyleLbl="bgShp" presStyleIdx="1" presStyleCnt="2"/>
+      <dgm:spPr/>
+    </dgm:pt>
+    <dgm:pt modelId="{4EE559E3-39B6-4C5F-9CFA-704A744DBA32}" type="pres">
+      <dgm:prSet presAssocID="{AB159634-C867-47EA-A65B-297086099606}" presName="iconRect" presStyleLbl="node1" presStyleIdx="1" presStyleCnt="2"/>
+      <dgm:spPr>
+        <a:blipFill>
+          <a:blip xmlns:r="http://schemas.openxmlformats.org/officeDocument/2006/relationships" r:embed="rId3">
+            <a:extLst>
+              <a:ext uri="{28A0092B-C50C-407E-A947-70E740481C1C}">
+                <a14:useLocalDpi xmlns:a14="http://schemas.microsoft.com/office/drawing/2010/main" val="0"/>
+              </a:ext>
+              <a:ext uri="{96DAC541-7B7A-43D3-8B79-37D633B846F1}">
+                <asvg:svgBlip xmlns:asvg="http://schemas.microsoft.com/office/drawing/2016/SVG/main" r:embed="rId4"/>
+              </a:ext>
+            </a:extLst>
+          </a:blip>
+          <a:stretch>
+            <a:fillRect/>
+          </a:stretch>
+        </a:blipFill>
+        <a:ln>
+          <a:noFill/>
+        </a:ln>
+      </dgm:spPr>
+      <dgm:extLst>
+        <a:ext uri="{E40237B7-FDA0-4F09-8148-C483321AD2D9}">
+          <dgm14:cNvPr xmlns:dgm14="http://schemas.microsoft.com/office/drawing/2010/diagram" id="0" name="" descr="Radioactive Sign"/>
+        </a:ext>
+      </dgm:extLst>
+    </dgm:pt>
+    <dgm:pt modelId="{CCAEFF6B-821A-443F-BB60-A34F601A9EDC}" type="pres">
+      <dgm:prSet presAssocID="{AB159634-C867-47EA-A65B-297086099606}" presName="spaceRect" presStyleCnt="0"/>
+      <dgm:spPr/>
+    </dgm:pt>
+    <dgm:pt modelId="{1AB2E619-1ADE-4BF4-A464-968BF23A70C8}" type="pres">
+      <dgm:prSet presAssocID="{AB159634-C867-47EA-A65B-297086099606}" presName="textRect" presStyleLbl="revTx" presStyleIdx="1" presStyleCnt="2">
+        <dgm:presLayoutVars>
+          <dgm:chMax val="1"/>
+          <dgm:chPref val="1"/>
+        </dgm:presLayoutVars>
+      </dgm:prSet>
+      <dgm:spPr/>
+    </dgm:pt>
+  </dgm:ptLst>
+  <dgm:cxnLst>
+    <dgm:cxn modelId="{FAFA8544-527A-4724-9B5D-9A25B6661BCB}" type="presOf" srcId="{721DE600-6126-4C25-B027-48FDF48E0264}" destId="{9297FB64-6A51-4C16-9EBC-C9E09AD193C1}" srcOrd="0" destOrd="0" presId="urn:microsoft.com/office/officeart/2018/2/layout/IconCircleList"/>
+    <dgm:cxn modelId="{2B6AC44A-C812-47AE-9AB9-5A419FC3389B}" type="presOf" srcId="{AB159634-C867-47EA-A65B-297086099606}" destId="{1AB2E619-1ADE-4BF4-A464-968BF23A70C8}" srcOrd="0" destOrd="0" presId="urn:microsoft.com/office/officeart/2018/2/layout/IconCircleList"/>
+    <dgm:cxn modelId="{E8103AA0-78B4-402B-A352-DFCAEDE7C43C}" srcId="{D1A1EDAA-E157-4A56-85E9-B01C06E4E8F9}" destId="{AB159634-C867-47EA-A65B-297086099606}" srcOrd="1" destOrd="0" parTransId="{5C2CE7FF-B53A-44FC-BE2F-99EAD782ACD2}" sibTransId="{6F13FC58-596B-4052-8ED7-6663F7D1B133}"/>
+    <dgm:cxn modelId="{A628B7CB-9BCD-4E24-924E-F6D4FB189183}" type="presOf" srcId="{D1A1EDAA-E157-4A56-85E9-B01C06E4E8F9}" destId="{F9FA8E78-4D5E-468D-9990-68A1B626DDE5}" srcOrd="0" destOrd="0" presId="urn:microsoft.com/office/officeart/2018/2/layout/IconCircleList"/>
+    <dgm:cxn modelId="{DEA405D9-800C-4C22-99CF-0EC1A6545C11}" type="presOf" srcId="{9D91C0B3-AD14-49FE-8D77-DCD92ADF270C}" destId="{0AEBF7A7-703C-4AA8-A54F-0A2ABF0F0981}" srcOrd="0" destOrd="0" presId="urn:microsoft.com/office/officeart/2018/2/layout/IconCircleList"/>
+    <dgm:cxn modelId="{6F888BF3-7212-465A-ADEE-61D71A10A979}" srcId="{D1A1EDAA-E157-4A56-85E9-B01C06E4E8F9}" destId="{721DE600-6126-4C25-B027-48FDF48E0264}" srcOrd="0" destOrd="0" parTransId="{F3F70AD7-2DD4-4989-9D11-EB383F4A1310}" sibTransId="{9D91C0B3-AD14-49FE-8D77-DCD92ADF270C}"/>
+    <dgm:cxn modelId="{523B7971-608D-473B-B8AE-BE657F8C7A14}" type="presParOf" srcId="{F9FA8E78-4D5E-468D-9990-68A1B626DDE5}" destId="{5FBFF60B-9C52-47A0-A68E-D1A36418E670}" srcOrd="0" destOrd="0" presId="urn:microsoft.com/office/officeart/2018/2/layout/IconCircleList"/>
+    <dgm:cxn modelId="{3AC5AA6C-E798-42A4-8372-E73B69338221}" type="presParOf" srcId="{5FBFF60B-9C52-47A0-A68E-D1A36418E670}" destId="{75A14B19-0747-4261-8351-FAB0E91BC557}" srcOrd="0" destOrd="0" presId="urn:microsoft.com/office/officeart/2018/2/layout/IconCircleList"/>
+    <dgm:cxn modelId="{CD8ACF8E-8773-498C-8970-BB32DFB1CFBB}" type="presParOf" srcId="{75A14B19-0747-4261-8351-FAB0E91BC557}" destId="{CDDCB386-C1C5-4B04-85CF-7037FDD00948}" srcOrd="0" destOrd="0" presId="urn:microsoft.com/office/officeart/2018/2/layout/IconCircleList"/>
+    <dgm:cxn modelId="{F9A2BABE-A304-40C1-8AAD-70C70523A658}" type="presParOf" srcId="{75A14B19-0747-4261-8351-FAB0E91BC557}" destId="{7D460591-2222-428A-BB8D-AFB20459FAED}" srcOrd="1" destOrd="0" presId="urn:microsoft.com/office/officeart/2018/2/layout/IconCircleList"/>
+    <dgm:cxn modelId="{FA5D562C-AF83-4D3E-B53B-4311BBF4F217}" type="presParOf" srcId="{75A14B19-0747-4261-8351-FAB0E91BC557}" destId="{DBF320BA-F549-40DC-8245-304FA22FD6E1}" srcOrd="2" destOrd="0" presId="urn:microsoft.com/office/officeart/2018/2/layout/IconCircleList"/>
+    <dgm:cxn modelId="{353CCBBE-CF40-4E0E-9C59-06538F755694}" type="presParOf" srcId="{75A14B19-0747-4261-8351-FAB0E91BC557}" destId="{9297FB64-6A51-4C16-9EBC-C9E09AD193C1}" srcOrd="3" destOrd="0" presId="urn:microsoft.com/office/officeart/2018/2/layout/IconCircleList"/>
+    <dgm:cxn modelId="{46C4C410-F1D4-4AAC-82DA-D45A11A5177D}" type="presParOf" srcId="{5FBFF60B-9C52-47A0-A68E-D1A36418E670}" destId="{0AEBF7A7-703C-4AA8-A54F-0A2ABF0F0981}" srcOrd="1" destOrd="0" presId="urn:microsoft.com/office/officeart/2018/2/layout/IconCircleList"/>
+    <dgm:cxn modelId="{0962BAB2-320F-4BE6-ACC3-D31201758C53}" type="presParOf" srcId="{5FBFF60B-9C52-47A0-A68E-D1A36418E670}" destId="{FFCE6AB2-A2DA-4139-A193-0C5DD050831B}" srcOrd="2" destOrd="0" presId="urn:microsoft.com/office/officeart/2018/2/layout/IconCircleList"/>
+    <dgm:cxn modelId="{08C45555-4C5D-43DD-9C68-D5600D4EE881}" type="presParOf" srcId="{FFCE6AB2-A2DA-4139-A193-0C5DD050831B}" destId="{E75DA6F9-72DA-4FBF-8819-64924BA80597}" srcOrd="0" destOrd="0" presId="urn:microsoft.com/office/officeart/2018/2/layout/IconCircleList"/>
+    <dgm:cxn modelId="{43937D28-BB31-4DCF-9BB4-C96B51C5C879}" type="presParOf" srcId="{FFCE6AB2-A2DA-4139-A193-0C5DD050831B}" destId="{4EE559E3-39B6-4C5F-9CFA-704A744DBA32}" srcOrd="1" destOrd="0" presId="urn:microsoft.com/office/officeart/2018/2/layout/IconCircleList"/>
+    <dgm:cxn modelId="{B2E83F7D-9669-47B0-A78A-985276807C7A}" type="presParOf" srcId="{FFCE6AB2-A2DA-4139-A193-0C5DD050831B}" destId="{CCAEFF6B-821A-443F-BB60-A34F601A9EDC}" srcOrd="2" destOrd="0" presId="urn:microsoft.com/office/officeart/2018/2/layout/IconCircleList"/>
+    <dgm:cxn modelId="{47B1A653-3A26-4293-AC1A-B55430041030}" type="presParOf" srcId="{FFCE6AB2-A2DA-4139-A193-0C5DD050831B}" destId="{1AB2E619-1ADE-4BF4-A464-968BF23A70C8}" srcOrd="3" destOrd="0" presId="urn:microsoft.com/office/officeart/2018/2/layout/IconCircleList"/>
+  </dgm:cxnLst>
+  <dgm:bg/>
+  <dgm:whole/>
+  <dgm:extLst>
+    <a:ext uri="http://schemas.microsoft.com/office/drawing/2008/diagram">
+      <dsp:dataModelExt xmlns:dsp="http://schemas.microsoft.com/office/drawing/2008/diagram" relId="rId9" minVer="http://schemas.openxmlformats.org/drawingml/2006/diagram"/>
+    </a:ext>
+    <a:ext uri="{C62137D5-CB1D-491B-B009-E17868A290BF}">
+      <dgm14:recolorImg xmlns:dgm14="http://schemas.microsoft.com/office/drawing/2010/diagram" val="1"/>
+    </a:ext>
+  </dgm:extLst>
+</dgm:dataModel>
+</file>
+
+<file path=ppt/diagrams/drawing1.xml><?xml version="1.0" encoding="utf-8"?>
+<dsp:drawing xmlns:dgm="http://schemas.openxmlformats.org/drawingml/2006/diagram" xmlns:dsp="http://schemas.microsoft.com/office/drawing/2008/diagram" xmlns:a="http://schemas.openxmlformats.org/drawingml/2006/main">
+  <dsp:spTree>
+    <dsp:nvGrpSpPr>
+      <dsp:cNvPr id="0" name=""/>
+      <dsp:cNvGrpSpPr/>
+    </dsp:nvGrpSpPr>
+    <dsp:grpSpPr/>
+    <dsp:sp modelId="{CDDCB386-C1C5-4B04-85CF-7037FDD00948}">
+      <dsp:nvSpPr>
+        <dsp:cNvPr id="0" name=""/>
+        <dsp:cNvSpPr/>
+      </dsp:nvSpPr>
+      <dsp:spPr>
+        <a:xfrm>
+          <a:off x="47192" y="985131"/>
+          <a:ext cx="768342" cy="768342"/>
+        </a:xfrm>
+        <a:prstGeom prst="ellipse">
+          <a:avLst/>
+        </a:prstGeom>
+        <a:solidFill>
+          <a:schemeClr val="bg1">
+            <a:lumMod val="95000"/>
+            <a:hueOff val="0"/>
+            <a:satOff val="0"/>
+            <a:lumOff val="0"/>
+            <a:alphaOff val="0"/>
+          </a:schemeClr>
+        </a:solidFill>
+        <a:ln>
+          <a:noFill/>
+        </a:ln>
+        <a:effectLst/>
+      </dsp:spPr>
+      <dsp:style>
+        <a:lnRef idx="0">
+          <a:scrgbClr r="0" g="0" b="0"/>
+        </a:lnRef>
+        <a:fillRef idx="1">
+          <a:scrgbClr r="0" g="0" b="0"/>
+        </a:fillRef>
+        <a:effectRef idx="0">
+          <a:scrgbClr r="0" g="0" b="0"/>
+        </a:effectRef>
+        <a:fontRef idx="minor"/>
+      </dsp:style>
+    </dsp:sp>
+    <dsp:sp modelId="{7D460591-2222-428A-BB8D-AFB20459FAED}">
+      <dsp:nvSpPr>
+        <dsp:cNvPr id="0" name=""/>
+        <dsp:cNvSpPr/>
+      </dsp:nvSpPr>
+      <dsp:spPr>
+        <a:xfrm>
+          <a:off x="208544" y="1146483"/>
+          <a:ext cx="445638" cy="445638"/>
+        </a:xfrm>
+        <a:prstGeom prst="rect">
+          <a:avLst/>
+        </a:prstGeom>
+        <a:blipFill>
+          <a:blip xmlns:r="http://schemas.openxmlformats.org/officeDocument/2006/relationships" r:embed="rId1">
+            <a:extLst>
+              <a:ext uri="{28A0092B-C50C-407E-A947-70E740481C1C}">
+                <a14:useLocalDpi xmlns:a14="http://schemas.microsoft.com/office/drawing/2010/main" val="0"/>
+              </a:ext>
+              <a:ext uri="{96DAC541-7B7A-43D3-8B79-37D633B846F1}">
+                <asvg:svgBlip xmlns:asvg="http://schemas.microsoft.com/office/drawing/2016/SVG/main" r:embed="rId2"/>
+              </a:ext>
+            </a:extLst>
+          </a:blip>
+          <a:stretch>
+            <a:fillRect/>
+          </a:stretch>
+        </a:blipFill>
+        <a:ln w="19050" cap="flat" cmpd="sng" algn="ctr">
+          <a:noFill/>
+          <a:prstDash val="solid"/>
+          <a:miter lim="800000"/>
+        </a:ln>
+        <a:effectLst/>
+      </dsp:spPr>
+      <dsp:style>
+        <a:lnRef idx="2">
+          <a:scrgbClr r="0" g="0" b="0"/>
+        </a:lnRef>
+        <a:fillRef idx="1">
+          <a:scrgbClr r="0" g="0" b="0"/>
+        </a:fillRef>
+        <a:effectRef idx="0">
+          <a:scrgbClr r="0" g="0" b="0"/>
+        </a:effectRef>
+        <a:fontRef idx="minor">
+          <a:schemeClr val="lt1"/>
+        </a:fontRef>
+      </dsp:style>
+    </dsp:sp>
+    <dsp:sp modelId="{9297FB64-6A51-4C16-9EBC-C9E09AD193C1}">
+      <dsp:nvSpPr>
+        <dsp:cNvPr id="0" name=""/>
+        <dsp:cNvSpPr/>
+      </dsp:nvSpPr>
+      <dsp:spPr>
+        <a:xfrm>
+          <a:off x="980179" y="985131"/>
+          <a:ext cx="1811093" cy="768342"/>
+        </a:xfrm>
+        <a:prstGeom prst="rect">
+          <a:avLst/>
+        </a:prstGeom>
+        <a:noFill/>
+        <a:ln>
+          <a:noFill/>
+        </a:ln>
+        <a:effectLst/>
+      </dsp:spPr>
+      <dsp:style>
+        <a:lnRef idx="0">
+          <a:scrgbClr r="0" g="0" b="0"/>
+        </a:lnRef>
+        <a:fillRef idx="0">
+          <a:scrgbClr r="0" g="0" b="0"/>
+        </a:fillRef>
+        <a:effectRef idx="0">
+          <a:scrgbClr r="0" g="0" b="0"/>
+        </a:effectRef>
+        <a:fontRef idx="minor"/>
+      </dsp:style>
+      <dsp:txBody>
+        <a:bodyPr spcFirstLastPara="0" vert="horz" wrap="square" lIns="0" tIns="0" rIns="0" bIns="0" numCol="1" spcCol="1270" anchor="ctr" anchorCtr="0">
+          <a:noAutofit/>
+        </a:bodyPr>
+        <a:lstStyle/>
+        <a:p>
+          <a:pPr marL="0" lvl="0" indent="0" algn="l" defTabSz="622300">
+            <a:lnSpc>
+              <a:spcPct val="100000"/>
+            </a:lnSpc>
+            <a:spcBef>
+              <a:spcPct val="0"/>
+            </a:spcBef>
+            <a:spcAft>
+              <a:spcPct val="35000"/>
+            </a:spcAft>
+            <a:buNone/>
+          </a:pPr>
+          <a:r>
+            <a:rPr lang="en-US" sz="1400" kern="1200" dirty="0">
+              <a:latin typeface="Helvetica" panose="020B0604020202020204" pitchFamily="34" charset="0"/>
+              <a:cs typeface="Helvetica" panose="020B0604020202020204" pitchFamily="34" charset="0"/>
+            </a:rPr>
+            <a:t>Model 3’s accuracy demonstrates the value of understanding competitor relationships. Businesses in competitive industries can use these insights to better anticipate market trends and refine strategies.</a:t>
+          </a:r>
+        </a:p>
+      </dsp:txBody>
+      <dsp:txXfrm>
+        <a:off x="980179" y="985131"/>
+        <a:ext cx="1811093" cy="768342"/>
+      </dsp:txXfrm>
+    </dsp:sp>
+    <dsp:sp modelId="{E75DA6F9-72DA-4FBF-8819-64924BA80597}">
+      <dsp:nvSpPr>
+        <dsp:cNvPr id="0" name=""/>
+        <dsp:cNvSpPr/>
+      </dsp:nvSpPr>
+      <dsp:spPr>
+        <a:xfrm>
+          <a:off x="3106842" y="985131"/>
+          <a:ext cx="768342" cy="768342"/>
+        </a:xfrm>
+        <a:prstGeom prst="ellipse">
+          <a:avLst/>
+        </a:prstGeom>
+        <a:solidFill>
+          <a:schemeClr val="bg1">
+            <a:lumMod val="95000"/>
+            <a:hueOff val="0"/>
+            <a:satOff val="0"/>
+            <a:lumOff val="0"/>
+            <a:alphaOff val="0"/>
+          </a:schemeClr>
+        </a:solidFill>
+        <a:ln>
+          <a:noFill/>
+        </a:ln>
+        <a:effectLst/>
+      </dsp:spPr>
+      <dsp:style>
+        <a:lnRef idx="0">
+          <a:scrgbClr r="0" g="0" b="0"/>
+        </a:lnRef>
+        <a:fillRef idx="1">
+          <a:scrgbClr r="0" g="0" b="0"/>
+        </a:fillRef>
+        <a:effectRef idx="0">
+          <a:scrgbClr r="0" g="0" b="0"/>
+        </a:effectRef>
+        <a:fontRef idx="minor"/>
+      </dsp:style>
+    </dsp:sp>
+    <dsp:sp modelId="{4EE559E3-39B6-4C5F-9CFA-704A744DBA32}">
+      <dsp:nvSpPr>
+        <dsp:cNvPr id="0" name=""/>
+        <dsp:cNvSpPr/>
+      </dsp:nvSpPr>
+      <dsp:spPr>
+        <a:xfrm>
+          <a:off x="3268194" y="1146483"/>
+          <a:ext cx="445638" cy="445638"/>
+        </a:xfrm>
+        <a:prstGeom prst="rect">
+          <a:avLst/>
+        </a:prstGeom>
+        <a:blipFill>
+          <a:blip xmlns:r="http://schemas.openxmlformats.org/officeDocument/2006/relationships" r:embed="rId3">
+            <a:extLst>
+              <a:ext uri="{28A0092B-C50C-407E-A947-70E740481C1C}">
+                <a14:useLocalDpi xmlns:a14="http://schemas.microsoft.com/office/drawing/2010/main" val="0"/>
+              </a:ext>
+              <a:ext uri="{96DAC541-7B7A-43D3-8B79-37D633B846F1}">
+                <asvg:svgBlip xmlns:asvg="http://schemas.microsoft.com/office/drawing/2016/SVG/main" r:embed="rId4"/>
+              </a:ext>
+            </a:extLst>
+          </a:blip>
+          <a:stretch>
+            <a:fillRect/>
+          </a:stretch>
+        </a:blipFill>
+        <a:ln w="19050" cap="flat" cmpd="sng" algn="ctr">
+          <a:noFill/>
+          <a:prstDash val="solid"/>
+          <a:miter lim="800000"/>
+        </a:ln>
+        <a:effectLst/>
+      </dsp:spPr>
+      <dsp:style>
+        <a:lnRef idx="2">
+          <a:scrgbClr r="0" g="0" b="0"/>
+        </a:lnRef>
+        <a:fillRef idx="1">
+          <a:scrgbClr r="0" g="0" b="0"/>
+        </a:fillRef>
+        <a:effectRef idx="0">
+          <a:scrgbClr r="0" g="0" b="0"/>
+        </a:effectRef>
+        <a:fontRef idx="minor">
+          <a:schemeClr val="lt1"/>
+        </a:fontRef>
+      </dsp:style>
+    </dsp:sp>
+    <dsp:sp modelId="{1AB2E619-1ADE-4BF4-A464-968BF23A70C8}">
+      <dsp:nvSpPr>
+        <dsp:cNvPr id="0" name=""/>
+        <dsp:cNvSpPr/>
+      </dsp:nvSpPr>
+      <dsp:spPr>
+        <a:xfrm>
+          <a:off x="4039829" y="985131"/>
+          <a:ext cx="1811093" cy="768342"/>
+        </a:xfrm>
+        <a:prstGeom prst="rect">
+          <a:avLst/>
+        </a:prstGeom>
+        <a:noFill/>
+        <a:ln>
+          <a:noFill/>
+        </a:ln>
+        <a:effectLst/>
+      </dsp:spPr>
+      <dsp:style>
+        <a:lnRef idx="0">
+          <a:scrgbClr r="0" g="0" b="0"/>
+        </a:lnRef>
+        <a:fillRef idx="0">
+          <a:scrgbClr r="0" g="0" b="0"/>
+        </a:fillRef>
+        <a:effectRef idx="0">
+          <a:scrgbClr r="0" g="0" b="0"/>
+        </a:effectRef>
+        <a:fontRef idx="minor"/>
+      </dsp:style>
+      <dsp:txBody>
+        <a:bodyPr spcFirstLastPara="0" vert="horz" wrap="square" lIns="0" tIns="0" rIns="0" bIns="0" numCol="1" spcCol="1270" anchor="ctr" anchorCtr="0">
+          <a:noAutofit/>
+        </a:bodyPr>
+        <a:lstStyle/>
+        <a:p>
+          <a:pPr marL="0" lvl="0" indent="0" algn="l" defTabSz="622300">
+            <a:lnSpc>
+              <a:spcPct val="100000"/>
+            </a:lnSpc>
+            <a:spcBef>
+              <a:spcPct val="0"/>
+            </a:spcBef>
+            <a:spcAft>
+              <a:spcPct val="35000"/>
+            </a:spcAft>
+            <a:buNone/>
+          </a:pPr>
+          <a:r>
+            <a:rPr lang="en-US" sz="1400" kern="1200" dirty="0">
+              <a:latin typeface="Helvetica" panose="020B0604020202020204" pitchFamily="34" charset="0"/>
+              <a:cs typeface="Helvetica" panose="020B0604020202020204" pitchFamily="34" charset="0"/>
+            </a:rPr>
+            <a:t>Model 3 outperforms all others with the lowest error (Test RMSE ~ 0.56, within $1 of actual prices) and minimal overfitting, making it ideal for practical use.</a:t>
+          </a:r>
+        </a:p>
+      </dsp:txBody>
+      <dsp:txXfrm>
+        <a:off x="4039829" y="985131"/>
+        <a:ext cx="1811093" cy="768342"/>
+      </dsp:txXfrm>
+    </dsp:sp>
+  </dsp:spTree>
+</dsp:drawing>
+</file>
+
+<file path=ppt/diagrams/layout1.xml><?xml version="1.0" encoding="utf-8"?>
+<dgm:layoutDef xmlns:dgm="http://schemas.openxmlformats.org/drawingml/2006/diagram" xmlns:a="http://schemas.openxmlformats.org/drawingml/2006/main" uniqueId="urn:microsoft.com/office/officeart/2018/2/layout/IconCircleList">
+  <dgm:title val="Icon Circle List"/>
+  <dgm:desc val="Use to show non-sequential or grouped chunks of information accompanied by related visuals. Circular shapes can hold an icon or small picture and corresponding text box shows Level 1 text. Works best for icons or small pictures with medium-length descriptions."/>
+  <dgm:catLst>
+    <dgm:cat type="icon" pri="500"/>
+  </dgm:catLst>
+  <dgm:sampData useDef="1">
+    <dgm:dataModel>
+      <dgm:ptLst/>
+      <dgm:bg/>
+      <dgm:whole/>
+    </dgm:dataModel>
+  </dgm:sampData>
+  <dgm:styleData useDef="1">
+    <dgm:dataModel>
+      <dgm:ptLst/>
+      <dgm:bg/>
+      <dgm:whole/>
+    </dgm:dataModel>
+  </dgm:styleData>
+  <dgm:clrData useDef="1">
+    <dgm:dataModel>
+      <dgm:ptLst/>
+      <dgm:bg/>
+      <dgm:whole/>
+    </dgm:dataModel>
+  </dgm:clrData>
+  <dgm:layoutNode name="root">
+    <dgm:varLst>
+      <dgm:dir/>
+      <dgm:resizeHandles val="exact"/>
+    </dgm:varLst>
+    <dgm:alg type="sp"/>
+    <dgm:shape xmlns:r="http://schemas.openxmlformats.org/officeDocument/2006/relationships" r:blip="">
+      <dgm:adjLst/>
+    </dgm:shape>
+    <dgm:presOf/>
+    <dgm:choose name="Name0">
+      <dgm:if name="Name1" axis="ch" ptType="node" func="cnt" op="lte" val="3">
+        <dgm:constrLst>
+          <dgm:constr type="w" for="ch" forName="container" refType="w"/>
+          <dgm:constr type="h" for="ch" forName="container" refType="h" fact="0.4"/>
+        </dgm:constrLst>
+      </dgm:if>
+      <dgm:else name="Name2">
+        <dgm:constrLst>
+          <dgm:constr type="w" for="ch" forName="container" refType="w"/>
+          <dgm:constr type="h" for="ch" forName="container" refType="h"/>
+        </dgm:constrLst>
+      </dgm:else>
+    </dgm:choose>
+    <dgm:ruleLst>
+      <dgm:rule type="h" for="ch" forName="container" val="INF" fact="NaN" max="NaN"/>
+    </dgm:ruleLst>
+    <dgm:layoutNode name="container">
+      <dgm:varLst>
+        <dgm:dir/>
+        <dgm:resizeHandles val="exact"/>
+      </dgm:varLst>
+      <dgm:choose name="Name3">
+        <dgm:if name="Name4" axis="self" func="var" arg="dir" op="equ" val="norm">
+          <dgm:alg type="snake">
+            <dgm:param type="grDir" val="tL"/>
+            <dgm:param type="flowDir" val="row"/>
+            <dgm:param type="contDir" val="sameDir"/>
+          </dgm:alg>
+        </dgm:if>
+        <dgm:else name="Name5">
+          <dgm:alg type="snake">
+            <dgm:param type="grDir" val="tR"/>
+            <dgm:param type="flowDir" val="row"/>
+            <dgm:param type="contDir" val="sameDir"/>
+          </dgm:alg>
+        </dgm:else>
+      </dgm:choose>
+      <dgm:shape xmlns:r="http://schemas.openxmlformats.org/officeDocument/2006/relationships" r:blip="">
+        <dgm:adjLst/>
+      </dgm:shape>
+      <dgm:presOf/>
+      <dgm:constrLst>
+        <dgm:constr type="w" for="ch" forName="compNode" refType="w"/>
+        <dgm:constr type="h" for="ch" forName="compNode" refType="w" fact="0.28"/>
+        <dgm:constr type="w" for="ch" forName="sibTrans" refType="w" refFor="ch" refForName="compNode" fact="0.115"/>
+        <dgm:constr type="sp" refType="h" op="equ" fact="0.17"/>
+        <dgm:constr type="primFontSz" for="des" ptType="node" op="equ" val="24"/>
+        <dgm:constr type="h" for="des" forName="compNode" op="equ"/>
+        <dgm:constr type="h" for="des" forName="iconBgRect" op="equ"/>
+      </dgm:constrLst>
+      <dgm:ruleLst>
+        <dgm:rule type="w" for="ch" forName="compNode" val="60" fact="NaN" max="NaN"/>
+      </dgm:ruleLst>
+      <dgm:forEach name="Name6" axis="ch" ptType="node">
+        <dgm:layoutNode name="compNode">
+          <dgm:alg type="composite"/>
+          <dgm:shape xmlns:r="http://schemas.openxmlformats.org/officeDocument/2006/relationships" r:blip="">
+            <dgm:adjLst/>
+          </dgm:shape>
+          <dgm:presOf axis="self"/>
+          <dgm:constrLst>
+            <dgm:constr type="w" for="ch" forName="iconBgRect" refType="w" fact="0.28"/>
+            <dgm:constr type="h" for="ch" forName="iconBgRect" refType="w" refFor="ch" refForName="iconBgRect"/>
+            <dgm:constr type="t" for="ch" forName="iconBgRect"/>
+            <dgm:constr type="l" for="ch" forName="iconBgRect"/>
+            <dgm:constr type="w" for="ch" forName="iconRect" refType="w" refFor="ch" refForName="iconBgRect" fact="0.58"/>
+            <dgm:constr type="h" for="ch" forName="iconRect" refType="w" refFor="ch" refForName="iconRect"/>
+            <dgm:constr type="ctrX" for="ch" forName="iconRect" refType="ctrX" refFor="ch" refForName="iconBgRect"/>
+            <dgm:constr type="ctrY" for="ch" forName="iconRect" refType="ctrY" refFor="ch" refForName="iconBgRect"/>
+            <dgm:constr type="w" for="ch" forName="spaceRect" refType="w" fact="0.06"/>
+            <dgm:constr type="h" for="ch" forName="spaceRect" refType="h" refFor="ch" refForName="iconBgRect"/>
+            <dgm:constr type="t" for="ch" forName="spaceRect" refType="t" refFor="ch" refForName="iconBgRect"/>
+            <dgm:constr type="l" for="ch" forName="spaceRect" refType="r" refFor="ch" refForName="iconBgRect"/>
+            <dgm:constr type="h" for="ch" forName="textRect" refType="h" refFor="ch" refForName="iconBgRect"/>
+            <dgm:constr type="t" for="ch" forName="textRect" refType="t" refFor="ch" refForName="iconBgRect"/>
+            <dgm:constr type="l" for="ch" forName="textRect" refType="r" refFor="ch" refForName="spaceRect"/>
+          </dgm:constrLst>
+          <dgm:ruleLst/>
+          <dgm:layoutNode name="iconBgRect" styleLbl="bgShp">
+            <dgm:alg type="sp"/>
+            <dgm:shape xmlns:r="http://schemas.openxmlformats.org/officeDocument/2006/relationships" type="ellipse" r:blip="">
+              <dgm:adjLst/>
+            </dgm:shape>
+            <dgm:presOf/>
+            <dgm:constrLst/>
+            <dgm:ruleLst/>
+          </dgm:layoutNode>
+          <dgm:layoutNode name="iconRect" styleLbl="node1">
+            <dgm:alg type="sp"/>
+            <dgm:shape xmlns:r="http://schemas.openxmlformats.org/officeDocument/2006/relationships" type="rect" r:blip="" blipPhldr="1">
+              <dgm:adjLst/>
+            </dgm:shape>
+            <dgm:presOf/>
+            <dgm:constrLst/>
+            <dgm:ruleLst/>
+          </dgm:layoutNode>
+          <dgm:layoutNode name="spaceRect">
+            <dgm:alg type="sp"/>
+            <dgm:shape xmlns:r="http://schemas.openxmlformats.org/officeDocument/2006/relationships" r:blip="">
+              <dgm:adjLst/>
+            </dgm:shape>
+            <dgm:presOf/>
+            <dgm:constrLst/>
+            <dgm:ruleLst/>
+          </dgm:layoutNode>
+          <dgm:layoutNode name="textRect" styleLbl="revTx">
+            <dgm:varLst>
+              <dgm:chMax val="1"/>
+              <dgm:chPref val="1"/>
+            </dgm:varLst>
+            <dgm:choose name="Name7">
+              <dgm:if name="Name8" func="var" arg="dir" op="equ" val="norm">
+                <dgm:alg type="tx">
+                  <dgm:param type="txAnchorVert" val="mid"/>
+                  <dgm:param type="parTxLTRAlign" val="l"/>
+                  <dgm:param type="shpTxLTRAlignCh" val="l"/>
+                  <dgm:param type="parTxRTLAlign" val="l"/>
+                  <dgm:param type="shpTxRTLAlignCh" val="l"/>
+                </dgm:alg>
+              </dgm:if>
+              <dgm:else name="Name9">
+                <dgm:alg type="tx">
+                  <dgm:param type="txAnchorVert" val="mid"/>
+                  <dgm:param type="parTxLTRAlign" val="r"/>
+                  <dgm:param type="shpTxLTRAlignCh" val="r"/>
+                  <dgm:param type="parTxRTLAlign" val="r"/>
+                  <dgm:param type="shpTxRTLAlignCh" val="r"/>
+                </dgm:alg>
+              </dgm:else>
+            </dgm:choose>
+            <dgm:shape xmlns:r="http://schemas.openxmlformats.org/officeDocument/2006/relationships" type="rect" r:blip="">
+              <dgm:adjLst/>
+            </dgm:shape>
+            <dgm:presOf axis="self" ptType="node"/>
+            <dgm:constrLst>
+              <dgm:constr type="lMarg"/>
+              <dgm:constr type="rMarg"/>
+              <dgm:constr type="tMarg"/>
+              <dgm:constr type="bMarg"/>
+            </dgm:constrLst>
+            <dgm:ruleLst>
+              <dgm:rule type="primFontSz" val="11" fact="NaN" max="NaN"/>
+            </dgm:ruleLst>
+          </dgm:layoutNode>
+        </dgm:layoutNode>
+        <dgm:forEach name="Name10" axis="followSib" ptType="sibTrans" cnt="1">
+          <dgm:layoutNode name="sibTrans">
+            <dgm:alg type="sp"/>
+            <dgm:shape xmlns:r="http://schemas.openxmlformats.org/officeDocument/2006/relationships" type="rect" r:blip="" hideGeom="1">
+              <dgm:adjLst/>
+            </dgm:shape>
+            <dgm:presOf axis="self"/>
+            <dgm:constrLst/>
+            <dgm:ruleLst/>
+          </dgm:layoutNode>
+        </dgm:forEach>
+      </dgm:forEach>
+    </dgm:layoutNode>
+  </dgm:layoutNode>
+  <dgm:extLst>
+    <a:ext uri="{68A01E43-0DF5-4B5B-8FA6-DAF915123BFB}">
+      <dgm1612:lstStyle xmlns:dgm1612="http://schemas.microsoft.com/office/drawing/2016/12/diagram">
+        <a:lvl1pPr>
+          <a:lnSpc>
+            <a:spcPct val="100000"/>
+          </a:lnSpc>
+        </a:lvl1pPr>
+      </dgm1612:lstStyle>
+    </a:ext>
+  </dgm:extLst>
+</dgm:layoutDef>
+</file>
+
+<file path=ppt/diagrams/quickStyle1.xml><?xml version="1.0" encoding="utf-8"?>
+<dgm:styleDef xmlns:dgm="http://schemas.openxmlformats.org/drawingml/2006/diagram" xmlns:a="http://schemas.openxmlformats.org/drawingml/2006/main" uniqueId="urn:microsoft.com/office/officeart/2005/8/quickstyle/simple1">
+  <dgm:title val=""/>
+  <dgm:desc val=""/>
+  <dgm:catLst>
+    <dgm:cat type="simple" pri="10100"/>
+  </dgm:catLst>
+  <dgm:scene3d>
+    <a:camera prst="orthographicFront"/>
+    <a:lightRig rig="threePt" dir="t"/>
+  </dgm:scene3d>
+  <dgm:styleLbl name="node0">
+    <dgm:scene3d>
+      <a:camera prst="orthographicFront"/>
+      <a:lightRig rig="threePt" dir="t"/>
+    </dgm:scene3d>
+    <dgm:sp3d/>
+    <dgm:txPr/>
+    <dgm:style>
+      <a:lnRef idx="2">
+        <a:scrgbClr r="0" g="0" b="0"/>
+      </a:lnRef>
+      <a:fillRef idx="1">
+        <a:scrgbClr r="0" g="0" b="0"/>
+      </a:fillRef>
+      <a:effectRef idx="0">
+        <a:scrgbClr r="0" g="0" b="0"/>
+      </a:effectRef>
+      <a:fontRef idx="minor">
+        <a:schemeClr val="lt1"/>
+      </a:fontRef>
+    </dgm:style>
+  </dgm:styleLbl>
+  <dgm:styleLbl name="lnNode1">
+    <dgm:scene3d>
+      <a:camera prst="orthographicFront"/>
+      <a:lightRig rig="threePt" dir="t"/>
+    </dgm:scene3d>
+    <dgm:sp3d/>
+    <dgm:txPr/>
+    <dgm:style>
+      <a:lnRef idx="2">
+        <a:scrgbClr r="0" g="0" b="0"/>
+      </a:lnRef>
+      <a:fillRef idx="1">
+        <a:scrgbClr r="0" g="0" b="0"/>
+      </a:fillRef>
+      <a:effectRef idx="0">
+        <a:scrgbClr r="0" g="0" b="0"/>
+      </a:effectRef>
+      <a:fontRef idx="minor">
+        <a:schemeClr val="lt1"/>
+      </a:fontRef>
+    </dgm:style>
+  </dgm:styleLbl>
+  <dgm:styleLbl name="vennNode1">
+    <dgm:scene3d>
+      <a:camera prst="orthographicFront"/>
+      <a:lightRig rig="threePt" dir="t"/>
+    </dgm:scene3d>
+    <dgm:sp3d/>
+    <dgm:txPr/>
+    <dgm:style>
+      <a:lnRef idx="2">
+        <a:scrgbClr r="0" g="0" b="0"/>
+      </a:lnRef>
+      <a:fillRef idx="1">
+        <a:scrgbClr r="0" g="0" b="0"/>
+      </a:fillRef>
+      <a:effectRef idx="0">
+        <a:scrgbClr r="0" g="0" b="0"/>
+      </a:effectRef>
+      <a:fontRef idx="minor">
+        <a:schemeClr val="tx1"/>
+      </a:fontRef>
+    </dgm:style>
+  </dgm:styleLbl>
+  <dgm:styleLbl name="alignNode1">
+    <dgm:scene3d>
+      <a:camera prst="orthographicFront"/>
+      <a:lightRig rig="threePt" dir="t"/>
+    </dgm:scene3d>
+    <dgm:sp3d/>
+    <dgm:txPr/>
+    <dgm:style>
+      <a:lnRef idx="2">
+        <a:scrgbClr r="0" g="0" b="0"/>
+      </a:lnRef>
+      <a:fillRef idx="1">
+        <a:scrgbClr r="0" g="0" b="0"/>
+      </a:fillRef>
+      <a:effectRef idx="0">
+        <a:scrgbClr r="0" g="0" b="0"/>
+      </a:effectRef>
+      <a:fontRef idx="minor">
+        <a:schemeClr val="lt1"/>
+      </a:fontRef>
+    </dgm:style>
+  </dgm:styleLbl>
+  <dgm:styleLbl name="node1">
+    <dgm:scene3d>
+      <a:camera prst="orthographicFront"/>
+      <a:lightRig rig="threePt" dir="t"/>
+    </dgm:scene3d>
+    <dgm:sp3d/>
+    <dgm:txPr/>
+    <dgm:style>
+      <a:lnRef idx="2">
+        <a:scrgbClr r="0" g="0" b="0"/>
+      </a:lnRef>
+      <a:fillRef idx="1">
+        <a:scrgbClr r="0" g="0" b="0"/>
+      </a:fillRef>
+      <a:effectRef idx="0">
+        <a:scrgbClr r="0" g="0" b="0"/>
+      </a:effectRef>
+      <a:fontRef idx="minor">
+        <a:schemeClr val="lt1"/>
+      </a:fontRef>
+    </dgm:style>
+  </dgm:styleLbl>
+  <dgm:styleLbl name="node2">
+    <dgm:scene3d>
+      <a:camera prst="orthographicFront"/>
+      <a:lightRig rig="threePt" dir="t"/>
+    </dgm:scene3d>
+    <dgm:sp3d/>
+    <dgm:txPr/>
+    <dgm:style>
+      <a:lnRef idx="2">
+        <a:scrgbClr r="0" g="0" b="0"/>
+      </a:lnRef>
+      <a:fillRef idx="1">
+        <a:scrgbClr r="0" g="0" b="0"/>
+      </a:fillRef>
+      <a:effectRef idx="0">
+        <a:scrgbClr r="0" g="0" b="0"/>
+      </a:effectRef>
+      <a:fontRef idx="minor">
+        <a:schemeClr val="lt1"/>
+      </a:fontRef>
+    </dgm:style>
+  </dgm:styleLbl>
+  <dgm:styleLbl name="node3">
+    <dgm:scene3d>
+      <a:camera prst="orthographicFront"/>
+      <a:lightRig rig="threePt" dir="t"/>
+    </dgm:scene3d>
+    <dgm:sp3d/>
+    <dgm:txPr/>
+    <dgm:style>
+      <a:lnRef idx="2">
+        <a:scrgbClr r="0" g="0" b="0"/>
+      </a:lnRef>
+      <a:fillRef idx="1">
+        <a:scrgbClr r="0" g="0" b="0"/>
+      </a:fillRef>
+      <a:effectRef idx="0">
+        <a:scrgbClr r="0" g="0" b="0"/>
+      </a:effectRef>
+      <a:fontRef idx="minor">
+        <a:schemeClr val="lt1"/>
+      </a:fontRef>
+    </dgm:style>
+  </dgm:styleLbl>
+  <dgm:styleLbl name="node4">
+    <dgm:scene3d>
+      <a:camera prst="orthographicFront"/>
+      <a:lightRig rig="threePt" dir="t"/>
+    </dgm:scene3d>
+    <dgm:sp3d/>
+    <dgm:txPr/>
+    <dgm:style>
+      <a:lnRef idx="2">
+        <a:scrgbClr r="0" g="0" b="0"/>
+      </a:lnRef>
+      <a:fillRef idx="1">
+        <a:scrgbClr r="0" g="0" b="0"/>
+      </a:fillRef>
+      <a:effectRef idx="0">
+        <a:scrgbClr r="0" g="0" b="0"/>
+      </a:effectRef>
+      <a:fontRef idx="minor">
+        <a:schemeClr val="lt1"/>
+      </a:fontRef>
+    </dgm:style>
+  </dgm:styleLbl>
+  <dgm:styleLbl name="fgImgPlace1">
+    <dgm:scene3d>
+      <a:camera prst="orthographicFront"/>
+      <a:lightRig rig="threePt" dir="t"/>
+    </dgm:scene3d>
+    <dgm:sp3d/>
+    <dgm:txPr/>
+    <dgm:style>
+      <a:lnRef idx="2">
+        <a:scrgbClr r="0" g="0" b="0"/>
+      </a:lnRef>
+      <a:fillRef idx="1">
+        <a:scrgbClr r="0" g="0" b="0"/>
+      </a:fillRef>
+      <a:effectRef idx="0">
+        <a:scrgbClr r="0" g="0" b="0"/>
+      </a:effectRef>
+      <a:fontRef idx="minor"/>
+    </dgm:style>
+  </dgm:styleLbl>
+  <dgm:styleLbl name="alignImgPlace1">
+    <dgm:scene3d>
+      <a:camera prst="orthographicFront"/>
+      <a:lightRig rig="threePt" dir="t"/>
+    </dgm:scene3d>
+    <dgm:sp3d/>
+    <dgm:txPr/>
+    <dgm:style>
+      <a:lnRef idx="2">
+        <a:scrgbClr r="0" g="0" b="0"/>
+      </a:lnRef>
+      <a:fillRef idx="1">
+        <a:scrgbClr r="0" g="0" b="0"/>
+      </a:fillRef>
+      <a:effectRef idx="0">
+        <a:scrgbClr r="0" g="0" b="0"/>
+      </a:effectRef>
+      <a:fontRef idx="minor"/>
+    </dgm:style>
+  </dgm:styleLbl>
+  <dgm:styleLbl name="bgImgPlace1">
+    <dgm:scene3d>
+      <a:camera prst="orthographicFront"/>
+      <a:lightRig rig="threePt" dir="t"/>
+    </dgm:scene3d>
+    <dgm:sp3d/>
+    <dgm:txPr/>
+    <dgm:style>
+      <a:lnRef idx="2">
+        <a:scrgbClr r="0" g="0" b="0"/>
+      </a:lnRef>
+      <a:fillRef idx="1">
+        <a:scrgbClr r="0" g="0" b="0"/>
+      </a:fillRef>
+      <a:effectRef idx="0">
+        <a:scrgbClr r="0" g="0" b="0"/>
+      </a:effectRef>
+      <a:fontRef idx="minor"/>
+    </dgm:style>
+  </dgm:styleLbl>
+  <dgm:styleLbl name="sibTrans2D1">
+    <dgm:scene3d>
+      <a:camera prst="orthographicFront"/>
+      <a:lightRig rig="threePt" dir="t"/>
+    </dgm:scene3d>
+    <dgm:sp3d/>
+    <dgm:txPr/>
+    <dgm:style>
+      <a:lnRef idx="0">
+        <a:scrgbClr r="0" g="0" b="0"/>
+      </a:lnRef>
+      <a:fillRef idx="1">
+        <a:scrgbClr r="0" g="0" b="0"/>
+      </a:fillRef>
+      <a:effectRef idx="0">
+        <a:scrgbClr r="0" g="0" b="0"/>
+      </a:effectRef>
+      <a:fontRef idx="minor">
+        <a:schemeClr val="lt1"/>
+      </a:fontRef>
+    </dgm:style>
+  </dgm:styleLbl>
+  <dgm:styleLbl name="fgSibTrans2D1">
+    <dgm:scene3d>
+      <a:camera prst="orthographicFront"/>
+      <a:lightRig rig="threePt" dir="t"/>
+    </dgm:scene3d>
+    <dgm:sp3d/>
+    <dgm:txPr/>
+    <dgm:style>
+      <a:lnRef idx="0">
+        <a:scrgbClr r="0" g="0" b="0"/>
+      </a:lnRef>
+      <a:fillRef idx="1">
+        <a:scrgbClr r="0" g="0" b="0"/>
+      </a:fillRef>
+      <a:effectRef idx="0">
+        <a:scrgbClr r="0" g="0" b="0"/>
+      </a:effectRef>
+      <a:fontRef idx="minor">
+        <a:schemeClr val="lt1"/>
+      </a:fontRef>
+    </dgm:style>
+  </dgm:styleLbl>
+  <dgm:styleLbl name="bgSibTrans2D1">
+    <dgm:scene3d>
+      <a:camera prst="orthographicFront"/>
+      <a:lightRig rig="threePt" dir="t"/>
+    </dgm:scene3d>
+    <dgm:sp3d/>
+    <dgm:txPr/>
+    <dgm:style>
+      <a:lnRef idx="0">
+        <a:scrgbClr r="0" g="0" b="0"/>
+      </a:lnRef>
+      <a:fillRef idx="1">
+        <a:scrgbClr r="0" g="0" b="0"/>
+      </a:fillRef>
+      <a:effectRef idx="0">
+        <a:scrgbClr r="0" g="0" b="0"/>
+      </a:effectRef>
+      <a:fontRef idx="minor">
+        <a:schemeClr val="lt1"/>
+      </a:fontRef>
+    </dgm:style>
+  </dgm:styleLbl>
+  <dgm:styleLbl name="sibTrans1D1">
+    <dgm:scene3d>
+      <a:camera prst="orthographicFront"/>
+      <a:lightRig rig="threePt" dir="t"/>
+    </dgm:scene3d>
+    <dgm:sp3d/>
+    <dgm:txPr/>
+    <dgm:style>
+      <a:lnRef idx="1">
+        <a:scrgbClr r="0" g="0" b="0"/>
+      </a:lnRef>
+      <a:fillRef idx="0">
+        <a:scrgbClr r="0" g="0" b="0"/>
+      </a:fillRef>
+      <a:effectRef idx="0">
+        <a:scrgbClr r="0" g="0" b="0"/>
+      </a:effectRef>
+      <a:fontRef idx="minor"/>
+    </dgm:style>
+  </dgm:styleLbl>
+  <dgm:styleLbl name="callout">
+    <dgm:scene3d>
+      <a:camera prst="orthographicFront"/>
+      <a:lightRig rig="threePt" dir="t"/>
+    </dgm:scene3d>
+    <dgm:sp3d/>
+    <dgm:txPr/>
+    <dgm:style>
+      <a:lnRef idx="2">
+        <a:scrgbClr r="0" g="0" b="0"/>
+      </a:lnRef>
+      <a:fillRef idx="1">
+        <a:scrgbClr r="0" g="0" b="0"/>
+      </a:fillRef>
+      <a:effectRef idx="0">
+        <a:scrgbClr r="0" g="0" b="0"/>
+      </a:effectRef>
+      <a:fontRef idx="minor"/>
+    </dgm:style>
+  </dgm:styleLbl>
+  <dgm:styleLbl name="asst0">
+    <dgm:scene3d>
+      <a:camera prst="orthographicFront"/>
+      <a:lightRig rig="threePt" dir="t"/>
+    </dgm:scene3d>
+    <dgm:sp3d/>
+    <dgm:txPr/>
+    <dgm:style>
+      <a:lnRef idx="2">
+        <a:scrgbClr r="0" g="0" b="0"/>
+      </a:lnRef>
+      <a:fillRef idx="1">
+        <a:scrgbClr r="0" g="0" b="0"/>
+      </a:fillRef>
+      <a:effectRef idx="0">
+        <a:scrgbClr r="0" g="0" b="0"/>
+      </a:effectRef>
+      <a:fontRef idx="minor">
+        <a:schemeClr val="lt1"/>
+      </a:fontRef>
+    </dgm:style>
+  </dgm:styleLbl>
+  <dgm:styleLbl name="asst1">
+    <dgm:scene3d>
+      <a:camera prst="orthographicFront"/>
+      <a:lightRig rig="threePt" dir="t"/>
+    </dgm:scene3d>
+    <dgm:sp3d/>
+    <dgm:txPr/>
+    <dgm:style>
+      <a:lnRef idx="2">
+        <a:scrgbClr r="0" g="0" b="0"/>
+      </a:lnRef>
+      <a:fillRef idx="1">
+        <a:scrgbClr r="0" g="0" b="0"/>
+      </a:fillRef>
+      <a:effectRef idx="0">
+        <a:scrgbClr r="0" g="0" b="0"/>
+      </a:effectRef>
+      <a:fontRef idx="minor">
+        <a:schemeClr val="lt1"/>
+      </a:fontRef>
+    </dgm:style>
+  </dgm:styleLbl>
+  <dgm:styleLbl name="asst2">
+    <dgm:scene3d>
+      <a:camera prst="orthographicFront"/>
+      <a:lightRig rig="threePt" dir="t"/>
+    </dgm:scene3d>
+    <dgm:sp3d/>
+    <dgm:txPr/>
+    <dgm:style>
+      <a:lnRef idx="2">
+        <a:scrgbClr r="0" g="0" b="0"/>
+      </a:lnRef>
+      <a:fillRef idx="1">
+        <a:scrgbClr r="0" g="0" b="0"/>
+      </a:fillRef>
+      <a:effectRef idx="0">
+        <a:scrgbClr r="0" g="0" b="0"/>
+      </a:effectRef>
+      <a:fontRef idx="minor">
+        <a:schemeClr val="lt1"/>
+      </a:fontRef>
+    </dgm:style>
+  </dgm:styleLbl>
+  <dgm:styleLbl name="asst3">
+    <dgm:scene3d>
+      <a:camera prst="orthographicFront"/>
+      <a:lightRig rig="threePt" dir="t"/>
+    </dgm:scene3d>
+    <dgm:sp3d/>
+    <dgm:txPr/>
+    <dgm:style>
+      <a:lnRef idx="2">
+        <a:scrgbClr r="0" g="0" b="0"/>
+      </a:lnRef>
+      <a:fillRef idx="1">
+        <a:scrgbClr r="0" g="0" b="0"/>
+      </a:fillRef>
+      <a:effectRef idx="0">
+        <a:scrgbClr r="0" g="0" b="0"/>
+      </a:effectRef>
+      <a:fontRef idx="minor">
+        <a:schemeClr val="lt1"/>
+      </a:fontRef>
+    </dgm:style>
+  </dgm:styleLbl>
+  <dgm:styleLbl name="asst4">
+    <dgm:scene3d>
+      <a:camera prst="orthographicFront"/>
+      <a:lightRig rig="threePt" dir="t"/>
+    </dgm:scene3d>
+    <dgm:sp3d/>
+    <dgm:txPr/>
+    <dgm:style>
+      <a:lnRef idx="2">
+        <a:scrgbClr r="0" g="0" b="0"/>
+      </a:lnRef>
+      <a:fillRef idx="1">
+        <a:scrgbClr r="0" g="0" b="0"/>
+      </a:fillRef>
+      <a:effectRef idx="0">
+        <a:scrgbClr r="0" g="0" b="0"/>
+      </a:effectRef>
+      <a:fontRef idx="minor">
+        <a:schemeClr val="lt1"/>
+      </a:fontRef>
+    </dgm:style>
+  </dgm:styleLbl>
+  <dgm:styleLbl name="parChTrans2D1">
+    <dgm:scene3d>
+      <a:camera prst="orthographicFront"/>
+      <a:lightRig rig="threePt" dir="t"/>
+    </dgm:scene3d>
+    <dgm:sp3d/>
+    <dgm:txPr/>
+    <dgm:style>
+      <a:lnRef idx="2">
+        <a:scrgbClr r="0" g="0" b="0"/>
+      </a:lnRef>
+      <a:fillRef idx="1">
+        <a:scrgbClr r="0" g="0" b="0"/>
+      </a:fillRef>
+      <a:effectRef idx="0">
+        <a:scrgbClr r="0" g="0" b="0"/>
+      </a:effectRef>
+      <a:fontRef idx="minor">
+        <a:schemeClr val="lt1"/>
+      </a:fontRef>
+    </dgm:style>
+  </dgm:styleLbl>
+  <dgm:styleLbl name="parChTrans2D2">
+    <dgm:scene3d>
+      <a:camera prst="orthographicFront"/>
+      <a:lightRig rig="threePt" dir="t"/>
+    </dgm:scene3d>
+    <dgm:sp3d/>
+    <dgm:txPr/>
+    <dgm:style>
+      <a:lnRef idx="2">
+        <a:scrgbClr r="0" g="0" b="0"/>
+      </a:lnRef>
+      <a:fillRef idx="1">
+        <a:scrgbClr r="0" g="0" b="0"/>
+      </a:fillRef>
+      <a:effectRef idx="0">
+        <a:scrgbClr r="0" g="0" b="0"/>
+      </a:effectRef>
+      <a:fontRef idx="minor">
+        <a:schemeClr val="lt1"/>
+      </a:fontRef>
+    </dgm:style>
+  </dgm:styleLbl>
+  <dgm:styleLbl name="parChTrans2D3">
+    <dgm:scene3d>
+      <a:camera prst="orthographicFront"/>
+      <a:lightRig rig="threePt" dir="t"/>
+    </dgm:scene3d>
+    <dgm:sp3d/>
+    <dgm:txPr/>
+    <dgm:style>
+      <a:lnRef idx="2">
+        <a:scrgbClr r="0" g="0" b="0"/>
+      </a:lnRef>
+      <a:fillRef idx="1">
+        <a:scrgbClr r="0" g="0" b="0"/>
+      </a:fillRef>
+      <a:effectRef idx="0">
+        <a:scrgbClr r="0" g="0" b="0"/>
+      </a:effectRef>
+      <a:fontRef idx="minor">
+        <a:schemeClr val="lt1"/>
+      </a:fontRef>
+    </dgm:style>
+  </dgm:styleLbl>
+  <dgm:styleLbl name="parChTrans2D4">
+    <dgm:scene3d>
+      <a:camera prst="orthographicFront"/>
+      <a:lightRig rig="threePt" dir="t"/>
+    </dgm:scene3d>
+    <dgm:sp3d/>
+    <dgm:txPr/>
+    <dgm:style>
+      <a:lnRef idx="2">
+        <a:scrgbClr r="0" g="0" b="0"/>
+      </a:lnRef>
+      <a:fillRef idx="1">
+        <a:scrgbClr r="0" g="0" b="0"/>
+      </a:fillRef>
+      <a:effectRef idx="0">
+        <a:scrgbClr r="0" g="0" b="0"/>
+      </a:effectRef>
+      <a:fontRef idx="minor">
+        <a:schemeClr val="lt1"/>
+      </a:fontRef>
+    </dgm:style>
+  </dgm:styleLbl>
+  <dgm:styleLbl name="parChTrans1D1">
+    <dgm:scene3d>
+      <a:camera prst="orthographicFront"/>
+      <a:lightRig rig="threePt" dir="t"/>
+    </dgm:scene3d>
+    <dgm:sp3d/>
+    <dgm:txPr/>
+    <dgm:style>
+      <a:lnRef idx="2">
+        <a:scrgbClr r="0" g="0" b="0"/>
+      </a:lnRef>
+      <a:fillRef idx="0">
+        <a:scrgbClr r="0" g="0" b="0"/>
+      </a:fillRef>
+      <a:effectRef idx="0">
+        <a:scrgbClr r="0" g="0" b="0"/>
+      </a:effectRef>
+      <a:fontRef idx="minor"/>
+    </dgm:style>
+  </dgm:styleLbl>
+  <dgm:styleLbl name="parChTrans1D2">
+    <dgm:scene3d>
+      <a:camera prst="orthographicFront"/>
+      <a:lightRig rig="threePt" dir="t"/>
+    </dgm:scene3d>
+    <dgm:sp3d/>
+    <dgm:txPr/>
+    <dgm:style>
+      <a:lnRef idx="2">
+        <a:scrgbClr r="0" g="0" b="0"/>
+      </a:lnRef>
+      <a:fillRef idx="0">
+        <a:scrgbClr r="0" g="0" b="0"/>
+      </a:fillRef>
+      <a:effectRef idx="0">
+        <a:scrgbClr r="0" g="0" b="0"/>
+      </a:effectRef>
+      <a:fontRef idx="minor"/>
+    </dgm:style>
+  </dgm:styleLbl>
+  <dgm:styleLbl name="parChTrans1D3">
+    <dgm:scene3d>
+      <a:camera prst="orthographicFront"/>
+      <a:lightRig rig="threePt" dir="t"/>
+    </dgm:scene3d>
+    <dgm:sp3d/>
+    <dgm:txPr/>
+    <dgm:style>
+      <a:lnRef idx="2">
+        <a:scrgbClr r="0" g="0" b="0"/>
+      </a:lnRef>
+      <a:fillRef idx="0">
+        <a:scrgbClr r="0" g="0" b="0"/>
+      </a:fillRef>
+      <a:effectRef idx="0">
+        <a:scrgbClr r="0" g="0" b="0"/>
+      </a:effectRef>
+      <a:fontRef idx="minor"/>
+    </dgm:style>
+  </dgm:styleLbl>
+  <dgm:styleLbl name="parChTrans1D4">
+    <dgm:scene3d>
+      <a:camera prst="orthographicFront"/>
+      <a:lightRig rig="threePt" dir="t"/>
+    </dgm:scene3d>
+    <dgm:sp3d/>
+    <dgm:txPr/>
+    <dgm:style>
+      <a:lnRef idx="2">
+        <a:scrgbClr r="0" g="0" b="0"/>
+      </a:lnRef>
+      <a:fillRef idx="0">
+        <a:scrgbClr r="0" g="0" b="0"/>
+      </a:fillRef>
+      <a:effectRef idx="0">
+        <a:scrgbClr r="0" g="0" b="0"/>
+      </a:effectRef>
+      <a:fontRef idx="minor"/>
+    </dgm:style>
+  </dgm:styleLbl>
+  <dgm:styleLbl name="fgAcc1">
+    <dgm:scene3d>
+      <a:camera prst="orthographicFront"/>
+      <a:lightRig rig="threePt" dir="t"/>
+    </dgm:scene3d>
+    <dgm:sp3d/>
+    <dgm:txPr/>
+    <dgm:style>
+      <a:lnRef idx="2">
+        <a:scrgbClr r="0" g="0" b="0"/>
+      </a:lnRef>
+      <a:fillRef idx="1">
+        <a:scrgbClr r="0" g="0" b="0"/>
+      </a:fillRef>
+      <a:effectRef idx="0">
+        <a:scrgbClr r="0" g="0" b="0"/>
+      </a:effectRef>
+      <a:fontRef idx="minor"/>
+    </dgm:style>
+  </dgm:styleLbl>
+  <dgm:styleLbl name="conFgAcc1">
+    <dgm:scene3d>
+      <a:camera prst="orthographicFront"/>
+      <a:lightRig rig="threePt" dir="t"/>
+    </dgm:scene3d>
+    <dgm:sp3d/>
+    <dgm:txPr/>
+    <dgm:style>
+      <a:lnRef idx="2">
+        <a:scrgbClr r="0" g="0" b="0"/>
+      </a:lnRef>
+      <a:fillRef idx="1">
+        <a:scrgbClr r="0" g="0" b="0"/>
+      </a:fillRef>
+      <a:effectRef idx="0">
+        <a:scrgbClr r="0" g="0" b="0"/>
+      </a:effectRef>
+      <a:fontRef idx="minor"/>
+    </dgm:style>
+  </dgm:styleLbl>
+  <dgm:styleLbl name="alignAcc1">
+    <dgm:scene3d>
+      <a:camera prst="orthographicFront"/>
+      <a:lightRig rig="threePt" dir="t"/>
+    </dgm:scene3d>
+    <dgm:sp3d/>
+    <dgm:txPr/>
+    <dgm:style>
+      <a:lnRef idx="2">
+        <a:scrgbClr r="0" g="0" b="0"/>
+      </a:lnRef>
+      <a:fillRef idx="1">
+        <a:scrgbClr r="0" g="0" b="0"/>
+      </a:fillRef>
+      <a:effectRef idx="0">
+        <a:scrgbClr r="0" g="0" b="0"/>
+      </a:effectRef>
+      <a:fontRef idx="minor"/>
+    </dgm:style>
+  </dgm:styleLbl>
+  <dgm:styleLbl name="trAlignAcc1">
+    <dgm:scene3d>
+      <a:camera prst="orthographicFront"/>
+      <a:lightRig rig="threePt" dir="t"/>
+    </dgm:scene3d>
+    <dgm:sp3d/>
+    <dgm:txPr/>
+    <dgm:style>
+      <a:lnRef idx="1">
+        <a:scrgbClr r="0" g="0" b="0"/>
+      </a:lnRef>
+      <a:fillRef idx="1">
+        <a:scrgbClr r="0" g="0" b="0"/>
+      </a:fillRef>
+      <a:effectRef idx="0">
+        <a:scrgbClr r="0" g="0" b="0"/>
+      </a:effectRef>
+      <a:fontRef idx="minor"/>
+    </dgm:style>
+  </dgm:styleLbl>
+  <dgm:styleLbl name="bgAcc1">
+    <dgm:scene3d>
+      <a:camera prst="orthographicFront"/>
+      <a:lightRig rig="threePt" dir="t"/>
+    </dgm:scene3d>
+    <dgm:sp3d/>
+    <dgm:txPr/>
+    <dgm:style>
+      <a:lnRef idx="2">
+        <a:scrgbClr r="0" g="0" b="0"/>
+      </a:lnRef>
+      <a:fillRef idx="1">
+        <a:scrgbClr r="0" g="0" b="0"/>
+      </a:fillRef>
+      <a:effectRef idx="0">
+        <a:scrgbClr r="0" g="0" b="0"/>
+      </a:effectRef>
+      <a:fontRef idx="minor"/>
+    </dgm:style>
+  </dgm:styleLbl>
+  <dgm:styleLbl name="solidFgAcc1">
+    <dgm:scene3d>
+      <a:camera prst="orthographicFront"/>
+      <a:lightRig rig="threePt" dir="t"/>
+    </dgm:scene3d>
+    <dgm:sp3d/>
+    <dgm:txPr/>
+    <dgm:style>
+      <a:lnRef idx="2">
+        <a:scrgbClr r="0" g="0" b="0"/>
+      </a:lnRef>
+      <a:fillRef idx="1">
+        <a:scrgbClr r="0" g="0" b="0"/>
+      </a:fillRef>
+      <a:effectRef idx="0">
+        <a:scrgbClr r="0" g="0" b="0"/>
+      </a:effectRef>
+      <a:fontRef idx="minor"/>
+    </dgm:style>
+  </dgm:styleLbl>
+  <dgm:styleLbl name="solidAlignAcc1">
+    <dgm:scene3d>
+      <a:camera prst="orthographicFront"/>
+      <a:lightRig rig="threePt" dir="t"/>
+    </dgm:scene3d>
+    <dgm:sp3d/>
+    <dgm:txPr/>
+    <dgm:style>
+      <a:lnRef idx="2">
+        <a:scrgbClr r="0" g="0" b="0"/>
+      </a:lnRef>
+      <a:fillRef idx="1">
+        <a:scrgbClr r="0" g="0" b="0"/>
+      </a:fillRef>
+      <a:effectRef idx="0">
+        <a:scrgbClr r="0" g="0" b="0"/>
+      </a:effectRef>
+      <a:fontRef idx="minor"/>
+    </dgm:style>
+  </dgm:styleLbl>
+  <dgm:styleLbl name="solidBgAcc1">
+    <dgm:scene3d>
+      <a:camera prst="orthographicFront"/>
+      <a:lightRig rig="threePt" dir="t"/>
+    </dgm:scene3d>
+    <dgm:sp3d/>
+    <dgm:txPr/>
+    <dgm:style>
+      <a:lnRef idx="2">
+        <a:scrgbClr r="0" g="0" b="0"/>
+      </a:lnRef>
+      <a:fillRef idx="1">
+        <a:scrgbClr r="0" g="0" b="0"/>
+      </a:fillRef>
+      <a:effectRef idx="0">
+        <a:scrgbClr r="0" g="0" b="0"/>
+      </a:effectRef>
+      <a:fontRef idx="minor"/>
+    </dgm:style>
+  </dgm:styleLbl>
+  <dgm:styleLbl name="fgAccFollowNode1">
+    <dgm:scene3d>
+      <a:camera prst="orthographicFront"/>
+      <a:lightRig rig="threePt" dir="t"/>
+    </dgm:scene3d>
+    <dgm:sp3d/>
+    <dgm:txPr/>
+    <dgm:style>
+      <a:lnRef idx="2">
+        <a:scrgbClr r="0" g="0" b="0"/>
+      </a:lnRef>
+      <a:fillRef idx="1">
+        <a:scrgbClr r="0" g="0" b="0"/>
+      </a:fillRef>
+      <a:effectRef idx="0">
+        <a:scrgbClr r="0" g="0" b="0"/>
+      </a:effectRef>
+      <a:fontRef idx="minor"/>
+    </dgm:style>
+  </dgm:styleLbl>
+  <dgm:styleLbl name="alignAccFollowNode1">
+    <dgm:scene3d>
+      <a:camera prst="orthographicFront"/>
+      <a:lightRig rig="threePt" dir="t"/>
+    </dgm:scene3d>
+    <dgm:sp3d/>
+    <dgm:txPr/>
+    <dgm:style>
+      <a:lnRef idx="2">
+        <a:scrgbClr r="0" g="0" b="0"/>
+      </a:lnRef>
+      <a:fillRef idx="1">
+        <a:scrgbClr r="0" g="0" b="0"/>
+      </a:fillRef>
+      <a:effectRef idx="0">
+        <a:scrgbClr r="0" g="0" b="0"/>
+      </a:effectRef>
+      <a:fontRef idx="minor"/>
+    </dgm:style>
+  </dgm:styleLbl>
+  <dgm:styleLbl name="bgAccFollowNode1">
+    <dgm:scene3d>
+      <a:camera prst="orthographicFront"/>
+      <a:lightRig rig="threePt" dir="t"/>
+    </dgm:scene3d>
+    <dgm:sp3d/>
+    <dgm:txPr/>
+    <dgm:style>
+      <a:lnRef idx="2">
+        <a:scrgbClr r="0" g="0" b="0"/>
+      </a:lnRef>
+      <a:fillRef idx="1">
+        <a:scrgbClr r="0" g="0" b="0"/>
+      </a:fillRef>
+      <a:effectRef idx="0">
+        <a:scrgbClr r="0" g="0" b="0"/>
+      </a:effectRef>
+      <a:fontRef idx="minor"/>
+    </dgm:style>
+  </dgm:styleLbl>
+  <dgm:styleLbl name="fgAcc0">
+    <dgm:scene3d>
+      <a:camera prst="orthographicFront"/>
+      <a:lightRig rig="threePt" dir="t"/>
+    </dgm:scene3d>
+    <dgm:sp3d/>
+    <dgm:txPr/>
+    <dgm:style>
+      <a:lnRef idx="2">
+        <a:scrgbClr r="0" g="0" b="0"/>
+      </a:lnRef>
+      <a:fillRef idx="1">
+        <a:scrgbClr r="0" g="0" b="0"/>
+      </a:fillRef>
+      <a:effectRef idx="0">
+        <a:scrgbClr r="0" g="0" b="0"/>
+      </a:effectRef>
+      <a:fontRef idx="minor"/>
+    </dgm:style>
+  </dgm:styleLbl>
+  <dgm:styleLbl name="fgAcc2">
+    <dgm:scene3d>
+      <a:camera prst="orthographicFront"/>
+      <a:lightRig rig="threePt" dir="t"/>
+    </dgm:scene3d>
+    <dgm:sp3d/>
+    <dgm:txPr/>
+    <dgm:style>
+      <a:lnRef idx="2">
+        <a:scrgbClr r="0" g="0" b="0"/>
+      </a:lnRef>
+      <a:fillRef idx="1">
+        <a:scrgbClr r="0" g="0" b="0"/>
+      </a:fillRef>
+      <a:effectRef idx="0">
+        <a:scrgbClr r="0" g="0" b="0"/>
+      </a:effectRef>
+      <a:fontRef idx="minor"/>
+    </dgm:style>
+  </dgm:styleLbl>
+  <dgm:styleLbl name="fgAcc3">
+    <dgm:scene3d>
+      <a:camera prst="orthographicFront"/>
+      <a:lightRig rig="threePt" dir="t"/>
+    </dgm:scene3d>
+    <dgm:sp3d/>
+    <dgm:txPr/>
+    <dgm:style>
+      <a:lnRef idx="2">
+        <a:scrgbClr r="0" g="0" b="0"/>
+      </a:lnRef>
+      <a:fillRef idx="1">
+        <a:scrgbClr r="0" g="0" b="0"/>
+      </a:fillRef>
+      <a:effectRef idx="0">
+        <a:scrgbClr r="0" g="0" b="0"/>
+      </a:effectRef>
+      <a:fontRef idx="minor"/>
+    </dgm:style>
+  </dgm:styleLbl>
+  <dgm:styleLbl name="fgAcc4">
+    <dgm:scene3d>
+      <a:camera prst="orthographicFront"/>
+      <a:lightRig rig="threePt" dir="t"/>
+    </dgm:scene3d>
+    <dgm:sp3d/>
+    <dgm:txPr/>
+    <dgm:style>
+      <a:lnRef idx="2">
+        <a:scrgbClr r="0" g="0" b="0"/>
+      </a:lnRef>
+      <a:fillRef idx="1">
+        <a:scrgbClr r="0" g="0" b="0"/>
+      </a:fillRef>
+      <a:effectRef idx="0">
+        <a:scrgbClr r="0" g="0" b="0"/>
+      </a:effectRef>
+      <a:fontRef idx="minor"/>
+    </dgm:style>
+  </dgm:styleLbl>
+  <dgm:styleLbl name="bgShp">
+    <dgm:scene3d>
+      <a:camera prst="orthographicFront"/>
+      <a:lightRig rig="threePt" dir="t"/>
+    </dgm:scene3d>
+    <dgm:sp3d/>
+    <dgm:txPr/>
+    <dgm:style>
+      <a:lnRef idx="0">
+        <a:scrgbClr r="0" g="0" b="0"/>
+      </a:lnRef>
+      <a:fillRef idx="1">
+        <a:scrgbClr r="0" g="0" b="0"/>
+      </a:fillRef>
+      <a:effectRef idx="0">
+        <a:scrgbClr r="0" g="0" b="0"/>
+      </a:effectRef>
+      <a:fontRef idx="minor"/>
+    </dgm:style>
+  </dgm:styleLbl>
+  <dgm:styleLbl name="dkBgShp">
+    <dgm:scene3d>
+      <a:camera prst="orthographicFront"/>
+      <a:lightRig rig="threePt" dir="t"/>
+    </dgm:scene3d>
+    <dgm:sp3d/>
+    <dgm:txPr/>
+    <dgm:style>
+      <a:lnRef idx="0">
+        <a:scrgbClr r="0" g="0" b="0"/>
+      </a:lnRef>
+      <a:fillRef idx="1">
+        <a:scrgbClr r="0" g="0" b="0"/>
+      </a:fillRef>
+      <a:effectRef idx="0">
+        <a:scrgbClr r="0" g="0" b="0"/>
+      </a:effectRef>
+      <a:fontRef idx="minor"/>
+    </dgm:style>
+  </dgm:styleLbl>
+  <dgm:styleLbl name="trBgShp">
+    <dgm:scene3d>
+      <a:camera prst="orthographicFront"/>
+      <a:lightRig rig="threePt" dir="t"/>
+    </dgm:scene3d>
+    <dgm:sp3d/>
+    <dgm:txPr/>
+    <dgm:style>
+      <a:lnRef idx="0">
+        <a:scrgbClr r="0" g="0" b="0"/>
+      </a:lnRef>
+      <a:fillRef idx="1">
+        <a:scrgbClr r="0" g="0" b="0"/>
+      </a:fillRef>
+      <a:effectRef idx="0">
+        <a:scrgbClr r="0" g="0" b="0"/>
+      </a:effectRef>
+      <a:fontRef idx="minor"/>
+    </dgm:style>
+  </dgm:styleLbl>
+  <dgm:styleLbl name="fgShp">
+    <dgm:scene3d>
+      <a:camera prst="orthographicFront"/>
+      <a:lightRig rig="threePt" dir="t"/>
+    </dgm:scene3d>
+    <dgm:sp3d/>
+    <dgm:txPr/>
+    <dgm:style>
+      <a:lnRef idx="2">
+        <a:scrgbClr r="0" g="0" b="0"/>
+      </a:lnRef>
+      <a:fillRef idx="1">
+        <a:scrgbClr r="0" g="0" b="0"/>
+      </a:fillRef>
+      <a:effectRef idx="0">
+        <a:scrgbClr r="0" g="0" b="0"/>
+      </a:effectRef>
+      <a:fontRef idx="minor"/>
+    </dgm:style>
+  </dgm:styleLbl>
+  <dgm:styleLbl name="revTx">
+    <dgm:scene3d>
+      <a:camera prst="orthographicFront"/>
+      <a:lightRig rig="threePt" dir="t"/>
+    </dgm:scene3d>
+    <dgm:sp3d/>
+    <dgm:txPr/>
+    <dgm:style>
+      <a:lnRef idx="0">
+        <a:scrgbClr r="0" g="0" b="0"/>
+      </a:lnRef>
+      <a:fillRef idx="0">
+        <a:scrgbClr r="0" g="0" b="0"/>
+      </a:fillRef>
+      <a:effectRef idx="0">
+        <a:scrgbClr r="0" g="0" b="0"/>
+      </a:effectRef>
+      <a:fontRef idx="minor"/>
+    </dgm:style>
+  </dgm:styleLbl>
+</dgm:styleDef>
 </file>
 
 <file path=ppt/slideLayouts/slideLayout1.xml><?xml version="1.0" encoding="utf-8"?>
@@ -2996,12 +5566,43 @@
           <a:chExt cx="0" cy="0"/>
         </a:xfrm>
       </p:grpSpPr>
-      <p:sp useBgFill="1">
-        <p:nvSpPr>
-          <p:cNvPr id="17" name="Rectangle 16">
+      <p:pic>
+        <p:nvPicPr>
+          <p:cNvPr id="19" name="Picture 18" descr="Codes on papers">
             <a:extLst>
               <a:ext uri="{FF2B5EF4-FFF2-40B4-BE49-F238E27FC236}">
-                <a16:creationId xmlns:a16="http://schemas.microsoft.com/office/drawing/2014/main" id="{8555C5B3-193A-4749-9AFD-682E53CDDE8F}"/>
+                <a16:creationId xmlns:a16="http://schemas.microsoft.com/office/drawing/2014/main" id="{D4716759-E5C6-13A9-5CD4-D2CF7D5A4D3D}"/>
+              </a:ext>
+            </a:extLst>
+          </p:cNvPr>
+          <p:cNvPicPr>
+            <a:picLocks noChangeAspect="1"/>
+          </p:cNvPicPr>
+          <p:nvPr/>
+        </p:nvPicPr>
+        <p:blipFill>
+          <a:blip r:embed="rId2">
+            <a:alphaModFix/>
+          </a:blip>
+          <a:srcRect t="3608" b="12122"/>
+          <a:stretch/>
+        </p:blipFill>
+        <p:spPr>
+          <a:xfrm>
+            <a:off x="20" y="10"/>
+            <a:ext cx="12191979" cy="6857990"/>
+          </a:xfrm>
+          <a:prstGeom prst="rect">
+            <a:avLst/>
+          </a:prstGeom>
+        </p:spPr>
+      </p:pic>
+      <p:sp>
+        <p:nvSpPr>
+          <p:cNvPr id="20" name="Rectangle 19">
+            <a:extLst>
+              <a:ext uri="{FF2B5EF4-FFF2-40B4-BE49-F238E27FC236}">
+                <a16:creationId xmlns:a16="http://schemas.microsoft.com/office/drawing/2014/main" id="{EB0222B5-B739-82A9-5CCC-C5585AE12A69}"/>
               </a:ext>
               <a:ext uri="{C183D7F6-B498-43B3-948B-1728B52AA6E4}">
                 <adec:decorative xmlns:adec="http://schemas.microsoft.com/office/drawing/2017/decorative" val="1"/>
@@ -3020,101 +5621,33 @@
           </p:nvPr>
         </p:nvSpPr>
         <p:spPr>
-          <a:xfrm>
-            <a:off x="0" y="0"/>
-            <a:ext cx="12192000" cy="6858000"/>
+          <a:xfrm rot="5400000">
+            <a:off x="4344663" y="-4344657"/>
+            <a:ext cx="3512260" cy="12201589"/>
           </a:xfrm>
           <a:prstGeom prst="rect">
             <a:avLst/>
           </a:prstGeom>
-          <a:ln w="12700" cap="flat" cmpd="sng" algn="ctr">
-            <a:noFill/>
-            <a:prstDash val="solid"/>
-            <a:miter lim="800000"/>
-          </a:ln>
-          <a:effectLst/>
-          <a:extLst>
-            <a:ext uri="{91240B29-F687-4F45-9708-019B960494DF}">
-              <a14:hiddenLine xmlns:a14="http://schemas.microsoft.com/office/drawing/2010/main" w="12700" cap="flat" cmpd="sng" algn="ctr">
-                <a:solidFill>
-                  <a:schemeClr val="accent1">
-                    <a:shade val="50000"/>
-                  </a:schemeClr>
-                </a:solidFill>
-                <a:prstDash val="solid"/>
-                <a:miter lim="800000"/>
-              </a14:hiddenLine>
-            </a:ext>
-          </a:extLst>
-        </p:spPr>
-        <p:style>
-          <a:lnRef idx="2">
-            <a:schemeClr val="accent1">
-              <a:shade val="50000"/>
-            </a:schemeClr>
-          </a:lnRef>
-          <a:fillRef idx="1">
-            <a:schemeClr val="accent1"/>
-          </a:fillRef>
-          <a:effectRef idx="0">
-            <a:schemeClr val="accent1"/>
-          </a:effectRef>
-          <a:fontRef idx="minor">
-            <a:schemeClr val="lt1"/>
-          </a:fontRef>
-        </p:style>
-        <p:txBody>
-          <a:bodyPr rtlCol="0" anchor="ctr"/>
-          <a:lstStyle/>
-          <a:p>
-            <a:pPr algn="ctr"/>
-            <a:endParaRPr lang="en-US" dirty="0"/>
-          </a:p>
-        </p:txBody>
-      </p:sp>
-      <p:sp>
-        <p:nvSpPr>
-          <p:cNvPr id="19" name="Rectangle 18">
-            <a:extLst>
-              <a:ext uri="{FF2B5EF4-FFF2-40B4-BE49-F238E27FC236}">
-                <a16:creationId xmlns:a16="http://schemas.microsoft.com/office/drawing/2014/main" id="{2EAE06A6-F76A-41C9-827A-C561B004485C}"/>
-              </a:ext>
-              <a:ext uri="{C183D7F6-B498-43B3-948B-1728B52AA6E4}">
-                <adec:decorative xmlns:adec="http://schemas.microsoft.com/office/drawing/2017/decorative" val="1"/>
-              </a:ext>
-            </a:extLst>
-          </p:cNvPr>
-          <p:cNvSpPr>
-            <a:spLocks noGrp="1" noRot="1" noChangeAspect="1" noMove="1" noResize="1" noEditPoints="1" noAdjustHandles="1" noChangeArrowheads="1" noChangeShapeType="1" noTextEdit="1"/>
-          </p:cNvSpPr>
-          <p:nvPr>
-            <p:extLst>
-              <p:ext uri="{386F3935-93C4-4BCD-93E2-E3B085C9AB24}">
-                <p16:designElem xmlns:p16="http://schemas.microsoft.com/office/powerpoint/2015/main" val="1"/>
-              </p:ext>
-            </p:extLst>
-          </p:nvPr>
-        </p:nvSpPr>
-        <p:spPr>
-          <a:xfrm flipH="1">
-            <a:off x="0" y="-3"/>
-            <a:ext cx="12192000" cy="6858000"/>
-          </a:xfrm>
-          <a:prstGeom prst="rect">
-            <a:avLst/>
-          </a:prstGeom>
-          <a:gradFill>
+          <a:gradFill flip="none" rotWithShape="1">
             <a:gsLst>
-              <a:gs pos="0">
-                <a:srgbClr val="000000"/>
+              <a:gs pos="10000">
+                <a:srgbClr val="000000">
+                  <a:alpha val="0"/>
+                </a:srgbClr>
+              </a:gs>
+              <a:gs pos="66000">
+                <a:srgbClr val="000000">
+                  <a:alpha val="46000"/>
+                </a:srgbClr>
               </a:gs>
               <a:gs pos="100000">
-                <a:schemeClr val="accent1">
-                  <a:lumMod val="75000"/>
-                </a:schemeClr>
+                <a:srgbClr val="000000">
+                  <a:alpha val="60000"/>
+                </a:srgbClr>
               </a:gs>
             </a:gsLst>
-            <a:lin ang="6600000" scaled="0"/>
+            <a:lin ang="10800000" scaled="1"/>
+            <a:tileRect/>
           </a:gradFill>
           <a:ln>
             <a:noFill/>
@@ -3141,7 +5674,73 @@
           <a:lstStyle/>
           <a:p>
             <a:pPr algn="ctr"/>
-            <a:endParaRPr lang="en-US" dirty="0"/>
+            <a:endParaRPr lang="en-US"/>
+          </a:p>
+        </p:txBody>
+      </p:sp>
+      <p:sp>
+        <p:nvSpPr>
+          <p:cNvPr id="2" name="Title 1">
+            <a:extLst>
+              <a:ext uri="{FF2B5EF4-FFF2-40B4-BE49-F238E27FC236}">
+                <a16:creationId xmlns:a16="http://schemas.microsoft.com/office/drawing/2014/main" id="{94E4490F-7A7B-FD4F-64E0-84D68EECC179}"/>
+              </a:ext>
+            </a:extLst>
+          </p:cNvPr>
+          <p:cNvSpPr>
+            <a:spLocks noGrp="1"/>
+          </p:cNvSpPr>
+          <p:nvPr>
+            <p:ph type="ctrTitle"/>
+          </p:nvPr>
+        </p:nvSpPr>
+        <p:spPr>
+          <a:xfrm>
+            <a:off x="762000" y="1137434"/>
+            <a:ext cx="7800660" cy="2091541"/>
+          </a:xfrm>
+        </p:spPr>
+        <p:txBody>
+          <a:bodyPr anchor="t">
+            <a:normAutofit/>
+          </a:bodyPr>
+          <a:lstStyle/>
+          <a:p>
+            <a:pPr algn="l"/>
+            <a:r>
+              <a:rPr lang="en-US" sz="4000" b="1" dirty="0">
+                <a:solidFill>
+                  <a:srgbClr val="FFFFFF"/>
+                </a:solidFill>
+                <a:latin typeface="Helvetica" panose="020B0604020202020204" pitchFamily="34" charset="0"/>
+                <a:cs typeface="Helvetica" panose="020B0604020202020204" pitchFamily="34" charset="0"/>
+              </a:rPr>
+              <a:t>Apple Stock Price Prediction Visualizations and Results</a:t>
+            </a:r>
+            <a:br>
+              <a:rPr lang="en-US" sz="4000" b="1" dirty="0">
+                <a:solidFill>
+                  <a:srgbClr val="FFFFFF"/>
+                </a:solidFill>
+              </a:rPr>
+            </a:br>
+            <a:br>
+              <a:rPr lang="en-US" sz="4000" b="1" dirty="0">
+                <a:solidFill>
+                  <a:srgbClr val="FFFFFF"/>
+                </a:solidFill>
+              </a:rPr>
+            </a:br>
+            <a:r>
+              <a:rPr lang="en-US" sz="2000" b="1" dirty="0">
+                <a:solidFill>
+                  <a:srgbClr val="FFFFFF"/>
+                </a:solidFill>
+                <a:latin typeface="Helvetica" panose="020B0604020202020204" pitchFamily="34" charset="0"/>
+                <a:cs typeface="Helvetica" panose="020B0604020202020204" pitchFamily="34" charset="0"/>
+              </a:rPr>
+              <a:t>by Emily Buchanan-Schnepp</a:t>
+            </a:r>
           </a:p>
         </p:txBody>
       </p:sp>
@@ -3150,7 +5749,7 @@
           <p:cNvPr id="21" name="Rectangle 20">
             <a:extLst>
               <a:ext uri="{FF2B5EF4-FFF2-40B4-BE49-F238E27FC236}">
-                <a16:creationId xmlns:a16="http://schemas.microsoft.com/office/drawing/2014/main" id="{89F9D4E8-0639-444B-949B-9518585061AF}"/>
+                <a16:creationId xmlns:a16="http://schemas.microsoft.com/office/drawing/2014/main" id="{5BE23E75-E7E9-4D9F-6D25-5512363F8621}"/>
               </a:ext>
               <a:ext uri="{C183D7F6-B498-43B3-948B-1728B52AA6E4}">
                 <adec:decorative xmlns:adec="http://schemas.microsoft.com/office/drawing/2017/decorative" val="1"/>
@@ -3169,28 +5768,33 @@
           </p:nvPr>
         </p:nvSpPr>
         <p:spPr>
-          <a:xfrm flipH="1">
-            <a:off x="480861" y="0"/>
-            <a:ext cx="7661934" cy="6858000"/>
+          <a:xfrm rot="16200000">
+            <a:off x="4878570" y="-449383"/>
+            <a:ext cx="2425271" cy="12201588"/>
           </a:xfrm>
           <a:prstGeom prst="rect">
             <a:avLst/>
           </a:prstGeom>
-          <a:gradFill>
+          <a:gradFill flip="none" rotWithShape="1">
             <a:gsLst>
-              <a:gs pos="0">
-                <a:schemeClr val="accent1">
-                  <a:lumMod val="75000"/>
-                  <a:alpha val="45000"/>
-                </a:schemeClr>
+              <a:gs pos="10000">
+                <a:srgbClr val="000000">
+                  <a:alpha val="0"/>
+                </a:srgbClr>
+              </a:gs>
+              <a:gs pos="66000">
+                <a:srgbClr val="000000">
+                  <a:alpha val="35000"/>
+                </a:srgbClr>
               </a:gs>
               <a:gs pos="100000">
                 <a:srgbClr val="000000">
-                  <a:alpha val="29000"/>
+                  <a:alpha val="45000"/>
                 </a:srgbClr>
               </a:gs>
             </a:gsLst>
-            <a:lin ang="12000000" scaled="0"/>
+            <a:lin ang="10800000" scaled="1"/>
+            <a:tileRect/>
           </a:gradFill>
           <a:ln>
             <a:noFill/>
@@ -3217,25 +5821,25 @@
           <a:lstStyle/>
           <a:p>
             <a:pPr algn="ctr"/>
-            <a:endParaRPr lang="en-US" dirty="0"/>
-          </a:p>
-        </p:txBody>
-      </p:sp>
-      <p:sp>
-        <p:nvSpPr>
-          <p:cNvPr id="23" name="Rectangle 22">
+            <a:endParaRPr lang="en-US"/>
+          </a:p>
+        </p:txBody>
+      </p:sp>
+      <p:cxnSp>
+        <p:nvCxnSpPr>
+          <p:cNvPr id="22" name="Straight Connector 21">
             <a:extLst>
               <a:ext uri="{FF2B5EF4-FFF2-40B4-BE49-F238E27FC236}">
-                <a16:creationId xmlns:a16="http://schemas.microsoft.com/office/drawing/2014/main" id="{7E3DA7A2-ED70-4BBA-AB72-00AD461FA405}"/>
+                <a16:creationId xmlns:a16="http://schemas.microsoft.com/office/drawing/2014/main" id="{61B115DB-65EB-3FC3-7284-CFDF4ADC60B6}"/>
               </a:ext>
               <a:ext uri="{C183D7F6-B498-43B3-948B-1728B52AA6E4}">
                 <adec:decorative xmlns:adec="http://schemas.microsoft.com/office/drawing/2017/decorative" val="1"/>
               </a:ext>
             </a:extLst>
           </p:cNvPr>
-          <p:cNvSpPr>
-            <a:spLocks noGrp="1" noRot="1" noChangeAspect="1" noMove="1" noResize="1" noEditPoints="1" noAdjustHandles="1" noChangeArrowheads="1" noChangeShapeType="1" noTextEdit="1"/>
-          </p:cNvSpPr>
+          <p:cNvCxnSpPr>
+            <a:cxnSpLocks noGrp="1" noRot="1" noChangeAspect="1" noMove="1" noResize="1" noEditPoints="1" noAdjustHandles="1" noChangeArrowheads="1" noChangeShapeType="1"/>
+          </p:cNvCxnSpPr>
           <p:nvPr>
             <p:extLst>
               <p:ext uri="{386F3935-93C4-4BCD-93E2-E3B085C9AB24}">
@@ -3243,332 +5847,36 @@
               </p:ext>
             </p:extLst>
           </p:nvPr>
-        </p:nvSpPr>
+        </p:nvCxnSpPr>
         <p:spPr>
-          <a:xfrm rot="10800000" flipH="1">
-            <a:off x="480862" y="-6"/>
-            <a:ext cx="11711138" cy="6410334"/>
+          <a:xfrm>
+            <a:off x="865140" y="871146"/>
+            <a:ext cx="736939" cy="0"/>
           </a:xfrm>
-          <a:prstGeom prst="rect">
+          <a:prstGeom prst="line">
             <a:avLst/>
           </a:prstGeom>
-          <a:gradFill>
-            <a:gsLst>
-              <a:gs pos="0">
-                <a:schemeClr val="accent1">
-                  <a:alpha val="0"/>
-                </a:schemeClr>
-              </a:gs>
-              <a:gs pos="100000">
-                <a:srgbClr val="000000">
-                  <a:alpha val="41000"/>
-                </a:srgbClr>
-              </a:gs>
-            </a:gsLst>
-            <a:lin ang="18000000" scaled="0"/>
-          </a:gradFill>
-          <a:ln>
-            <a:noFill/>
+          <a:ln w="57150">
+            <a:solidFill>
+              <a:schemeClr val="accent4"/>
+            </a:solidFill>
           </a:ln>
         </p:spPr>
         <p:style>
-          <a:lnRef idx="2">
-            <a:schemeClr val="accent1">
-              <a:shade val="50000"/>
-            </a:schemeClr>
+          <a:lnRef idx="1">
+            <a:schemeClr val="accent1"/>
           </a:lnRef>
-          <a:fillRef idx="1">
+          <a:fillRef idx="0">
             <a:schemeClr val="accent1"/>
           </a:fillRef>
           <a:effectRef idx="0">
             <a:schemeClr val="accent1"/>
           </a:effectRef>
           <a:fontRef idx="minor">
-            <a:schemeClr val="lt1"/>
+            <a:schemeClr val="tx1"/>
           </a:fontRef>
         </p:style>
-        <p:txBody>
-          <a:bodyPr rtlCol="0" anchor="ctr"/>
-          <a:lstStyle/>
-          <a:p>
-            <a:pPr algn="ctr"/>
-            <a:endParaRPr lang="en-US" dirty="0"/>
-          </a:p>
-        </p:txBody>
-      </p:sp>
-      <p:sp>
-        <p:nvSpPr>
-          <p:cNvPr id="2" name="Title 1">
-            <a:extLst>
-              <a:ext uri="{FF2B5EF4-FFF2-40B4-BE49-F238E27FC236}">
-                <a16:creationId xmlns:a16="http://schemas.microsoft.com/office/drawing/2014/main" id="{94E4490F-7A7B-FD4F-64E0-84D68EECC179}"/>
-              </a:ext>
-            </a:extLst>
-          </p:cNvPr>
-          <p:cNvSpPr>
-            <a:spLocks noGrp="1"/>
-          </p:cNvSpPr>
-          <p:nvPr>
-            <p:ph type="ctrTitle"/>
-          </p:nvPr>
-        </p:nvSpPr>
-        <p:spPr>
-          <a:xfrm>
-            <a:off x="1127208" y="857251"/>
-            <a:ext cx="4747280" cy="3098061"/>
-          </a:xfrm>
-        </p:spPr>
-        <p:txBody>
-          <a:bodyPr anchor="b">
-            <a:normAutofit/>
-          </a:bodyPr>
-          <a:lstStyle/>
-          <a:p>
-            <a:r>
-              <a:rPr lang="en-US" sz="4800" dirty="0">
-                <a:solidFill>
-                  <a:srgbClr val="FFFFFF"/>
-                </a:solidFill>
-              </a:rPr>
-              <a:t>LSTM Stock Price Prediction Visualizations and Results</a:t>
-            </a:r>
-          </a:p>
-        </p:txBody>
-      </p:sp>
-      <p:sp>
-        <p:nvSpPr>
-          <p:cNvPr id="25" name="Rectangle 24">
-            <a:extLst>
-              <a:ext uri="{FF2B5EF4-FFF2-40B4-BE49-F238E27FC236}">
-                <a16:creationId xmlns:a16="http://schemas.microsoft.com/office/drawing/2014/main" id="{FC485432-3647-4218-B5D3-15D3FA222B13}"/>
-              </a:ext>
-              <a:ext uri="{C183D7F6-B498-43B3-948B-1728B52AA6E4}">
-                <adec:decorative xmlns:adec="http://schemas.microsoft.com/office/drawing/2017/decorative" val="1"/>
-              </a:ext>
-            </a:extLst>
-          </p:cNvPr>
-          <p:cNvSpPr>
-            <a:spLocks noGrp="1" noRot="1" noChangeAspect="1" noMove="1" noResize="1" noEditPoints="1" noAdjustHandles="1" noChangeArrowheads="1" noChangeShapeType="1" noTextEdit="1"/>
-          </p:cNvSpPr>
-          <p:nvPr>
-            <p:extLst>
-              <p:ext uri="{386F3935-93C4-4BCD-93E2-E3B085C9AB24}">
-                <p16:designElem xmlns:p16="http://schemas.microsoft.com/office/powerpoint/2015/main" val="1"/>
-              </p:ext>
-            </p:extLst>
-          </p:nvPr>
-        </p:nvSpPr>
-        <p:spPr>
-          <a:xfrm rot="16200000">
-            <a:off x="4844797" y="-489206"/>
-            <a:ext cx="2502408" cy="12191998"/>
-          </a:xfrm>
-          <a:prstGeom prst="rect">
-            <a:avLst/>
-          </a:prstGeom>
-          <a:gradFill>
-            <a:gsLst>
-              <a:gs pos="0">
-                <a:schemeClr val="accent1">
-                  <a:alpha val="24000"/>
-                </a:schemeClr>
-              </a:gs>
-              <a:gs pos="78000">
-                <a:schemeClr val="accent1">
-                  <a:lumMod val="50000"/>
-                  <a:alpha val="0"/>
-                </a:schemeClr>
-              </a:gs>
-            </a:gsLst>
-            <a:lin ang="10200000" scaled="0"/>
-          </a:gradFill>
-          <a:ln>
-            <a:noFill/>
-          </a:ln>
-        </p:spPr>
-        <p:style>
-          <a:lnRef idx="2">
-            <a:schemeClr val="accent1">
-              <a:shade val="50000"/>
-            </a:schemeClr>
-          </a:lnRef>
-          <a:fillRef idx="1">
-            <a:schemeClr val="accent1"/>
-          </a:fillRef>
-          <a:effectRef idx="0">
-            <a:schemeClr val="accent1"/>
-          </a:effectRef>
-          <a:fontRef idx="minor">
-            <a:schemeClr val="lt1"/>
-          </a:fontRef>
-        </p:style>
-        <p:txBody>
-          <a:bodyPr rtlCol="0" anchor="ctr"/>
-          <a:lstStyle/>
-          <a:p>
-            <a:pPr algn="ctr"/>
-            <a:endParaRPr lang="en-US"/>
-          </a:p>
-        </p:txBody>
-      </p:sp>
-      <p:sp>
-        <p:nvSpPr>
-          <p:cNvPr id="3" name="Subtitle 2">
-            <a:extLst>
-              <a:ext uri="{FF2B5EF4-FFF2-40B4-BE49-F238E27FC236}">
-                <a16:creationId xmlns:a16="http://schemas.microsoft.com/office/drawing/2014/main" id="{90DC8451-665E-B2B6-8D42-15888F3AA5DC}"/>
-              </a:ext>
-            </a:extLst>
-          </p:cNvPr>
-          <p:cNvSpPr>
-            <a:spLocks noGrp="1"/>
-          </p:cNvSpPr>
-          <p:nvPr>
-            <p:ph type="subTitle" idx="1"/>
-          </p:nvPr>
-        </p:nvSpPr>
-        <p:spPr>
-          <a:xfrm>
-            <a:off x="1127208" y="4756265"/>
-            <a:ext cx="4393278" cy="1244483"/>
-          </a:xfrm>
-        </p:spPr>
-        <p:txBody>
-          <a:bodyPr anchor="t">
-            <a:normAutofit/>
-          </a:bodyPr>
-          <a:lstStyle/>
-          <a:p>
-            <a:r>
-              <a:rPr lang="en-US" sz="1500" dirty="0">
-                <a:solidFill>
-                  <a:srgbClr val="FFFFFF"/>
-                </a:solidFill>
-              </a:rPr>
-              <a:t>Using LSTM Models to Accurately Predict Apple Stock Prices (2008-2021)</a:t>
-            </a:r>
-          </a:p>
-          <a:p>
-            <a:endParaRPr lang="en-US" sz="1500" dirty="0">
-              <a:solidFill>
-                <a:srgbClr val="FFFFFF"/>
-              </a:solidFill>
-            </a:endParaRPr>
-          </a:p>
-          <a:p>
-            <a:r>
-              <a:rPr lang="en-US" sz="1500" dirty="0">
-                <a:solidFill>
-                  <a:srgbClr val="FFFFFF"/>
-                </a:solidFill>
-              </a:rPr>
-              <a:t>by Emily Buchanan-Schnepp</a:t>
-            </a:r>
-          </a:p>
-        </p:txBody>
-      </p:sp>
-      <p:sp>
-        <p:nvSpPr>
-          <p:cNvPr id="27" name="Oval 26">
-            <a:extLst>
-              <a:ext uri="{FF2B5EF4-FFF2-40B4-BE49-F238E27FC236}">
-                <a16:creationId xmlns:a16="http://schemas.microsoft.com/office/drawing/2014/main" id="{F4AFDDCA-6ABA-4D23-8A5C-1BF0F4308148}"/>
-              </a:ext>
-              <a:ext uri="{C183D7F6-B498-43B3-948B-1728B52AA6E4}">
-                <adec:decorative xmlns:adec="http://schemas.microsoft.com/office/drawing/2017/decorative" val="1"/>
-              </a:ext>
-            </a:extLst>
-          </p:cNvPr>
-          <p:cNvSpPr>
-            <a:spLocks noGrp="1" noRot="1" noChangeAspect="1" noMove="1" noResize="1" noEditPoints="1" noAdjustHandles="1" noChangeArrowheads="1" noChangeShapeType="1" noTextEdit="1"/>
-          </p:cNvSpPr>
-          <p:nvPr>
-            <p:extLst>
-              <p:ext uri="{386F3935-93C4-4BCD-93E2-E3B085C9AB24}">
-                <p16:designElem xmlns:p16="http://schemas.microsoft.com/office/powerpoint/2015/main" val="1"/>
-              </p:ext>
-            </p:extLst>
-          </p:nvPr>
-        </p:nvSpPr>
-        <p:spPr>
-          <a:xfrm>
-            <a:off x="6390589" y="1062544"/>
-            <a:ext cx="4756162" cy="4756162"/>
-          </a:xfrm>
-          <a:prstGeom prst="ellipse">
-            <a:avLst/>
-          </a:prstGeom>
-          <a:solidFill>
-            <a:schemeClr val="bg1"/>
-          </a:solidFill>
-          <a:ln>
-            <a:noFill/>
-          </a:ln>
-        </p:spPr>
-        <p:style>
-          <a:lnRef idx="2">
-            <a:schemeClr val="accent1">
-              <a:shade val="50000"/>
-            </a:schemeClr>
-          </a:lnRef>
-          <a:fillRef idx="1">
-            <a:schemeClr val="accent1"/>
-          </a:fillRef>
-          <a:effectRef idx="0">
-            <a:schemeClr val="accent1"/>
-          </a:effectRef>
-          <a:fontRef idx="minor">
-            <a:schemeClr val="lt1"/>
-          </a:fontRef>
-        </p:style>
-        <p:txBody>
-          <a:bodyPr rtlCol="0" anchor="ctr"/>
-          <a:lstStyle/>
-          <a:p>
-            <a:pPr algn="ctr"/>
-            <a:endParaRPr lang="en-US"/>
-          </a:p>
-        </p:txBody>
-      </p:sp>
-      <p:pic>
-        <p:nvPicPr>
-          <p:cNvPr id="7" name="Graphic 6" descr="Upward trend">
-            <a:extLst>
-              <a:ext uri="{FF2B5EF4-FFF2-40B4-BE49-F238E27FC236}">
-                <a16:creationId xmlns:a16="http://schemas.microsoft.com/office/drawing/2014/main" id="{3C36D471-49B7-A48C-8CE8-9EBFE9EA1D4A}"/>
-              </a:ext>
-            </a:extLst>
-          </p:cNvPr>
-          <p:cNvPicPr>
-            <a:picLocks noChangeAspect="1"/>
-          </p:cNvPicPr>
-          <p:nvPr/>
-        </p:nvPicPr>
-        <p:blipFill>
-          <a:blip r:embed="rId2">
-            <a:extLst>
-              <a:ext uri="{28A0092B-C50C-407E-A947-70E740481C1C}">
-                <a14:useLocalDpi xmlns:a14="http://schemas.microsoft.com/office/drawing/2010/main" val="0"/>
-              </a:ext>
-              <a:ext uri="{96DAC541-7B7A-43D3-8B79-37D633B846F1}">
-                <asvg:svgBlip xmlns:asvg="http://schemas.microsoft.com/office/drawing/2016/SVG/main" r:embed="rId3"/>
-              </a:ext>
-            </a:extLst>
-          </a:blip>
-          <a:stretch>
-            <a:fillRect/>
-          </a:stretch>
-        </p:blipFill>
-        <p:spPr>
-          <a:xfrm>
-            <a:off x="7461874" y="2108877"/>
-            <a:ext cx="2654533" cy="2654533"/>
-          </a:xfrm>
-          <a:prstGeom prst="rect">
-            <a:avLst/>
-          </a:prstGeom>
-        </p:spPr>
-      </p:pic>
+      </p:cxnSp>
     </p:spTree>
     <p:extLst>
       <p:ext uri="{BB962C8B-B14F-4D97-AF65-F5344CB8AC3E}">
@@ -3607,12 +5915,12 @@
           <a:chExt cx="0" cy="0"/>
         </a:xfrm>
       </p:grpSpPr>
-      <p:sp useBgFill="1">
-        <p:nvSpPr>
-          <p:cNvPr id="393" name="Rectangle 392">
+      <p:sp>
+        <p:nvSpPr>
+          <p:cNvPr id="8" name="Rectangle 7">
             <a:extLst>
               <a:ext uri="{FF2B5EF4-FFF2-40B4-BE49-F238E27FC236}">
-                <a16:creationId xmlns:a16="http://schemas.microsoft.com/office/drawing/2014/main" id="{12609869-9E80-471B-A487-A53288E0E791}"/>
+                <a16:creationId xmlns:a16="http://schemas.microsoft.com/office/drawing/2014/main" id="{B34F5AD2-EDBD-4BBD-A55C-EAFFD0C7097A}"/>
               </a:ext>
               <a:ext uri="{C183D7F6-B498-43B3-948B-1728B52AA6E4}">
                 <adec:decorative xmlns:adec="http://schemas.microsoft.com/office/drawing/2017/decorative" val="1"/>
@@ -3632,174 +5940,17 @@
         </p:nvSpPr>
         <p:spPr>
           <a:xfrm>
-            <a:off x="0" y="0"/>
-            <a:ext cx="12192000" cy="6858000"/>
+            <a:off x="3740383" y="0"/>
+            <a:ext cx="8451607" cy="6858001"/>
           </a:xfrm>
           <a:prstGeom prst="rect">
             <a:avLst/>
           </a:prstGeom>
-          <a:ln w="12700" cap="flat" cmpd="sng" algn="ctr">
-            <a:noFill/>
-            <a:prstDash val="solid"/>
-            <a:miter lim="800000"/>
-          </a:ln>
-          <a:effectLst/>
-          <a:extLst>
-            <a:ext uri="{91240B29-F687-4F45-9708-019B960494DF}">
-              <a14:hiddenLine xmlns:a14="http://schemas.microsoft.com/office/drawing/2010/main" w="12700" cap="flat" cmpd="sng" algn="ctr">
-                <a:solidFill>
-                  <a:schemeClr val="accent1">
-                    <a:shade val="50000"/>
-                  </a:schemeClr>
-                </a:solidFill>
-                <a:prstDash val="solid"/>
-                <a:miter lim="800000"/>
-              </a14:hiddenLine>
-            </a:ext>
-          </a:extLst>
-        </p:spPr>
-        <p:style>
-          <a:lnRef idx="2">
-            <a:schemeClr val="accent1">
-              <a:shade val="50000"/>
+          <a:solidFill>
+            <a:schemeClr val="bg1">
+              <a:lumMod val="95000"/>
             </a:schemeClr>
-          </a:lnRef>
-          <a:fillRef idx="1">
-            <a:schemeClr val="accent1"/>
-          </a:fillRef>
-          <a:effectRef idx="0">
-            <a:schemeClr val="accent1"/>
-          </a:effectRef>
-          <a:fontRef idx="minor">
-            <a:schemeClr val="lt1"/>
-          </a:fontRef>
-        </p:style>
-        <p:txBody>
-          <a:bodyPr rtlCol="0" anchor="ctr"/>
-          <a:lstStyle/>
-          <a:p>
-            <a:pPr algn="ctr"/>
-            <a:endParaRPr lang="en-US"/>
-          </a:p>
-        </p:txBody>
-      </p:sp>
-      <p:sp>
-        <p:nvSpPr>
-          <p:cNvPr id="2" name="Title 1">
-            <a:extLst>
-              <a:ext uri="{FF2B5EF4-FFF2-40B4-BE49-F238E27FC236}">
-                <a16:creationId xmlns:a16="http://schemas.microsoft.com/office/drawing/2014/main" id="{1B89959B-0912-6D49-A89B-0B866556F0C3}"/>
-              </a:ext>
-            </a:extLst>
-          </p:cNvPr>
-          <p:cNvSpPr>
-            <a:spLocks noGrp="1"/>
-          </p:cNvSpPr>
-          <p:nvPr>
-            <p:ph type="title"/>
-          </p:nvPr>
-        </p:nvSpPr>
-        <p:spPr>
-          <a:xfrm>
-            <a:off x="1136397" y="502020"/>
-            <a:ext cx="5323715" cy="1642970"/>
-          </a:xfrm>
-        </p:spPr>
-        <p:txBody>
-          <a:bodyPr anchor="b">
-            <a:normAutofit/>
-          </a:bodyPr>
-          <a:lstStyle/>
-          <a:p>
-            <a:r>
-              <a:rPr lang="en-US" sz="4000" dirty="0"/>
-              <a:t>Introduction</a:t>
-            </a:r>
-          </a:p>
-        </p:txBody>
-      </p:sp>
-      <p:sp>
-        <p:nvSpPr>
-          <p:cNvPr id="3" name="Content Placeholder 2">
-            <a:extLst>
-              <a:ext uri="{FF2B5EF4-FFF2-40B4-BE49-F238E27FC236}">
-                <a16:creationId xmlns:a16="http://schemas.microsoft.com/office/drawing/2014/main" id="{7C960F39-7960-284A-CF2F-9437DAFF258E}"/>
-              </a:ext>
-            </a:extLst>
-          </p:cNvPr>
-          <p:cNvSpPr>
-            <a:spLocks noGrp="1"/>
-          </p:cNvSpPr>
-          <p:nvPr>
-            <p:ph idx="1"/>
-          </p:nvPr>
-        </p:nvSpPr>
-        <p:spPr>
-          <a:xfrm>
-            <a:off x="1144923" y="2405894"/>
-            <a:ext cx="5315189" cy="3535083"/>
-          </a:xfrm>
-        </p:spPr>
-        <p:txBody>
-          <a:bodyPr anchor="t">
-            <a:normAutofit/>
-          </a:bodyPr>
-          <a:lstStyle/>
-          <a:p>
-            <a:pPr marL="0" indent="0">
-              <a:buNone/>
-            </a:pPr>
-            <a:r>
-              <a:rPr lang="en-US" sz="2000" dirty="0"/>
-              <a:t>This project uses advanced learning models (LSTM) to predict Apple stock prices, training on data from 2008-2017 and evaluating performance on data from 2018-2021. By integrating competitor data (Google stock performance), we explored how market dynamics between smartphone rivals influence stock prices. These insights demonstrate the value of leveraging existing factors to improve accuracy and support businesses navigating competitive industries.</a:t>
-            </a:r>
-          </a:p>
-        </p:txBody>
-      </p:sp>
-      <p:sp>
-        <p:nvSpPr>
-          <p:cNvPr id="395" name="Rectangle 394">
-            <a:extLst>
-              <a:ext uri="{FF2B5EF4-FFF2-40B4-BE49-F238E27FC236}">
-                <a16:creationId xmlns:a16="http://schemas.microsoft.com/office/drawing/2014/main" id="{7004738A-9D34-43E8-97D2-CA0EED4F8BE0}"/>
-              </a:ext>
-              <a:ext uri="{C183D7F6-B498-43B3-948B-1728B52AA6E4}">
-                <adec:decorative xmlns:adec="http://schemas.microsoft.com/office/drawing/2017/decorative" val="1"/>
-              </a:ext>
-            </a:extLst>
-          </p:cNvPr>
-          <p:cNvSpPr>
-            <a:spLocks noGrp="1" noRot="1" noChangeAspect="1" noMove="1" noResize="1" noEditPoints="1" noAdjustHandles="1" noChangeArrowheads="1" noChangeShapeType="1" noTextEdit="1"/>
-          </p:cNvSpPr>
-          <p:nvPr>
-            <p:extLst>
-              <p:ext uri="{386F3935-93C4-4BCD-93E2-E3B085C9AB24}">
-                <p16:designElem xmlns:p16="http://schemas.microsoft.com/office/powerpoint/2015/main" val="1"/>
-              </p:ext>
-            </p:extLst>
-          </p:nvPr>
-        </p:nvSpPr>
-        <p:spPr>
-          <a:xfrm rot="10800000" flipH="1">
-            <a:off x="8123333" y="-5"/>
-            <a:ext cx="4092521" cy="6858000"/>
-          </a:xfrm>
-          <a:prstGeom prst="rect">
-            <a:avLst/>
-          </a:prstGeom>
-          <a:gradFill>
-            <a:gsLst>
-              <a:gs pos="8000">
-                <a:srgbClr val="000000">
-                  <a:alpha val="94000"/>
-                </a:srgbClr>
-              </a:gs>
-              <a:gs pos="100000">
-                <a:schemeClr val="accent1"/>
-              </a:gs>
-            </a:gsLst>
-            <a:lin ang="2400000" scaled="0"/>
-          </a:gradFill>
+          </a:solidFill>
           <a:ln>
             <a:noFill/>
           </a:ln>
@@ -3831,10 +5982,10 @@
       </p:sp>
       <p:sp>
         <p:nvSpPr>
-          <p:cNvPr id="397" name="Rectangle 396">
+          <p:cNvPr id="10" name="Rectangle 9">
             <a:extLst>
               <a:ext uri="{FF2B5EF4-FFF2-40B4-BE49-F238E27FC236}">
-                <a16:creationId xmlns:a16="http://schemas.microsoft.com/office/drawing/2014/main" id="{B8B8D07F-F13E-443E-BA68-2D26672D76B9}"/>
+                <a16:creationId xmlns:a16="http://schemas.microsoft.com/office/drawing/2014/main" id="{C3896A03-3945-419A-B66B-4EE266EDD152}"/>
               </a:ext>
               <a:ext uri="{C183D7F6-B498-43B3-948B-1728B52AA6E4}">
                 <adec:decorative xmlns:adec="http://schemas.microsoft.com/office/drawing/2017/decorative" val="1"/>
@@ -3853,30 +6004,19 @@
           </p:nvPr>
         </p:nvSpPr>
         <p:spPr>
-          <a:xfrm rot="10800000" flipH="1">
-            <a:off x="8123333" y="-2"/>
-            <a:ext cx="4092521" cy="6400369"/>
+          <a:xfrm>
+            <a:off x="10" y="0"/>
+            <a:ext cx="3745177" cy="6858001"/>
           </a:xfrm>
           <a:prstGeom prst="rect">
             <a:avLst/>
           </a:prstGeom>
-          <a:gradFill>
-            <a:gsLst>
-              <a:gs pos="31000">
-                <a:schemeClr val="accent1">
-                  <a:lumMod val="50000"/>
-                  <a:alpha val="0"/>
-                </a:schemeClr>
-              </a:gs>
-              <a:gs pos="100000">
-                <a:schemeClr val="accent1">
-                  <a:lumMod val="50000"/>
-                  <a:alpha val="26000"/>
-                </a:schemeClr>
-              </a:gs>
-            </a:gsLst>
-            <a:lin ang="18000000" scaled="0"/>
-          </a:gradFill>
+          <a:solidFill>
+            <a:schemeClr val="tx1">
+              <a:lumMod val="85000"/>
+              <a:lumOff val="15000"/>
+            </a:schemeClr>
+          </a:solidFill>
           <a:ln>
             <a:noFill/>
           </a:ln>
@@ -3902,16 +6042,100 @@
           <a:lstStyle/>
           <a:p>
             <a:pPr algn="ctr"/>
-            <a:endParaRPr lang="en-US" dirty="0"/>
-          </a:p>
-        </p:txBody>
-      </p:sp>
-      <p:sp>
-        <p:nvSpPr>
-          <p:cNvPr id="399" name="Rectangle 398">
+            <a:endParaRPr lang="en-US"/>
+          </a:p>
+        </p:txBody>
+      </p:sp>
+      <p:sp>
+        <p:nvSpPr>
+          <p:cNvPr id="2" name="Title 1">
             <a:extLst>
               <a:ext uri="{FF2B5EF4-FFF2-40B4-BE49-F238E27FC236}">
-                <a16:creationId xmlns:a16="http://schemas.microsoft.com/office/drawing/2014/main" id="{2813A4FA-24A5-41ED-A534-3807D1B2F344}"/>
+                <a16:creationId xmlns:a16="http://schemas.microsoft.com/office/drawing/2014/main" id="{1B89959B-0912-6D49-A89B-0B866556F0C3}"/>
+              </a:ext>
+            </a:extLst>
+          </p:cNvPr>
+          <p:cNvSpPr>
+            <a:spLocks noGrp="1"/>
+          </p:cNvSpPr>
+          <p:nvPr>
+            <p:ph type="title"/>
+          </p:nvPr>
+        </p:nvSpPr>
+        <p:spPr>
+          <a:xfrm>
+            <a:off x="95250" y="637762"/>
+            <a:ext cx="3524250" cy="5576770"/>
+          </a:xfrm>
+        </p:spPr>
+        <p:txBody>
+          <a:bodyPr anchor="t">
+            <a:normAutofit/>
+          </a:bodyPr>
+          <a:lstStyle/>
+          <a:p>
+            <a:pPr algn="r"/>
+            <a:br>
+              <a:rPr lang="en-US" sz="5000" dirty="0">
+                <a:solidFill>
+                  <a:schemeClr val="bg1"/>
+                </a:solidFill>
+              </a:rPr>
+            </a:br>
+            <a:br>
+              <a:rPr lang="en-US" sz="5000" dirty="0">
+                <a:solidFill>
+                  <a:schemeClr val="bg1"/>
+                </a:solidFill>
+              </a:rPr>
+            </a:br>
+            <a:br>
+              <a:rPr lang="en-US" sz="5000" dirty="0">
+                <a:solidFill>
+                  <a:schemeClr val="bg1"/>
+                </a:solidFill>
+              </a:rPr>
+            </a:br>
+            <a:br>
+              <a:rPr lang="en-US" sz="5000" dirty="0">
+                <a:solidFill>
+                  <a:schemeClr val="bg1"/>
+                </a:solidFill>
+              </a:rPr>
+            </a:br>
+            <a:br>
+              <a:rPr lang="en-US" sz="5000" dirty="0">
+                <a:solidFill>
+                  <a:schemeClr val="bg1"/>
+                </a:solidFill>
+              </a:rPr>
+            </a:br>
+            <a:br>
+              <a:rPr lang="en-US" sz="5000" dirty="0">
+                <a:solidFill>
+                  <a:schemeClr val="bg1"/>
+                </a:solidFill>
+              </a:rPr>
+            </a:br>
+            <a:r>
+              <a:rPr lang="en-US" sz="5000" dirty="0">
+                <a:solidFill>
+                  <a:schemeClr val="bg1"/>
+                </a:solidFill>
+                <a:latin typeface="Helvetica" panose="020B0604020202020204" pitchFamily="34" charset="0"/>
+                <a:cs typeface="Helvetica" panose="020B0604020202020204" pitchFamily="34" charset="0"/>
+              </a:rPr>
+              <a:t>Introduction</a:t>
+            </a:r>
+          </a:p>
+        </p:txBody>
+      </p:sp>
+      <p:sp>
+        <p:nvSpPr>
+          <p:cNvPr id="12" name="Rectangle 11">
+            <a:extLst>
+              <a:ext uri="{FF2B5EF4-FFF2-40B4-BE49-F238E27FC236}">
+                <a16:creationId xmlns:a16="http://schemas.microsoft.com/office/drawing/2014/main" id="{B8EAE243-3A9F-4A46-B0D9-04C723A8A1BD}"/>
               </a:ext>
               <a:ext uri="{C183D7F6-B498-43B3-948B-1728B52AA6E4}">
                 <adec:decorative xmlns:adec="http://schemas.microsoft.com/office/drawing/2017/decorative" val="1"/>
@@ -3930,28 +6154,16 @@
           </p:nvPr>
         </p:nvSpPr>
         <p:spPr>
-          <a:xfrm rot="10800000" flipH="1">
-            <a:off x="8123333" y="-22"/>
-            <a:ext cx="4068667" cy="6400389"/>
+          <a:xfrm>
+            <a:off x="4654733" y="643465"/>
+            <a:ext cx="457200" cy="45720"/>
           </a:xfrm>
           <a:prstGeom prst="rect">
             <a:avLst/>
           </a:prstGeom>
-          <a:gradFill>
-            <a:gsLst>
-              <a:gs pos="0">
-                <a:schemeClr val="accent1">
-                  <a:alpha val="0"/>
-                </a:schemeClr>
-              </a:gs>
-              <a:gs pos="72000">
-                <a:srgbClr val="000000">
-                  <a:alpha val="21000"/>
-                </a:srgbClr>
-              </a:gs>
-            </a:gsLst>
-            <a:lin ang="3000000" scaled="0"/>
-          </a:gradFill>
+          <a:solidFill>
+            <a:schemeClr val="tx1"/>
+          </a:solidFill>
           <a:ln>
             <a:noFill/>
           </a:ln>
@@ -3977,124 +6189,93 @@
           <a:lstStyle/>
           <a:p>
             <a:pPr algn="ctr"/>
-            <a:endParaRPr lang="en-US" dirty="0"/>
-          </a:p>
-        </p:txBody>
-      </p:sp>
-      <p:sp>
-        <p:nvSpPr>
-          <p:cNvPr id="401" name="Rectangle 400">
+            <a:endParaRPr lang="en-US"/>
+          </a:p>
+        </p:txBody>
+      </p:sp>
+      <p:sp>
+        <p:nvSpPr>
+          <p:cNvPr id="3" name="Content Placeholder 2">
             <a:extLst>
               <a:ext uri="{FF2B5EF4-FFF2-40B4-BE49-F238E27FC236}">
-                <a16:creationId xmlns:a16="http://schemas.microsoft.com/office/drawing/2014/main" id="{C3944F27-CA70-4E84-A51A-E6BF89558979}"/>
-              </a:ext>
-              <a:ext uri="{C183D7F6-B498-43B3-948B-1728B52AA6E4}">
-                <adec:decorative xmlns:adec="http://schemas.microsoft.com/office/drawing/2017/decorative" val="1"/>
+                <a16:creationId xmlns:a16="http://schemas.microsoft.com/office/drawing/2014/main" id="{7C960F39-7960-284A-CF2F-9437DAFF258E}"/>
               </a:ext>
             </a:extLst>
           </p:cNvPr>
           <p:cNvSpPr>
-            <a:spLocks noGrp="1" noRot="1" noChangeAspect="1" noMove="1" noResize="1" noEditPoints="1" noAdjustHandles="1" noChangeArrowheads="1" noChangeShapeType="1" noTextEdit="1"/>
+            <a:spLocks noGrp="1"/>
           </p:cNvSpPr>
           <p:nvPr>
-            <p:extLst>
-              <p:ext uri="{386F3935-93C4-4BCD-93E2-E3B085C9AB24}">
-                <p16:designElem xmlns:p16="http://schemas.microsoft.com/office/powerpoint/2015/main" val="1"/>
-              </p:ext>
-            </p:extLst>
-          </p:nvPr>
-        </p:nvSpPr>
-        <p:spPr>
-          <a:xfrm rot="10800000" flipH="1">
-            <a:off x="8123333" y="-10"/>
-            <a:ext cx="3611467" cy="6857997"/>
-          </a:xfrm>
-          <a:prstGeom prst="rect">
-            <a:avLst/>
-          </a:prstGeom>
-          <a:gradFill>
-            <a:gsLst>
-              <a:gs pos="0">
-                <a:schemeClr val="accent1">
-                  <a:alpha val="0"/>
-                </a:schemeClr>
-              </a:gs>
-              <a:gs pos="93000">
-                <a:srgbClr val="000000">
-                  <a:alpha val="29000"/>
-                </a:srgbClr>
-              </a:gs>
-            </a:gsLst>
-            <a:lin ang="5400000" scaled="0"/>
-          </a:gradFill>
-          <a:ln>
-            <a:noFill/>
-          </a:ln>
-        </p:spPr>
-        <p:style>
-          <a:lnRef idx="2">
-            <a:schemeClr val="accent1">
-              <a:shade val="50000"/>
-            </a:schemeClr>
-          </a:lnRef>
-          <a:fillRef idx="1">
-            <a:schemeClr val="accent1"/>
-          </a:fillRef>
-          <a:effectRef idx="0">
-            <a:schemeClr val="accent1"/>
-          </a:effectRef>
-          <a:fontRef idx="minor">
-            <a:schemeClr val="lt1"/>
-          </a:fontRef>
-        </p:style>
-        <p:txBody>
-          <a:bodyPr rtlCol="0" anchor="ctr"/>
-          <a:lstStyle/>
-          <a:p>
-            <a:pPr algn="ctr"/>
-            <a:endParaRPr lang="en-US" dirty="0"/>
-          </a:p>
-        </p:txBody>
-      </p:sp>
-      <p:pic>
-        <p:nvPicPr>
-          <p:cNvPr id="364" name="Graphic 363" descr="Apple">
-            <a:extLst>
-              <a:ext uri="{FF2B5EF4-FFF2-40B4-BE49-F238E27FC236}">
-                <a16:creationId xmlns:a16="http://schemas.microsoft.com/office/drawing/2014/main" id="{2CD636D9-AB74-0EBA-4B32-3BB1392F3F03}"/>
-              </a:ext>
-            </a:extLst>
-          </p:cNvPr>
-          <p:cNvPicPr>
-            <a:picLocks noChangeAspect="1"/>
-          </p:cNvPicPr>
-          <p:nvPr/>
-        </p:nvPicPr>
-        <p:blipFill>
-          <a:blip r:embed="rId2">
-            <a:extLst>
-              <a:ext uri="{28A0092B-C50C-407E-A947-70E740481C1C}">
-                <a14:useLocalDpi xmlns:a14="http://schemas.microsoft.com/office/drawing/2010/main" val="0"/>
-              </a:ext>
-              <a:ext uri="{96DAC541-7B7A-43D3-8B79-37D633B846F1}">
-                <asvg:svgBlip xmlns:asvg="http://schemas.microsoft.com/office/drawing/2016/SVG/main" r:embed="rId3"/>
-              </a:ext>
-            </a:extLst>
-          </a:blip>
-          <a:stretch>
-            <a:fillRect/>
-          </a:stretch>
-        </p:blipFill>
+            <p:ph idx="1"/>
+          </p:nvPr>
+        </p:nvSpPr>
         <p:spPr>
           <a:xfrm>
-            <a:off x="7075967" y="1359681"/>
-            <a:ext cx="4170530" cy="4170530"/>
+            <a:off x="4654732" y="850052"/>
+            <a:ext cx="6390623" cy="5326911"/>
           </a:xfrm>
-          <a:prstGeom prst="rect">
-            <a:avLst/>
-          </a:prstGeom>
         </p:spPr>
-      </p:pic>
+        <p:txBody>
+          <a:bodyPr>
+            <a:normAutofit/>
+          </a:bodyPr>
+          <a:lstStyle/>
+          <a:p>
+            <a:pPr marL="0" indent="0">
+              <a:buNone/>
+            </a:pPr>
+            <a:r>
+              <a:rPr lang="en-US" sz="1800" dirty="0">
+                <a:latin typeface="Helvetica" panose="020B0604020202020204" pitchFamily="34" charset="0"/>
+                <a:cs typeface="Helvetica" panose="020B0604020202020204" pitchFamily="34" charset="0"/>
+              </a:rPr>
+              <a:t>This project uses advanced learning models (LSTM) to predict Apple stock prices, training on data from 2008-2017 and evaluating performance on data from 2018-2021. </a:t>
+            </a:r>
+          </a:p>
+          <a:p>
+            <a:pPr marL="0" indent="0">
+              <a:buNone/>
+            </a:pPr>
+            <a:endParaRPr lang="en-US" sz="1800" dirty="0">
+              <a:latin typeface="Helvetica" panose="020B0604020202020204" pitchFamily="34" charset="0"/>
+              <a:cs typeface="Helvetica" panose="020B0604020202020204" pitchFamily="34" charset="0"/>
+            </a:endParaRPr>
+          </a:p>
+          <a:p>
+            <a:pPr marL="0" indent="0">
+              <a:buNone/>
+            </a:pPr>
+            <a:r>
+              <a:rPr lang="en-US" sz="1800" dirty="0">
+                <a:latin typeface="Helvetica" panose="020B0604020202020204" pitchFamily="34" charset="0"/>
+                <a:cs typeface="Helvetica" panose="020B0604020202020204" pitchFamily="34" charset="0"/>
+              </a:rPr>
+              <a:t>By integrating competitor data (Google stock performance), we explored how market dynamics between smartphone rivals influence stock prices. </a:t>
+            </a:r>
+          </a:p>
+          <a:p>
+            <a:pPr marL="0" indent="0">
+              <a:buNone/>
+            </a:pPr>
+            <a:endParaRPr lang="en-US" sz="1800" dirty="0">
+              <a:latin typeface="Helvetica" panose="020B0604020202020204" pitchFamily="34" charset="0"/>
+              <a:cs typeface="Helvetica" panose="020B0604020202020204" pitchFamily="34" charset="0"/>
+            </a:endParaRPr>
+          </a:p>
+          <a:p>
+            <a:pPr marL="0" indent="0">
+              <a:buNone/>
+            </a:pPr>
+            <a:r>
+              <a:rPr lang="en-US" sz="1800" dirty="0">
+                <a:latin typeface="Helvetica" panose="020B0604020202020204" pitchFamily="34" charset="0"/>
+                <a:cs typeface="Helvetica" panose="020B0604020202020204" pitchFamily="34" charset="0"/>
+              </a:rPr>
+              <a:t>These insights demonstrate the value of leveraging existing factors to improve accuracy and support businesses navigating competitive industries.</a:t>
+            </a:r>
+          </a:p>
+        </p:txBody>
+      </p:sp>
     </p:spTree>
     <p:extLst>
       <p:ext uri="{BB962C8B-B14F-4D97-AF65-F5344CB8AC3E}">
@@ -4133,12 +6314,12 @@
           <a:chExt cx="0" cy="0"/>
         </a:xfrm>
       </p:grpSpPr>
-      <p:sp useBgFill="1">
-        <p:nvSpPr>
-          <p:cNvPr id="4145" name="Rectangle 4144">
+      <p:sp>
+        <p:nvSpPr>
+          <p:cNvPr id="1031" name="Rectangle 1030">
             <a:extLst>
               <a:ext uri="{FF2B5EF4-FFF2-40B4-BE49-F238E27FC236}">
-                <a16:creationId xmlns:a16="http://schemas.microsoft.com/office/drawing/2014/main" id="{12609869-9E80-471B-A487-A53288E0E791}"/>
+                <a16:creationId xmlns:a16="http://schemas.microsoft.com/office/drawing/2014/main" id="{C3896A03-3945-419A-B66B-4EE266EDD152}"/>
               </a:ext>
               <a:ext uri="{C183D7F6-B498-43B3-948B-1728B52AA6E4}">
                 <adec:decorative xmlns:adec="http://schemas.microsoft.com/office/drawing/2017/decorative" val="1"/>
@@ -4158,187 +6339,18 @@
         </p:nvSpPr>
         <p:spPr>
           <a:xfrm>
-            <a:off x="0" y="0"/>
-            <a:ext cx="12192000" cy="6858000"/>
+            <a:off x="10" y="0"/>
+            <a:ext cx="4654285" cy="6858001"/>
           </a:xfrm>
           <a:prstGeom prst="rect">
             <a:avLst/>
           </a:prstGeom>
-          <a:ln w="12700" cap="flat" cmpd="sng" algn="ctr">
-            <a:noFill/>
-            <a:prstDash val="solid"/>
-            <a:miter lim="800000"/>
-          </a:ln>
-          <a:effectLst/>
-          <a:extLst>
-            <a:ext uri="{91240B29-F687-4F45-9708-019B960494DF}">
-              <a14:hiddenLine xmlns:a14="http://schemas.microsoft.com/office/drawing/2010/main" w="12700" cap="flat" cmpd="sng" algn="ctr">
-                <a:solidFill>
-                  <a:schemeClr val="accent1">
-                    <a:shade val="50000"/>
-                  </a:schemeClr>
-                </a:solidFill>
-                <a:prstDash val="solid"/>
-                <a:miter lim="800000"/>
-              </a14:hiddenLine>
-            </a:ext>
-          </a:extLst>
-        </p:spPr>
-        <p:style>
-          <a:lnRef idx="2">
-            <a:schemeClr val="accent1">
-              <a:shade val="50000"/>
+          <a:solidFill>
+            <a:schemeClr val="tx1">
+              <a:lumMod val="85000"/>
+              <a:lumOff val="15000"/>
             </a:schemeClr>
-          </a:lnRef>
-          <a:fillRef idx="1">
-            <a:schemeClr val="accent1"/>
-          </a:fillRef>
-          <a:effectRef idx="0">
-            <a:schemeClr val="accent1"/>
-          </a:effectRef>
-          <a:fontRef idx="minor">
-            <a:schemeClr val="lt1"/>
-          </a:fontRef>
-        </p:style>
-        <p:txBody>
-          <a:bodyPr rtlCol="0" anchor="ctr"/>
-          <a:lstStyle/>
-          <a:p>
-            <a:pPr algn="ctr"/>
-            <a:endParaRPr lang="en-US"/>
-          </a:p>
-        </p:txBody>
-      </p:sp>
-      <p:sp>
-        <p:nvSpPr>
-          <p:cNvPr id="7" name="Title 6">
-            <a:extLst>
-              <a:ext uri="{FF2B5EF4-FFF2-40B4-BE49-F238E27FC236}">
-                <a16:creationId xmlns:a16="http://schemas.microsoft.com/office/drawing/2014/main" id="{B9AECE31-7D7D-34B5-9306-576565D97C5B}"/>
-              </a:ext>
-            </a:extLst>
-          </p:cNvPr>
-          <p:cNvSpPr>
-            <a:spLocks noGrp="1"/>
-          </p:cNvSpPr>
-          <p:nvPr>
-            <p:ph type="title"/>
-          </p:nvPr>
-        </p:nvSpPr>
-        <p:spPr>
-          <a:xfrm>
-            <a:off x="1136397" y="502020"/>
-            <a:ext cx="5323715" cy="1642970"/>
-          </a:xfrm>
-        </p:spPr>
-        <p:txBody>
-          <a:bodyPr vert="horz" lIns="91440" tIns="45720" rIns="91440" bIns="45720" rtlCol="0" anchor="b">
-            <a:normAutofit/>
-          </a:bodyPr>
-          <a:lstStyle/>
-          <a:p>
-            <a:r>
-              <a:rPr lang="en-US" sz="4000" kern="1200">
-                <a:solidFill>
-                  <a:schemeClr val="tx1"/>
-                </a:solidFill>
-                <a:latin typeface="+mj-lt"/>
-                <a:ea typeface="+mj-ea"/>
-                <a:cs typeface="+mj-cs"/>
-              </a:rPr>
-              <a:t>Google and Apple Stock Prices Over Time</a:t>
-            </a:r>
-          </a:p>
-        </p:txBody>
-      </p:sp>
-      <p:sp>
-        <p:nvSpPr>
-          <p:cNvPr id="5" name="TextBox 4">
-            <a:extLst>
-              <a:ext uri="{FF2B5EF4-FFF2-40B4-BE49-F238E27FC236}">
-                <a16:creationId xmlns:a16="http://schemas.microsoft.com/office/drawing/2014/main" id="{8B84E03D-9929-F125-306A-BE17A71D9A13}"/>
-              </a:ext>
-            </a:extLst>
-          </p:cNvPr>
-          <p:cNvSpPr txBox="1"/>
-          <p:nvPr/>
-        </p:nvSpPr>
-        <p:spPr>
-          <a:xfrm>
-            <a:off x="1144923" y="3228617"/>
-            <a:ext cx="5315189" cy="1368438"/>
-          </a:xfrm>
-          <a:prstGeom prst="rect">
-            <a:avLst/>
-          </a:prstGeom>
-        </p:spPr>
-        <p:txBody>
-          <a:bodyPr vert="horz" lIns="91440" tIns="45720" rIns="91440" bIns="45720" rtlCol="0" anchor="t">
-            <a:normAutofit/>
-          </a:bodyPr>
-          <a:lstStyle/>
-          <a:p>
-            <a:pPr marL="285750" indent="-228600" defTabSz="914400">
-              <a:lnSpc>
-                <a:spcPct val="90000"/>
-              </a:lnSpc>
-              <a:spcAft>
-                <a:spcPts val="600"/>
-              </a:spcAft>
-              <a:buFont typeface="Arial" panose="020B0604020202020204" pitchFamily="34" charset="0"/>
-              <a:buChar char="•"/>
-            </a:pPr>
-            <a:r>
-              <a:rPr lang="en-US" sz="2000" dirty="0"/>
-              <a:t>Before 2020, Google stock outperformed Apple’s. In 2020, Apple prices surpassed Google’s, showing competitor influence and justifying the inclusion of Google data. </a:t>
-            </a:r>
-          </a:p>
-        </p:txBody>
-      </p:sp>
-      <p:sp>
-        <p:nvSpPr>
-          <p:cNvPr id="4147" name="Rectangle 4146">
-            <a:extLst>
-              <a:ext uri="{FF2B5EF4-FFF2-40B4-BE49-F238E27FC236}">
-                <a16:creationId xmlns:a16="http://schemas.microsoft.com/office/drawing/2014/main" id="{7004738A-9D34-43E8-97D2-CA0EED4F8BE0}"/>
-              </a:ext>
-              <a:ext uri="{C183D7F6-B498-43B3-948B-1728B52AA6E4}">
-                <adec:decorative xmlns:adec="http://schemas.microsoft.com/office/drawing/2017/decorative" val="1"/>
-              </a:ext>
-            </a:extLst>
-          </p:cNvPr>
-          <p:cNvSpPr>
-            <a:spLocks noGrp="1" noRot="1" noChangeAspect="1" noMove="1" noResize="1" noEditPoints="1" noAdjustHandles="1" noChangeArrowheads="1" noChangeShapeType="1" noTextEdit="1"/>
-          </p:cNvSpPr>
-          <p:nvPr>
-            <p:extLst>
-              <p:ext uri="{386F3935-93C4-4BCD-93E2-E3B085C9AB24}">
-                <p16:designElem xmlns:p16="http://schemas.microsoft.com/office/powerpoint/2015/main" val="1"/>
-              </p:ext>
-            </p:extLst>
-          </p:nvPr>
-        </p:nvSpPr>
-        <p:spPr>
-          <a:xfrm rot="10800000" flipH="1">
-            <a:off x="8123333" y="-5"/>
-            <a:ext cx="4092521" cy="6858000"/>
-          </a:xfrm>
-          <a:prstGeom prst="rect">
-            <a:avLst/>
-          </a:prstGeom>
-          <a:gradFill>
-            <a:gsLst>
-              <a:gs pos="8000">
-                <a:srgbClr val="000000">
-                  <a:alpha val="94000"/>
-                </a:srgbClr>
-              </a:gs>
-              <a:gs pos="100000">
-                <a:schemeClr val="accent1"/>
-              </a:gs>
-            </a:gsLst>
-            <a:lin ang="2400000" scaled="0"/>
-          </a:gradFill>
+          </a:solidFill>
           <a:ln>
             <a:noFill/>
           </a:ln>
@@ -4370,10 +6382,82 @@
       </p:sp>
       <p:sp>
         <p:nvSpPr>
-          <p:cNvPr id="4149" name="Rectangle 4148">
+          <p:cNvPr id="7" name="Title 6">
             <a:extLst>
               <a:ext uri="{FF2B5EF4-FFF2-40B4-BE49-F238E27FC236}">
-                <a16:creationId xmlns:a16="http://schemas.microsoft.com/office/drawing/2014/main" id="{B8B8D07F-F13E-443E-BA68-2D26672D76B9}"/>
+                <a16:creationId xmlns:a16="http://schemas.microsoft.com/office/drawing/2014/main" id="{B9AECE31-7D7D-34B5-9306-576565D97C5B}"/>
+              </a:ext>
+            </a:extLst>
+          </p:cNvPr>
+          <p:cNvSpPr>
+            <a:spLocks noGrp="1"/>
+          </p:cNvSpPr>
+          <p:nvPr>
+            <p:ph type="title"/>
+          </p:nvPr>
+        </p:nvSpPr>
+        <p:spPr>
+          <a:xfrm>
+            <a:off x="1156851" y="637763"/>
+            <a:ext cx="2910051" cy="5576768"/>
+          </a:xfrm>
+        </p:spPr>
+        <p:txBody>
+          <a:bodyPr vert="horz" lIns="91440" tIns="45720" rIns="91440" bIns="45720" rtlCol="0" anchor="t">
+            <a:normAutofit fontScale="90000"/>
+          </a:bodyPr>
+          <a:lstStyle/>
+          <a:p>
+            <a:pPr algn="r"/>
+            <a:br>
+              <a:rPr lang="en-US" sz="4800" kern="1200" dirty="0">
+                <a:solidFill>
+                  <a:schemeClr val="bg1"/>
+                </a:solidFill>
+                <a:latin typeface="+mj-lt"/>
+                <a:ea typeface="+mj-ea"/>
+                <a:cs typeface="+mj-cs"/>
+              </a:rPr>
+            </a:br>
+            <a:br>
+              <a:rPr lang="en-US" sz="4800" kern="1200" dirty="0">
+                <a:solidFill>
+                  <a:schemeClr val="bg1"/>
+                </a:solidFill>
+                <a:latin typeface="+mj-lt"/>
+                <a:ea typeface="+mj-ea"/>
+                <a:cs typeface="+mj-cs"/>
+              </a:rPr>
+            </a:br>
+            <a:br>
+              <a:rPr lang="en-US" sz="4800" kern="1200" dirty="0">
+                <a:solidFill>
+                  <a:schemeClr val="bg1"/>
+                </a:solidFill>
+                <a:latin typeface="+mj-lt"/>
+                <a:ea typeface="+mj-ea"/>
+                <a:cs typeface="+mj-cs"/>
+              </a:rPr>
+            </a:br>
+            <a:r>
+              <a:rPr lang="en-US" sz="5000" kern="1200" dirty="0">
+                <a:solidFill>
+                  <a:schemeClr val="bg1"/>
+                </a:solidFill>
+                <a:latin typeface="Helvetica" panose="020B0604020202020204" pitchFamily="34" charset="0"/>
+                <a:cs typeface="Helvetica" panose="020B0604020202020204" pitchFamily="34" charset="0"/>
+              </a:rPr>
+              <a:t>Google and Apple Stock Prices Over Time</a:t>
+            </a:r>
+          </a:p>
+        </p:txBody>
+      </p:sp>
+      <p:sp>
+        <p:nvSpPr>
+          <p:cNvPr id="1033" name="Rectangle 1032">
+            <a:extLst>
+              <a:ext uri="{FF2B5EF4-FFF2-40B4-BE49-F238E27FC236}">
+                <a16:creationId xmlns:a16="http://schemas.microsoft.com/office/drawing/2014/main" id="{B34F5AD2-EDBD-4BBD-A55C-EAFFD0C7097A}"/>
               </a:ext>
               <a:ext uri="{C183D7F6-B498-43B3-948B-1728B52AA6E4}">
                 <adec:decorative xmlns:adec="http://schemas.microsoft.com/office/drawing/2017/decorative" val="1"/>
@@ -4392,30 +6476,18 @@
           </p:nvPr>
         </p:nvSpPr>
         <p:spPr>
-          <a:xfrm rot="10800000" flipH="1">
-            <a:off x="8123333" y="-2"/>
-            <a:ext cx="4092521" cy="6400369"/>
+          <a:xfrm>
+            <a:off x="4662118" y="0"/>
+            <a:ext cx="7529872" cy="6858001"/>
           </a:xfrm>
           <a:prstGeom prst="rect">
             <a:avLst/>
           </a:prstGeom>
-          <a:gradFill>
-            <a:gsLst>
-              <a:gs pos="31000">
-                <a:schemeClr val="accent1">
-                  <a:lumMod val="50000"/>
-                  <a:alpha val="0"/>
-                </a:schemeClr>
-              </a:gs>
-              <a:gs pos="100000">
-                <a:schemeClr val="accent1">
-                  <a:lumMod val="50000"/>
-                  <a:alpha val="26000"/>
-                </a:schemeClr>
-              </a:gs>
-            </a:gsLst>
-            <a:lin ang="18000000" scaled="0"/>
-          </a:gradFill>
+          <a:solidFill>
+            <a:schemeClr val="bg1">
+              <a:lumMod val="95000"/>
+            </a:schemeClr>
+          </a:solidFill>
           <a:ln>
             <a:noFill/>
           </a:ln>
@@ -4441,16 +6513,62 @@
           <a:lstStyle/>
           <a:p>
             <a:pPr algn="ctr"/>
-            <a:endParaRPr lang="en-US" dirty="0"/>
-          </a:p>
-        </p:txBody>
-      </p:sp>
-      <p:sp>
-        <p:nvSpPr>
-          <p:cNvPr id="4151" name="Rectangle 4150">
+            <a:endParaRPr lang="en-US"/>
+          </a:p>
+        </p:txBody>
+      </p:sp>
+      <p:pic>
+        <p:nvPicPr>
+          <p:cNvPr id="1026" name="Picture 2">
             <a:extLst>
               <a:ext uri="{FF2B5EF4-FFF2-40B4-BE49-F238E27FC236}">
-                <a16:creationId xmlns:a16="http://schemas.microsoft.com/office/drawing/2014/main" id="{2813A4FA-24A5-41ED-A534-3807D1B2F344}"/>
+                <a16:creationId xmlns:a16="http://schemas.microsoft.com/office/drawing/2014/main" id="{305664CF-E6BA-0D1C-B5F5-62C6AF71D4D6}"/>
+              </a:ext>
+            </a:extLst>
+          </p:cNvPr>
+          <p:cNvPicPr>
+            <a:picLocks noChangeAspect="1" noChangeArrowheads="1"/>
+          </p:cNvPicPr>
+          <p:nvPr/>
+        </p:nvPicPr>
+        <p:blipFill>
+          <a:blip r:embed="rId2">
+            <a:extLst>
+              <a:ext uri="{28A0092B-C50C-407E-A947-70E740481C1C}">
+                <a14:useLocalDpi xmlns:a14="http://schemas.microsoft.com/office/drawing/2010/main" val="0"/>
+              </a:ext>
+            </a:extLst>
+          </a:blip>
+          <a:stretch>
+            <a:fillRect/>
+          </a:stretch>
+        </p:blipFill>
+        <p:spPr bwMode="auto">
+          <a:xfrm>
+            <a:off x="5587417" y="637762"/>
+            <a:ext cx="5297936" cy="2927110"/>
+          </a:xfrm>
+          <a:prstGeom prst="rect">
+            <a:avLst/>
+          </a:prstGeom>
+          <a:noFill/>
+          <a:extLst>
+            <a:ext uri="{909E8E84-426E-40DD-AFC4-6F175D3DCCD1}">
+              <a14:hiddenFill xmlns:a14="http://schemas.microsoft.com/office/drawing/2010/main">
+                <a:solidFill>
+                  <a:srgbClr val="FFFFFF"/>
+                </a:solidFill>
+              </a14:hiddenFill>
+            </a:ext>
+          </a:extLst>
+        </p:spPr>
+      </p:pic>
+      <p:sp>
+        <p:nvSpPr>
+          <p:cNvPr id="1035" name="Rectangle 1034">
+            <a:extLst>
+              <a:ext uri="{FF2B5EF4-FFF2-40B4-BE49-F238E27FC236}">
+                <a16:creationId xmlns:a16="http://schemas.microsoft.com/office/drawing/2014/main" id="{450D3AD2-FA80-415F-A9CE-54D884561CD7}"/>
               </a:ext>
               <a:ext uri="{C183D7F6-B498-43B3-948B-1728B52AA6E4}">
                 <adec:decorative xmlns:adec="http://schemas.microsoft.com/office/drawing/2017/decorative" val="1"/>
@@ -4469,28 +6587,16 @@
           </p:nvPr>
         </p:nvSpPr>
         <p:spPr>
-          <a:xfrm rot="10800000" flipH="1">
-            <a:off x="8123333" y="-22"/>
-            <a:ext cx="4068667" cy="6400389"/>
+          <a:xfrm>
+            <a:off x="5439976" y="4006121"/>
+            <a:ext cx="457200" cy="45720"/>
           </a:xfrm>
           <a:prstGeom prst="rect">
             <a:avLst/>
           </a:prstGeom>
-          <a:gradFill>
-            <a:gsLst>
-              <a:gs pos="0">
-                <a:schemeClr val="accent1">
-                  <a:alpha val="0"/>
-                </a:schemeClr>
-              </a:gs>
-              <a:gs pos="72000">
-                <a:srgbClr val="000000">
-                  <a:alpha val="21000"/>
-                </a:srgbClr>
-              </a:gs>
-            </a:gsLst>
-            <a:lin ang="3000000" scaled="0"/>
-          </a:gradFill>
+          <a:solidFill>
+            <a:schemeClr val="tx1"/>
+          </a:solidFill>
           <a:ln>
             <a:noFill/>
           </a:ln>
@@ -4516,131 +6622,57 @@
           <a:lstStyle/>
           <a:p>
             <a:pPr algn="ctr"/>
-            <a:endParaRPr lang="en-US" dirty="0"/>
-          </a:p>
-        </p:txBody>
-      </p:sp>
-      <p:sp>
-        <p:nvSpPr>
-          <p:cNvPr id="4153" name="Rectangle 4152">
+            <a:endParaRPr lang="en-US"/>
+          </a:p>
+        </p:txBody>
+      </p:sp>
+      <p:sp>
+        <p:nvSpPr>
+          <p:cNvPr id="5" name="TextBox 4">
             <a:extLst>
               <a:ext uri="{FF2B5EF4-FFF2-40B4-BE49-F238E27FC236}">
-                <a16:creationId xmlns:a16="http://schemas.microsoft.com/office/drawing/2014/main" id="{C3944F27-CA70-4E84-A51A-E6BF89558979}"/>
-              </a:ext>
-              <a:ext uri="{C183D7F6-B498-43B3-948B-1728B52AA6E4}">
-                <adec:decorative xmlns:adec="http://schemas.microsoft.com/office/drawing/2017/decorative" val="1"/>
+                <a16:creationId xmlns:a16="http://schemas.microsoft.com/office/drawing/2014/main" id="{8B84E03D-9929-F125-306A-BE17A71D9A13}"/>
               </a:ext>
             </a:extLst>
           </p:cNvPr>
-          <p:cNvSpPr>
-            <a:spLocks noGrp="1" noRot="1" noChangeAspect="1" noMove="1" noResize="1" noEditPoints="1" noAdjustHandles="1" noChangeArrowheads="1" noChangeShapeType="1" noTextEdit="1"/>
-          </p:cNvSpPr>
-          <p:nvPr>
-            <p:extLst>
-              <p:ext uri="{386F3935-93C4-4BCD-93E2-E3B085C9AB24}">
-                <p16:designElem xmlns:p16="http://schemas.microsoft.com/office/powerpoint/2015/main" val="1"/>
-              </p:ext>
-            </p:extLst>
-          </p:nvPr>
+          <p:cNvSpPr txBox="1"/>
+          <p:nvPr/>
         </p:nvSpPr>
         <p:spPr>
-          <a:xfrm rot="10800000" flipH="1">
-            <a:off x="8123333" y="-10"/>
-            <a:ext cx="3611467" cy="6857997"/>
+          <a:xfrm>
+            <a:off x="5439965" y="4212709"/>
+            <a:ext cx="5605390" cy="2001821"/>
           </a:xfrm>
           <a:prstGeom prst="rect">
             <a:avLst/>
           </a:prstGeom>
-          <a:gradFill>
-            <a:gsLst>
-              <a:gs pos="0">
-                <a:schemeClr val="accent1">
-                  <a:alpha val="0"/>
-                </a:schemeClr>
-              </a:gs>
-              <a:gs pos="93000">
-                <a:srgbClr val="000000">
-                  <a:alpha val="29000"/>
-                </a:srgbClr>
-              </a:gs>
-            </a:gsLst>
-            <a:lin ang="5400000" scaled="0"/>
-          </a:gradFill>
-          <a:ln>
-            <a:noFill/>
-          </a:ln>
         </p:spPr>
-        <p:style>
-          <a:lnRef idx="2">
-            <a:schemeClr val="accent1">
-              <a:shade val="50000"/>
-            </a:schemeClr>
-          </a:lnRef>
-          <a:fillRef idx="1">
-            <a:schemeClr val="accent1"/>
-          </a:fillRef>
-          <a:effectRef idx="0">
-            <a:schemeClr val="accent1"/>
-          </a:effectRef>
-          <a:fontRef idx="minor">
-            <a:schemeClr val="lt1"/>
-          </a:fontRef>
-        </p:style>
-        <p:txBody>
-          <a:bodyPr rtlCol="0" anchor="ctr"/>
+        <p:txBody>
+          <a:bodyPr vert="horz" lIns="91440" tIns="45720" rIns="91440" bIns="45720" rtlCol="0">
+            <a:normAutofit/>
+          </a:bodyPr>
           <a:lstStyle/>
           <a:p>
-            <a:pPr algn="ctr"/>
-            <a:endParaRPr lang="en-US" dirty="0"/>
-          </a:p>
-        </p:txBody>
-      </p:sp>
-      <p:pic>
-        <p:nvPicPr>
-          <p:cNvPr id="1026" name="Picture 2">
-            <a:extLst>
-              <a:ext uri="{FF2B5EF4-FFF2-40B4-BE49-F238E27FC236}">
-                <a16:creationId xmlns:a16="http://schemas.microsoft.com/office/drawing/2014/main" id="{305664CF-E6BA-0D1C-B5F5-62C6AF71D4D6}"/>
-              </a:ext>
-            </a:extLst>
-          </p:cNvPr>
-          <p:cNvPicPr>
-            <a:picLocks noChangeAspect="1" noChangeArrowheads="1"/>
-          </p:cNvPicPr>
-          <p:nvPr/>
-        </p:nvPicPr>
-        <p:blipFill>
-          <a:blip r:embed="rId2">
-            <a:extLst>
-              <a:ext uri="{28A0092B-C50C-407E-A947-70E740481C1C}">
-                <a14:useLocalDpi xmlns:a14="http://schemas.microsoft.com/office/drawing/2010/main" val="0"/>
-              </a:ext>
-            </a:extLst>
-          </a:blip>
-          <a:stretch>
-            <a:fillRect/>
-          </a:stretch>
-        </p:blipFill>
-        <p:spPr bwMode="auto">
-          <a:xfrm>
-            <a:off x="7075967" y="2292838"/>
-            <a:ext cx="4170530" cy="2304217"/>
-          </a:xfrm>
-          <a:prstGeom prst="rect">
-            <a:avLst/>
-          </a:prstGeom>
-          <a:noFill/>
-          <a:extLst>
-            <a:ext uri="{909E8E84-426E-40DD-AFC4-6F175D3DCCD1}">
-              <a14:hiddenFill xmlns:a14="http://schemas.microsoft.com/office/drawing/2010/main">
-                <a:solidFill>
-                  <a:srgbClr val="FFFFFF"/>
-                </a:solidFill>
-              </a14:hiddenFill>
-            </a:ext>
-          </a:extLst>
-        </p:spPr>
-      </p:pic>
+            <a:pPr marL="285750" indent="-228600" defTabSz="914400">
+              <a:lnSpc>
+                <a:spcPct val="90000"/>
+              </a:lnSpc>
+              <a:spcAft>
+                <a:spcPts val="600"/>
+              </a:spcAft>
+              <a:buFont typeface="Arial" panose="020B0604020202020204" pitchFamily="34" charset="0"/>
+              <a:buChar char="•"/>
+            </a:pPr>
+            <a:r>
+              <a:rPr lang="en-US" dirty="0">
+                <a:latin typeface="Helvetica" panose="020B0604020202020204" pitchFamily="34" charset="0"/>
+                <a:cs typeface="Helvetica" panose="020B0604020202020204" pitchFamily="34" charset="0"/>
+              </a:rPr>
+              <a:t>Before 2020, Google stock outperformed Apple’s. In 2020, Apple prices surpassed Google’s, showing competitor influence and justifying the inclusion of Google data. </a:t>
+            </a:r>
+          </a:p>
+        </p:txBody>
+      </p:sp>
     </p:spTree>
     <p:extLst>
       <p:ext uri="{BB962C8B-B14F-4D97-AF65-F5344CB8AC3E}">
@@ -4679,12 +6711,12 @@
           <a:chExt cx="0" cy="0"/>
         </a:xfrm>
       </p:grpSpPr>
-      <p:sp useBgFill="1">
-        <p:nvSpPr>
-          <p:cNvPr id="53" name="Rectangle 52">
+      <p:sp>
+        <p:nvSpPr>
+          <p:cNvPr id="12" name="Rectangle 11">
             <a:extLst>
               <a:ext uri="{FF2B5EF4-FFF2-40B4-BE49-F238E27FC236}">
-                <a16:creationId xmlns:a16="http://schemas.microsoft.com/office/drawing/2014/main" id="{09588DA8-065E-4F6F-8EFD-43104AB2E0CF}"/>
+                <a16:creationId xmlns:a16="http://schemas.microsoft.com/office/drawing/2014/main" id="{C3896A03-3945-419A-B66B-4EE266EDD152}"/>
               </a:ext>
               <a:ext uri="{C183D7F6-B498-43B3-948B-1728B52AA6E4}">
                 <adec:decorative xmlns:adec="http://schemas.microsoft.com/office/drawing/2017/decorative" val="1"/>
@@ -4704,177 +6736,18 @@
         </p:nvSpPr>
         <p:spPr>
           <a:xfrm>
-            <a:off x="0" y="0"/>
-            <a:ext cx="12192000" cy="6858000"/>
+            <a:off x="10" y="0"/>
+            <a:ext cx="4654285" cy="6858001"/>
           </a:xfrm>
           <a:prstGeom prst="rect">
             <a:avLst/>
           </a:prstGeom>
-          <a:ln w="12700" cap="flat" cmpd="sng" algn="ctr">
-            <a:noFill/>
-            <a:prstDash val="solid"/>
-            <a:miter lim="800000"/>
-          </a:ln>
-          <a:effectLst/>
-          <a:extLst>
-            <a:ext uri="{91240B29-F687-4F45-9708-019B960494DF}">
-              <a14:hiddenLine xmlns:a14="http://schemas.microsoft.com/office/drawing/2010/main" w="12700" cap="flat" cmpd="sng" algn="ctr">
-                <a:solidFill>
-                  <a:schemeClr val="accent1">
-                    <a:shade val="50000"/>
-                  </a:schemeClr>
-                </a:solidFill>
-                <a:prstDash val="solid"/>
-                <a:miter lim="800000"/>
-              </a14:hiddenLine>
-            </a:ext>
-          </a:extLst>
-        </p:spPr>
-        <p:style>
-          <a:lnRef idx="2">
-            <a:schemeClr val="accent1">
-              <a:shade val="50000"/>
+          <a:solidFill>
+            <a:schemeClr val="tx1">
+              <a:lumMod val="85000"/>
+              <a:lumOff val="15000"/>
             </a:schemeClr>
-          </a:lnRef>
-          <a:fillRef idx="1">
-            <a:schemeClr val="accent1"/>
-          </a:fillRef>
-          <a:effectRef idx="0">
-            <a:schemeClr val="accent1"/>
-          </a:effectRef>
-          <a:fontRef idx="minor">
-            <a:schemeClr val="lt1"/>
-          </a:fontRef>
-        </p:style>
-        <p:txBody>
-          <a:bodyPr rtlCol="0" anchor="ctr"/>
-          <a:lstStyle/>
-          <a:p>
-            <a:pPr algn="ctr"/>
-            <a:endParaRPr lang="en-US"/>
-          </a:p>
-        </p:txBody>
-      </p:sp>
-      <p:sp useBgFill="1">
-        <p:nvSpPr>
-          <p:cNvPr id="55" name="Rectangle 54">
-            <a:extLst>
-              <a:ext uri="{FF2B5EF4-FFF2-40B4-BE49-F238E27FC236}">
-                <a16:creationId xmlns:a16="http://schemas.microsoft.com/office/drawing/2014/main" id="{C4285719-470E-454C-AF62-8323075F1F5B}"/>
-              </a:ext>
-              <a:ext uri="{C183D7F6-B498-43B3-948B-1728B52AA6E4}">
-                <adec:decorative xmlns:adec="http://schemas.microsoft.com/office/drawing/2017/decorative" val="1"/>
-              </a:ext>
-            </a:extLst>
-          </p:cNvPr>
-          <p:cNvSpPr>
-            <a:spLocks noGrp="1" noRot="1" noChangeAspect="1" noMove="1" noResize="1" noEditPoints="1" noAdjustHandles="1" noChangeArrowheads="1" noChangeShapeType="1" noTextEdit="1"/>
-          </p:cNvSpPr>
-          <p:nvPr>
-            <p:extLst>
-              <p:ext uri="{386F3935-93C4-4BCD-93E2-E3B085C9AB24}">
-                <p16:designElem xmlns:p16="http://schemas.microsoft.com/office/powerpoint/2015/main" val="1"/>
-              </p:ext>
-            </p:extLst>
-          </p:nvPr>
-        </p:nvSpPr>
-        <p:spPr>
-          <a:xfrm>
-            <a:off x="0" y="0"/>
-            <a:ext cx="12188952" cy="6858000"/>
-          </a:xfrm>
-          <a:prstGeom prst="rect">
-            <a:avLst/>
-          </a:prstGeom>
-          <a:ln w="12700" cap="flat" cmpd="sng" algn="ctr">
-            <a:noFill/>
-            <a:prstDash val="solid"/>
-            <a:miter lim="800000"/>
-          </a:ln>
-          <a:effectLst/>
-          <a:extLst>
-            <a:ext uri="{91240B29-F687-4F45-9708-019B960494DF}">
-              <a14:hiddenLine xmlns:a14="http://schemas.microsoft.com/office/drawing/2010/main" w="12700" cap="flat" cmpd="sng" algn="ctr">
-                <a:solidFill>
-                  <a:schemeClr val="accent1">
-                    <a:shade val="50000"/>
-                  </a:schemeClr>
-                </a:solidFill>
-                <a:prstDash val="solid"/>
-                <a:miter lim="800000"/>
-              </a14:hiddenLine>
-            </a:ext>
-          </a:extLst>
-        </p:spPr>
-        <p:style>
-          <a:lnRef idx="2">
-            <a:schemeClr val="accent1">
-              <a:shade val="50000"/>
-            </a:schemeClr>
-          </a:lnRef>
-          <a:fillRef idx="1">
-            <a:schemeClr val="accent1"/>
-          </a:fillRef>
-          <a:effectRef idx="0">
-            <a:schemeClr val="accent1"/>
-          </a:effectRef>
-          <a:fontRef idx="minor">
-            <a:schemeClr val="lt1"/>
-          </a:fontRef>
-        </p:style>
-        <p:txBody>
-          <a:bodyPr rtlCol="0" anchor="ctr"/>
-          <a:lstStyle/>
-          <a:p>
-            <a:pPr algn="ctr"/>
-            <a:endParaRPr lang="en-US"/>
-          </a:p>
-        </p:txBody>
-      </p:sp>
-      <p:sp>
-        <p:nvSpPr>
-          <p:cNvPr id="57" name="Rectangle 56">
-            <a:extLst>
-              <a:ext uri="{FF2B5EF4-FFF2-40B4-BE49-F238E27FC236}">
-                <a16:creationId xmlns:a16="http://schemas.microsoft.com/office/drawing/2014/main" id="{CD9FE4EF-C4D8-49A0-B2FF-81D8DB7D8A24}"/>
-              </a:ext>
-              <a:ext uri="{C183D7F6-B498-43B3-948B-1728B52AA6E4}">
-                <adec:decorative xmlns:adec="http://schemas.microsoft.com/office/drawing/2017/decorative" val="1"/>
-              </a:ext>
-            </a:extLst>
-          </p:cNvPr>
-          <p:cNvSpPr>
-            <a:spLocks noGrp="1" noRot="1" noChangeAspect="1" noMove="1" noResize="1" noEditPoints="1" noAdjustHandles="1" noChangeArrowheads="1" noChangeShapeType="1" noTextEdit="1"/>
-          </p:cNvSpPr>
-          <p:nvPr>
-            <p:extLst>
-              <p:ext uri="{386F3935-93C4-4BCD-93E2-E3B085C9AB24}">
-                <p16:designElem xmlns:p16="http://schemas.microsoft.com/office/powerpoint/2015/main" val="1"/>
-              </p:ext>
-            </p:extLst>
-          </p:nvPr>
-        </p:nvSpPr>
-        <p:spPr>
-          <a:xfrm rot="5400000" flipH="1">
-            <a:off x="-1410084" y="1410082"/>
-            <a:ext cx="6858000" cy="4037836"/>
-          </a:xfrm>
-          <a:prstGeom prst="rect">
-            <a:avLst/>
-          </a:prstGeom>
-          <a:gradFill>
-            <a:gsLst>
-              <a:gs pos="8000">
-                <a:srgbClr val="000000"/>
-              </a:gs>
-              <a:gs pos="100000">
-                <a:schemeClr val="accent1">
-                  <a:lumMod val="75000"/>
-                </a:schemeClr>
-              </a:gs>
-            </a:gsLst>
-            <a:lin ang="3000000" scaled="0"/>
-          </a:gradFill>
+          </a:solidFill>
           <a:ln>
             <a:noFill/>
           </a:ln>
@@ -4906,10 +6779,102 @@
       </p:sp>
       <p:sp>
         <p:nvSpPr>
-          <p:cNvPr id="59" name="Rectangle 58">
+          <p:cNvPr id="2" name="Title 1">
             <a:extLst>
               <a:ext uri="{FF2B5EF4-FFF2-40B4-BE49-F238E27FC236}">
-                <a16:creationId xmlns:a16="http://schemas.microsoft.com/office/drawing/2014/main" id="{4300840D-0A0B-4512-BACA-B439D5B9C57C}"/>
+                <a16:creationId xmlns:a16="http://schemas.microsoft.com/office/drawing/2014/main" id="{20FE717D-B5C1-FD68-153F-DB63A654C721}"/>
+              </a:ext>
+            </a:extLst>
+          </p:cNvPr>
+          <p:cNvSpPr>
+            <a:spLocks noGrp="1"/>
+          </p:cNvSpPr>
+          <p:nvPr>
+            <p:ph type="title"/>
+          </p:nvPr>
+        </p:nvSpPr>
+        <p:spPr>
+          <a:xfrm>
+            <a:off x="1156851" y="637763"/>
+            <a:ext cx="2910051" cy="5576768"/>
+          </a:xfrm>
+        </p:spPr>
+        <p:txBody>
+          <a:bodyPr vert="horz" lIns="91440" tIns="45720" rIns="91440" bIns="45720" rtlCol="0" anchor="t">
+            <a:normAutofit fontScale="90000"/>
+          </a:bodyPr>
+          <a:lstStyle/>
+          <a:p>
+            <a:pPr algn="r"/>
+            <a:br>
+              <a:rPr lang="en-US" sz="5000" kern="1200" dirty="0">
+                <a:solidFill>
+                  <a:schemeClr val="bg1"/>
+                </a:solidFill>
+                <a:latin typeface="+mj-lt"/>
+                <a:ea typeface="+mj-ea"/>
+                <a:cs typeface="+mj-cs"/>
+              </a:rPr>
+            </a:br>
+            <a:br>
+              <a:rPr lang="en-US" sz="5000" kern="1200" dirty="0">
+                <a:solidFill>
+                  <a:schemeClr val="bg1"/>
+                </a:solidFill>
+                <a:latin typeface="+mj-lt"/>
+                <a:ea typeface="+mj-ea"/>
+                <a:cs typeface="+mj-cs"/>
+              </a:rPr>
+            </a:br>
+            <a:br>
+              <a:rPr lang="en-US" sz="5000" kern="1200" dirty="0">
+                <a:solidFill>
+                  <a:schemeClr val="bg1"/>
+                </a:solidFill>
+                <a:latin typeface="+mj-lt"/>
+                <a:ea typeface="+mj-ea"/>
+                <a:cs typeface="+mj-cs"/>
+              </a:rPr>
+            </a:br>
+            <a:br>
+              <a:rPr lang="en-US" sz="5000" kern="1200" dirty="0">
+                <a:solidFill>
+                  <a:schemeClr val="bg1"/>
+                </a:solidFill>
+                <a:latin typeface="+mj-lt"/>
+                <a:ea typeface="+mj-ea"/>
+                <a:cs typeface="+mj-cs"/>
+              </a:rPr>
+            </a:br>
+            <a:br>
+              <a:rPr lang="en-US" sz="5000" kern="1200" dirty="0">
+                <a:solidFill>
+                  <a:schemeClr val="bg1"/>
+                </a:solidFill>
+                <a:latin typeface="+mj-lt"/>
+                <a:ea typeface="+mj-ea"/>
+                <a:cs typeface="+mj-cs"/>
+              </a:rPr>
+            </a:br>
+            <a:r>
+              <a:rPr lang="en-US" sz="5000" kern="1200" dirty="0">
+                <a:solidFill>
+                  <a:schemeClr val="bg1"/>
+                </a:solidFill>
+                <a:latin typeface="Helvetica" panose="020B0604020202020204" pitchFamily="34" charset="0"/>
+                <a:cs typeface="Helvetica" panose="020B0604020202020204" pitchFamily="34" charset="0"/>
+              </a:rPr>
+              <a:t>Model Overviews</a:t>
+            </a:r>
+          </a:p>
+        </p:txBody>
+      </p:sp>
+      <p:sp>
+        <p:nvSpPr>
+          <p:cNvPr id="14" name="Rectangle 13">
+            <a:extLst>
+              <a:ext uri="{FF2B5EF4-FFF2-40B4-BE49-F238E27FC236}">
+                <a16:creationId xmlns:a16="http://schemas.microsoft.com/office/drawing/2014/main" id="{B34F5AD2-EDBD-4BBD-A55C-EAFFD0C7097A}"/>
               </a:ext>
               <a:ext uri="{C183D7F6-B498-43B3-948B-1728B52AA6E4}">
                 <adec:decorative xmlns:adec="http://schemas.microsoft.com/office/drawing/2017/decorative" val="1"/>
@@ -4928,28 +6893,18 @@
           </p:nvPr>
         </p:nvSpPr>
         <p:spPr>
-          <a:xfrm rot="5400000" flipH="1">
-            <a:off x="-1410085" y="1420219"/>
-            <a:ext cx="6857999" cy="4037839"/>
+          <a:xfrm>
+            <a:off x="4662118" y="0"/>
+            <a:ext cx="7529872" cy="6858001"/>
           </a:xfrm>
           <a:prstGeom prst="rect">
             <a:avLst/>
           </a:prstGeom>
-          <a:gradFill>
-            <a:gsLst>
-              <a:gs pos="0">
-                <a:srgbClr val="000000">
-                  <a:alpha val="0"/>
-                </a:srgbClr>
-              </a:gs>
-              <a:gs pos="99000">
-                <a:schemeClr val="accent1">
-                  <a:alpha val="46000"/>
-                </a:schemeClr>
-              </a:gs>
-            </a:gsLst>
-            <a:lin ang="1800000" scaled="0"/>
-          </a:gradFill>
+          <a:solidFill>
+            <a:schemeClr val="bg1">
+              <a:lumMod val="95000"/>
+            </a:schemeClr>
+          </a:solidFill>
           <a:ln>
             <a:noFill/>
           </a:ln>
@@ -4979,12 +6934,51 @@
           </a:p>
         </p:txBody>
       </p:sp>
-      <p:sp>
-        <p:nvSpPr>
-          <p:cNvPr id="61" name="Rectangle 60">
+      <p:pic>
+        <p:nvPicPr>
+          <p:cNvPr id="9" name="Graphic 8" descr="Apple">
             <a:extLst>
               <a:ext uri="{FF2B5EF4-FFF2-40B4-BE49-F238E27FC236}">
-                <a16:creationId xmlns:a16="http://schemas.microsoft.com/office/drawing/2014/main" id="{D2B78728-A580-49A7-84F9-6EF6F583ADE0}"/>
+                <a16:creationId xmlns:a16="http://schemas.microsoft.com/office/drawing/2014/main" id="{61073F02-7E4E-2CAB-45EC-634EC29967AC}"/>
+              </a:ext>
+            </a:extLst>
+          </p:cNvPr>
+          <p:cNvPicPr>
+            <a:picLocks noChangeAspect="1"/>
+          </p:cNvPicPr>
+          <p:nvPr/>
+        </p:nvPicPr>
+        <p:blipFill>
+          <a:blip r:embed="rId2">
+            <a:extLst>
+              <a:ext uri="{28A0092B-C50C-407E-A947-70E740481C1C}">
+                <a14:useLocalDpi xmlns:a14="http://schemas.microsoft.com/office/drawing/2010/main" val="0"/>
+              </a:ext>
+              <a:ext uri="{96DAC541-7B7A-43D3-8B79-37D633B846F1}">
+                <asvg:svgBlip xmlns:asvg="http://schemas.microsoft.com/office/drawing/2016/SVG/main" r:embed="rId3"/>
+              </a:ext>
+            </a:extLst>
+          </a:blip>
+          <a:stretch>
+            <a:fillRect/>
+          </a:stretch>
+        </p:blipFill>
+        <p:spPr>
+          <a:xfrm>
+            <a:off x="6772830" y="637762"/>
+            <a:ext cx="2927110" cy="2927110"/>
+          </a:xfrm>
+          <a:prstGeom prst="rect">
+            <a:avLst/>
+          </a:prstGeom>
+        </p:spPr>
+      </p:pic>
+      <p:sp>
+        <p:nvSpPr>
+          <p:cNvPr id="16" name="Rectangle 15">
+            <a:extLst>
+              <a:ext uri="{FF2B5EF4-FFF2-40B4-BE49-F238E27FC236}">
+                <a16:creationId xmlns:a16="http://schemas.microsoft.com/office/drawing/2014/main" id="{450D3AD2-FA80-415F-A9CE-54D884561CD7}"/>
               </a:ext>
               <a:ext uri="{C183D7F6-B498-43B3-948B-1728B52AA6E4}">
                 <adec:decorative xmlns:adec="http://schemas.microsoft.com/office/drawing/2017/decorative" val="1"/>
@@ -5003,28 +6997,16 @@
           </p:nvPr>
         </p:nvSpPr>
         <p:spPr>
-          <a:xfrm rot="5400000" flipH="1">
-            <a:off x="767923" y="3588085"/>
-            <a:ext cx="2501979" cy="4037841"/>
+          <a:xfrm>
+            <a:off x="5439976" y="4006121"/>
+            <a:ext cx="457200" cy="45720"/>
           </a:xfrm>
           <a:prstGeom prst="rect">
             <a:avLst/>
           </a:prstGeom>
-          <a:gradFill>
-            <a:gsLst>
-              <a:gs pos="2000">
-                <a:schemeClr val="accent1">
-                  <a:alpha val="29000"/>
-                </a:schemeClr>
-              </a:gs>
-              <a:gs pos="100000">
-                <a:srgbClr val="000000">
-                  <a:alpha val="30000"/>
-                </a:srgbClr>
-              </a:gs>
-            </a:gsLst>
-            <a:lin ang="7800000" scaled="0"/>
-          </a:gradFill>
+          <a:solidFill>
+            <a:schemeClr val="tx1"/>
+          </a:solidFill>
           <a:ln>
             <a:noFill/>
           </a:ln>
@@ -5050,297 +7032,7 @@
           <a:lstStyle/>
           <a:p>
             <a:pPr algn="ctr"/>
-            <a:endParaRPr lang="en-US" dirty="0"/>
-          </a:p>
-        </p:txBody>
-      </p:sp>
-      <p:sp>
-        <p:nvSpPr>
-          <p:cNvPr id="63" name="Freeform: Shape 62">
-            <a:extLst>
-              <a:ext uri="{FF2B5EF4-FFF2-40B4-BE49-F238E27FC236}">
-                <a16:creationId xmlns:a16="http://schemas.microsoft.com/office/drawing/2014/main" id="{38FAA1A1-D861-433F-88FA-1E9D6FD31D11}"/>
-              </a:ext>
-              <a:ext uri="{C183D7F6-B498-43B3-948B-1728B52AA6E4}">
-                <adec:decorative xmlns:adec="http://schemas.microsoft.com/office/drawing/2017/decorative" val="1"/>
-              </a:ext>
-            </a:extLst>
-          </p:cNvPr>
-          <p:cNvSpPr>
-            <a:spLocks noGrp="1" noRot="1" noChangeAspect="1" noMove="1" noResize="1" noEditPoints="1" noAdjustHandles="1" noChangeArrowheads="1" noChangeShapeType="1" noTextEdit="1"/>
-          </p:cNvSpPr>
-          <p:nvPr>
-            <p:extLst>
-              <p:ext uri="{386F3935-93C4-4BCD-93E2-E3B085C9AB24}">
-                <p16:designElem xmlns:p16="http://schemas.microsoft.com/office/powerpoint/2015/main" val="1"/>
-              </p:ext>
-            </p:extLst>
-          </p:nvPr>
-        </p:nvSpPr>
-        <p:spPr>
-          <a:xfrm rot="20635413">
-            <a:off x="-501737" y="969718"/>
-            <a:ext cx="3900357" cy="4178958"/>
-          </a:xfrm>
-          <a:custGeom>
-            <a:avLst/>
-            <a:gdLst>
-              <a:gd name="connsiteX0" fmla="*/ 2432225 w 3900357"/>
-              <a:gd name="connsiteY0" fmla="*/ 93939 h 4178958"/>
-              <a:gd name="connsiteX1" fmla="*/ 3900357 w 3900357"/>
-              <a:gd name="connsiteY1" fmla="*/ 2089479 h 4178958"/>
-              <a:gd name="connsiteX2" fmla="*/ 1810878 w 3900357"/>
-              <a:gd name="connsiteY2" fmla="*/ 4178958 h 4178958"/>
-              <a:gd name="connsiteX3" fmla="*/ 78249 w 3900357"/>
-              <a:gd name="connsiteY3" fmla="*/ 3257727 h 4178958"/>
-              <a:gd name="connsiteX4" fmla="*/ 0 w 3900357"/>
-              <a:gd name="connsiteY4" fmla="*/ 3128923 h 4178958"/>
-              <a:gd name="connsiteX5" fmla="*/ 831324 w 3900357"/>
-              <a:gd name="connsiteY5" fmla="*/ 244281 h 4178958"/>
-              <a:gd name="connsiteX6" fmla="*/ 997559 w 3900357"/>
-              <a:gd name="connsiteY6" fmla="*/ 164202 h 4178958"/>
-              <a:gd name="connsiteX7" fmla="*/ 1810878 w 3900357"/>
-              <a:gd name="connsiteY7" fmla="*/ 0 h 4178958"/>
-              <a:gd name="connsiteX8" fmla="*/ 2432225 w 3900357"/>
-              <a:gd name="connsiteY8" fmla="*/ 93939 h 4178958"/>
-            </a:gdLst>
-            <a:ahLst/>
-            <a:cxnLst>
-              <a:cxn ang="0">
-                <a:pos x="connsiteX0" y="connsiteY0"/>
-              </a:cxn>
-              <a:cxn ang="0">
-                <a:pos x="connsiteX1" y="connsiteY1"/>
-              </a:cxn>
-              <a:cxn ang="0">
-                <a:pos x="connsiteX2" y="connsiteY2"/>
-              </a:cxn>
-              <a:cxn ang="0">
-                <a:pos x="connsiteX3" y="connsiteY3"/>
-              </a:cxn>
-              <a:cxn ang="0">
-                <a:pos x="connsiteX4" y="connsiteY4"/>
-              </a:cxn>
-              <a:cxn ang="0">
-                <a:pos x="connsiteX5" y="connsiteY5"/>
-              </a:cxn>
-              <a:cxn ang="0">
-                <a:pos x="connsiteX6" y="connsiteY6"/>
-              </a:cxn>
-              <a:cxn ang="0">
-                <a:pos x="connsiteX7" y="connsiteY7"/>
-              </a:cxn>
-              <a:cxn ang="0">
-                <a:pos x="connsiteX8" y="connsiteY8"/>
-              </a:cxn>
-            </a:cxnLst>
-            <a:rect l="l" t="t" r="r" b="b"/>
-            <a:pathLst>
-              <a:path w="3900357" h="4178958">
-                <a:moveTo>
-                  <a:pt x="2432225" y="93939"/>
-                </a:moveTo>
-                <a:cubicBezTo>
-                  <a:pt x="3282786" y="358491"/>
-                  <a:pt x="3900357" y="1151865"/>
-                  <a:pt x="3900357" y="2089479"/>
-                </a:cubicBezTo>
-                <a:cubicBezTo>
-                  <a:pt x="3900357" y="3243466"/>
-                  <a:pt x="2964865" y="4178958"/>
-                  <a:pt x="1810878" y="4178958"/>
-                </a:cubicBezTo>
-                <a:cubicBezTo>
-                  <a:pt x="1089636" y="4178958"/>
-                  <a:pt x="453744" y="3813531"/>
-                  <a:pt x="78249" y="3257727"/>
-                </a:cubicBezTo>
-                <a:lnTo>
-                  <a:pt x="0" y="3128923"/>
-                </a:lnTo>
-                <a:lnTo>
-                  <a:pt x="831324" y="244281"/>
-                </a:lnTo>
-                <a:lnTo>
-                  <a:pt x="997559" y="164202"/>
-                </a:lnTo>
-                <a:cubicBezTo>
-                  <a:pt x="1247540" y="58468"/>
-                  <a:pt x="1522381" y="0"/>
-                  <a:pt x="1810878" y="0"/>
-                </a:cubicBezTo>
-                <a:cubicBezTo>
-                  <a:pt x="2027251" y="0"/>
-                  <a:pt x="2235942" y="32888"/>
-                  <a:pt x="2432225" y="93939"/>
-                </a:cubicBezTo>
-                <a:close/>
-              </a:path>
-            </a:pathLst>
-          </a:custGeom>
-          <a:gradFill>
-            <a:gsLst>
-              <a:gs pos="29000">
-                <a:srgbClr val="000000">
-                  <a:alpha val="0"/>
-                </a:srgbClr>
-              </a:gs>
-              <a:gs pos="100000">
-                <a:schemeClr val="accent1">
-                  <a:alpha val="43000"/>
-                </a:schemeClr>
-              </a:gs>
-            </a:gsLst>
-            <a:lin ang="1800000" scaled="0"/>
-          </a:gradFill>
-          <a:ln>
-            <a:noFill/>
-          </a:ln>
-        </p:spPr>
-        <p:style>
-          <a:lnRef idx="2">
-            <a:schemeClr val="accent1">
-              <a:shade val="50000"/>
-            </a:schemeClr>
-          </a:lnRef>
-          <a:fillRef idx="1">
-            <a:schemeClr val="accent1"/>
-          </a:fillRef>
-          <a:effectRef idx="0">
-            <a:schemeClr val="accent1"/>
-          </a:effectRef>
-          <a:fontRef idx="minor">
-            <a:schemeClr val="lt1"/>
-          </a:fontRef>
-        </p:style>
-        <p:txBody>
-          <a:bodyPr wrap="square" rtlCol="0" anchor="ctr">
-            <a:noAutofit/>
-          </a:bodyPr>
-          <a:lstStyle/>
-          <a:p>
-            <a:pPr algn="ctr"/>
-            <a:endParaRPr lang="en-US" dirty="0"/>
-          </a:p>
-        </p:txBody>
-      </p:sp>
-      <p:sp>
-        <p:nvSpPr>
-          <p:cNvPr id="65" name="Rectangle 64">
-            <a:extLst>
-              <a:ext uri="{FF2B5EF4-FFF2-40B4-BE49-F238E27FC236}">
-                <a16:creationId xmlns:a16="http://schemas.microsoft.com/office/drawing/2014/main" id="{8D71EDA1-87BF-4D5D-AB79-F346FD19278A}"/>
-              </a:ext>
-              <a:ext uri="{C183D7F6-B498-43B3-948B-1728B52AA6E4}">
-                <adec:decorative xmlns:adec="http://schemas.microsoft.com/office/drawing/2017/decorative" val="1"/>
-              </a:ext>
-            </a:extLst>
-          </p:cNvPr>
-          <p:cNvSpPr>
-            <a:spLocks noGrp="1" noRot="1" noChangeAspect="1" noMove="1" noResize="1" noEditPoints="1" noAdjustHandles="1" noChangeArrowheads="1" noChangeShapeType="1" noTextEdit="1"/>
-          </p:cNvSpPr>
-          <p:nvPr>
-            <p:extLst>
-              <p:ext uri="{386F3935-93C4-4BCD-93E2-E3B085C9AB24}">
-                <p16:designElem xmlns:p16="http://schemas.microsoft.com/office/powerpoint/2015/main" val="1"/>
-              </p:ext>
-            </p:extLst>
-          </p:nvPr>
-        </p:nvSpPr>
-        <p:spPr>
-          <a:xfrm rot="5400000" flipH="1">
-            <a:off x="-1410093" y="1399943"/>
-            <a:ext cx="6858003" cy="4037835"/>
-          </a:xfrm>
-          <a:prstGeom prst="rect">
-            <a:avLst/>
-          </a:prstGeom>
-          <a:gradFill>
-            <a:gsLst>
-              <a:gs pos="0">
-                <a:srgbClr val="000000">
-                  <a:alpha val="0"/>
-                </a:srgbClr>
-              </a:gs>
-              <a:gs pos="99000">
-                <a:schemeClr val="accent1">
-                  <a:lumMod val="60000"/>
-                  <a:lumOff val="40000"/>
-                  <a:alpha val="11000"/>
-                </a:schemeClr>
-              </a:gs>
-            </a:gsLst>
-            <a:lin ang="7200000" scaled="0"/>
-          </a:gradFill>
-          <a:ln>
-            <a:noFill/>
-          </a:ln>
-        </p:spPr>
-        <p:style>
-          <a:lnRef idx="2">
-            <a:schemeClr val="accent1">
-              <a:shade val="50000"/>
-            </a:schemeClr>
-          </a:lnRef>
-          <a:fillRef idx="1">
-            <a:schemeClr val="accent1"/>
-          </a:fillRef>
-          <a:effectRef idx="0">
-            <a:schemeClr val="accent1"/>
-          </a:effectRef>
-          <a:fontRef idx="minor">
-            <a:schemeClr val="lt1"/>
-          </a:fontRef>
-        </p:style>
-        <p:txBody>
-          <a:bodyPr rtlCol="0" anchor="ctr"/>
-          <a:lstStyle/>
-          <a:p>
-            <a:pPr algn="ctr"/>
             <a:endParaRPr lang="en-US"/>
-          </a:p>
-        </p:txBody>
-      </p:sp>
-      <p:sp>
-        <p:nvSpPr>
-          <p:cNvPr id="2" name="Title 1">
-            <a:extLst>
-              <a:ext uri="{FF2B5EF4-FFF2-40B4-BE49-F238E27FC236}">
-                <a16:creationId xmlns:a16="http://schemas.microsoft.com/office/drawing/2014/main" id="{20FE717D-B5C1-FD68-153F-DB63A654C721}"/>
-              </a:ext>
-            </a:extLst>
-          </p:cNvPr>
-          <p:cNvSpPr>
-            <a:spLocks noGrp="1"/>
-          </p:cNvSpPr>
-          <p:nvPr>
-            <p:ph type="title"/>
-          </p:nvPr>
-        </p:nvSpPr>
-        <p:spPr>
-          <a:xfrm>
-            <a:off x="466722" y="586855"/>
-            <a:ext cx="3201366" cy="3387497"/>
-          </a:xfrm>
-        </p:spPr>
-        <p:txBody>
-          <a:bodyPr vert="horz" lIns="91440" tIns="45720" rIns="91440" bIns="45720" rtlCol="0" anchor="b">
-            <a:normAutofit/>
-          </a:bodyPr>
-          <a:lstStyle/>
-          <a:p>
-            <a:pPr algn="r"/>
-            <a:r>
-              <a:rPr lang="en-US" sz="4000" kern="1200">
-                <a:solidFill>
-                  <a:srgbClr val="FFFFFF"/>
-                </a:solidFill>
-                <a:latin typeface="+mj-lt"/>
-                <a:ea typeface="+mj-ea"/>
-                <a:cs typeface="+mj-cs"/>
-              </a:rPr>
-              <a:t>Model Overviews</a:t>
-            </a:r>
           </a:p>
         </p:txBody>
       </p:sp>
@@ -5358,29 +7050,34 @@
         </p:nvSpPr>
         <p:spPr>
           <a:xfrm>
-            <a:off x="4810259" y="649480"/>
-            <a:ext cx="6555347" cy="5546047"/>
+            <a:off x="5439965" y="4212709"/>
+            <a:ext cx="5605390" cy="2001821"/>
           </a:xfrm>
           <a:prstGeom prst="rect">
             <a:avLst/>
           </a:prstGeom>
         </p:spPr>
         <p:txBody>
-          <a:bodyPr vert="horz" lIns="91440" tIns="45720" rIns="91440" bIns="45720" rtlCol="0" anchor="ctr">
+          <a:bodyPr vert="horz" lIns="91440" tIns="45720" rIns="91440" bIns="45720" rtlCol="0">
             <a:normAutofit/>
           </a:bodyPr>
           <a:lstStyle/>
           <a:p>
-            <a:pPr lvl="0" defTabSz="914400">
+            <a:pPr lvl="0" indent="-228600" defTabSz="914400">
               <a:lnSpc>
                 <a:spcPct val="90000"/>
               </a:lnSpc>
               <a:spcAft>
                 <a:spcPts val="600"/>
               </a:spcAft>
+              <a:buFont typeface="Arial" panose="020B0604020202020204" pitchFamily="34" charset="0"/>
+              <a:buChar char="•"/>
             </a:pPr>
             <a:r>
-              <a:rPr lang="en-US" sz="2000" dirty="0"/>
+              <a:rPr lang="en-US" sz="1500" dirty="0">
+                <a:latin typeface="Helvetica" panose="020B0604020202020204" pitchFamily="34" charset="0"/>
+                <a:cs typeface="Helvetica" panose="020B0604020202020204" pitchFamily="34" charset="0"/>
+              </a:rPr>
               <a:t>Three models were tested to predict Apple’s future ‘Close’ price, each progressively increasing in complexity: </a:t>
             </a:r>
           </a:p>
@@ -5396,7 +7093,10 @@
               <a:buChar char="•"/>
             </a:pPr>
             <a:r>
-              <a:rPr lang="en-US" sz="2000" dirty="0"/>
+              <a:rPr lang="en-US" sz="1500" dirty="0">
+                <a:latin typeface="Helvetica" panose="020B0604020202020204" pitchFamily="34" charset="0"/>
+                <a:cs typeface="Helvetica" panose="020B0604020202020204" pitchFamily="34" charset="0"/>
+              </a:rPr>
               <a:t>Model 1: A baseline model using only Apple’s historic ‘Close’ price for prediction.</a:t>
             </a:r>
           </a:p>
@@ -5412,7 +7112,10 @@
               <a:buChar char="•"/>
             </a:pPr>
             <a:r>
-              <a:rPr lang="en-US" sz="2000" dirty="0"/>
+              <a:rPr lang="en-US" sz="1500" dirty="0">
+                <a:latin typeface="Helvetica" panose="020B0604020202020204" pitchFamily="34" charset="0"/>
+                <a:cs typeface="Helvetica" panose="020B0604020202020204" pitchFamily="34" charset="0"/>
+              </a:rPr>
               <a:t>Model 2: A more complex model using additional Apple-specific variables.</a:t>
             </a:r>
           </a:p>
@@ -5428,7 +7131,10 @@
               <a:buChar char="•"/>
             </a:pPr>
             <a:r>
-              <a:rPr lang="en-US" sz="2000" dirty="0"/>
+              <a:rPr lang="en-US" sz="1500" dirty="0">
+                <a:latin typeface="Helvetica" panose="020B0604020202020204" pitchFamily="34" charset="0"/>
+                <a:cs typeface="Helvetica" panose="020B0604020202020204" pitchFamily="34" charset="0"/>
+              </a:rPr>
               <a:t>Model 3: An advanced model integrating Google Stock data to account for competition.</a:t>
             </a:r>
           </a:p>
@@ -5474,10 +7180,10 @@
       </p:grpSpPr>
       <p:sp useBgFill="1">
         <p:nvSpPr>
-          <p:cNvPr id="2133" name="Rectangle 2132">
+          <p:cNvPr id="11" name="Rectangle 10">
             <a:extLst>
               <a:ext uri="{FF2B5EF4-FFF2-40B4-BE49-F238E27FC236}">
-                <a16:creationId xmlns:a16="http://schemas.microsoft.com/office/drawing/2014/main" id="{50D1C5B3-B60D-4696-AE60-100D5EC8AB5D}"/>
+                <a16:creationId xmlns:a16="http://schemas.microsoft.com/office/drawing/2014/main" id="{EA12067D-EF15-4E9F-AA63-B337CED75BED}"/>
               </a:ext>
               <a:ext uri="{C183D7F6-B498-43B3-948B-1728B52AA6E4}">
                 <adec:decorative xmlns:adec="http://schemas.microsoft.com/office/drawing/2017/decorative" val="1"/>
@@ -5497,31 +7203,15 @@
         </p:nvSpPr>
         <p:spPr>
           <a:xfrm>
-            <a:off x="0" y="0"/>
-            <a:ext cx="12192000" cy="6858000"/>
+            <a:off x="-1" y="0"/>
+            <a:ext cx="12188952" cy="6858000"/>
           </a:xfrm>
           <a:prstGeom prst="rect">
             <a:avLst/>
           </a:prstGeom>
-          <a:ln w="12700" cap="flat" cmpd="sng" algn="ctr">
+          <a:ln>
             <a:noFill/>
-            <a:prstDash val="solid"/>
-            <a:miter lim="800000"/>
           </a:ln>
-          <a:effectLst/>
-          <a:extLst>
-            <a:ext uri="{91240B29-F687-4F45-9708-019B960494DF}">
-              <a14:hiddenLine xmlns:a14="http://schemas.microsoft.com/office/drawing/2010/main" w="12700" cap="flat" cmpd="sng" algn="ctr">
-                <a:solidFill>
-                  <a:schemeClr val="accent1">
-                    <a:shade val="50000"/>
-                  </a:schemeClr>
-                </a:solidFill>
-                <a:prstDash val="solid"/>
-                <a:miter lim="800000"/>
-              </a14:hiddenLine>
-            </a:ext>
-          </a:extLst>
         </p:spPr>
         <p:style>
           <a:lnRef idx="2">
@@ -5548,21 +7238,21 @@
           </a:p>
         </p:txBody>
       </p:sp>
-      <p:grpSp>
-        <p:nvGrpSpPr>
-          <p:cNvPr id="2135" name="Group 2134">
+      <p:sp>
+        <p:nvSpPr>
+          <p:cNvPr id="13" name="Rectangle 12">
             <a:extLst>
               <a:ext uri="{FF2B5EF4-FFF2-40B4-BE49-F238E27FC236}">
-                <a16:creationId xmlns:a16="http://schemas.microsoft.com/office/drawing/2014/main" id="{73EDDF53-0851-48D4-A466-6FE0DCE91E73}"/>
+                <a16:creationId xmlns:a16="http://schemas.microsoft.com/office/drawing/2014/main" id="{6C96BA99-464E-4E7D-BA40-1DC3C79699B7}"/>
               </a:ext>
               <a:ext uri="{C183D7F6-B498-43B3-948B-1728B52AA6E4}">
                 <adec:decorative xmlns:adec="http://schemas.microsoft.com/office/drawing/2017/decorative" val="1"/>
               </a:ext>
             </a:extLst>
           </p:cNvPr>
-          <p:cNvGrpSpPr>
-            <a:grpSpLocks noGrp="1" noUngrp="1" noRot="1" noChangeAspect="1" noMove="1" noResize="1"/>
-          </p:cNvGrpSpPr>
+          <p:cNvSpPr>
+            <a:spLocks noGrp="1" noRot="1" noChangeAspect="1" noMove="1" noResize="1" noEditPoints="1" noAdjustHandles="1" noChangeArrowheads="1" noChangeShapeType="1" noTextEdit="1"/>
+          </p:cNvSpPr>
           <p:nvPr>
             <p:extLst>
               <p:ext uri="{386F3935-93C4-4BCD-93E2-E3B085C9AB24}">
@@ -5570,236 +7260,95 @@
               </p:ext>
             </p:extLst>
           </p:nvPr>
-        </p:nvGrpSpPr>
-        <p:grpSpPr>
+        </p:nvSpPr>
+        <p:spPr>
           <a:xfrm>
-            <a:off x="0" y="0"/>
-            <a:ext cx="12192002" cy="1576446"/>
-            <a:chOff x="0" y="0"/>
-            <a:chExt cx="12192002" cy="1576446"/>
+            <a:off x="-2" y="-33425"/>
+            <a:ext cx="12192002" cy="3397598"/>
           </a:xfrm>
-        </p:grpSpPr>
-        <p:sp>
-          <p:nvSpPr>
-            <p:cNvPr id="2136" name="Rectangle 2135">
-              <a:extLst>
-                <a:ext uri="{FF2B5EF4-FFF2-40B4-BE49-F238E27FC236}">
-                  <a16:creationId xmlns:a16="http://schemas.microsoft.com/office/drawing/2014/main" id="{D074D04C-85E8-4A3E-90D7-86A10AE04827}"/>
-                </a:ext>
-                <a:ext uri="{C183D7F6-B498-43B3-948B-1728B52AA6E4}">
-                  <adec:decorative xmlns:adec="http://schemas.microsoft.com/office/drawing/2017/decorative" val="1"/>
-                </a:ext>
-              </a:extLst>
-            </p:cNvPr>
-            <p:cNvSpPr/>
-            <p:nvPr>
-              <p:extLst>
-                <p:ext uri="{386F3935-93C4-4BCD-93E2-E3B085C9AB24}">
-                  <p16:designElem xmlns:p16="http://schemas.microsoft.com/office/powerpoint/2015/main" val="1"/>
-                </p:ext>
-              </p:extLst>
-            </p:nvPr>
-          </p:nvSpPr>
-          <p:spPr>
-            <a:xfrm rot="10800000" flipH="1">
-              <a:off x="2" y="0"/>
-              <a:ext cx="12191998" cy="1575955"/>
-            </a:xfrm>
-            <a:prstGeom prst="rect">
-              <a:avLst/>
-            </a:prstGeom>
-            <a:gradFill>
-              <a:gsLst>
-                <a:gs pos="0">
-                  <a:srgbClr val="000000">
-                    <a:alpha val="96000"/>
-                  </a:srgbClr>
-                </a:gs>
-                <a:gs pos="100000">
-                  <a:schemeClr val="accent1">
-                    <a:lumMod val="75000"/>
-                  </a:schemeClr>
-                </a:gs>
-              </a:gsLst>
-              <a:lin ang="8400000" scaled="0"/>
-            </a:gradFill>
-            <a:ln>
-              <a:noFill/>
-            </a:ln>
-          </p:spPr>
-          <p:style>
-            <a:lnRef idx="2">
-              <a:schemeClr val="accent1">
-                <a:shade val="50000"/>
-              </a:schemeClr>
-            </a:lnRef>
-            <a:fillRef idx="1">
-              <a:schemeClr val="accent1"/>
-            </a:fillRef>
-            <a:effectRef idx="0">
-              <a:schemeClr val="accent1"/>
-            </a:effectRef>
-            <a:fontRef idx="minor">
-              <a:schemeClr val="lt1"/>
-            </a:fontRef>
-          </p:style>
-          <p:txBody>
-            <a:bodyPr rtlCol="0" anchor="ctr"/>
-            <a:lstStyle/>
-            <a:p>
-              <a:pPr algn="ctr"/>
-              <a:endParaRPr lang="en-US"/>
-            </a:p>
-          </p:txBody>
-        </p:sp>
-        <p:sp>
-          <p:nvSpPr>
-            <p:cNvPr id="2137" name="Rectangle 2136">
-              <a:extLst>
-                <a:ext uri="{FF2B5EF4-FFF2-40B4-BE49-F238E27FC236}">
-                  <a16:creationId xmlns:a16="http://schemas.microsoft.com/office/drawing/2014/main" id="{4097020A-86B6-43BD-A2AA-66AE72CA3110}"/>
-                </a:ext>
-                <a:ext uri="{C183D7F6-B498-43B3-948B-1728B52AA6E4}">
-                  <adec:decorative xmlns:adec="http://schemas.microsoft.com/office/drawing/2017/decorative" val="1"/>
-                </a:ext>
-              </a:extLst>
-            </p:cNvPr>
-            <p:cNvSpPr/>
-            <p:nvPr>
-              <p:extLst>
-                <p:ext uri="{386F3935-93C4-4BCD-93E2-E3B085C9AB24}">
-                  <p16:designElem xmlns:p16="http://schemas.microsoft.com/office/powerpoint/2015/main" val="1"/>
-                </p:ext>
-              </p:extLst>
-            </p:nvPr>
-          </p:nvSpPr>
-          <p:spPr>
-            <a:xfrm rot="16200000">
-              <a:off x="5307778" y="-5307778"/>
-              <a:ext cx="1576446" cy="12192002"/>
-            </a:xfrm>
-            <a:prstGeom prst="rect">
-              <a:avLst/>
-            </a:prstGeom>
-            <a:gradFill>
-              <a:gsLst>
-                <a:gs pos="45000">
-                  <a:schemeClr val="accent1">
-                    <a:alpha val="0"/>
-                  </a:schemeClr>
-                </a:gs>
-                <a:gs pos="99000">
-                  <a:srgbClr val="000000">
-                    <a:alpha val="74000"/>
-                  </a:srgbClr>
-                </a:gs>
-              </a:gsLst>
-              <a:lin ang="11400000" scaled="0"/>
-            </a:gradFill>
-            <a:ln>
-              <a:noFill/>
-            </a:ln>
-          </p:spPr>
-          <p:style>
-            <a:lnRef idx="2">
-              <a:schemeClr val="accent1">
-                <a:shade val="50000"/>
-              </a:schemeClr>
-            </a:lnRef>
-            <a:fillRef idx="1">
-              <a:schemeClr val="accent1"/>
-            </a:fillRef>
-            <a:effectRef idx="0">
-              <a:schemeClr val="accent1"/>
-            </a:effectRef>
-            <a:fontRef idx="minor">
-              <a:schemeClr val="lt1"/>
-            </a:fontRef>
-          </p:style>
-          <p:txBody>
-            <a:bodyPr rtlCol="0" anchor="ctr"/>
-            <a:lstStyle/>
-            <a:p>
-              <a:pPr algn="ctr"/>
-              <a:endParaRPr lang="en-US" dirty="0"/>
-            </a:p>
-          </p:txBody>
-        </p:sp>
-        <p:sp>
-          <p:nvSpPr>
-            <p:cNvPr id="2138" name="Rectangle 2137">
-              <a:extLst>
-                <a:ext uri="{FF2B5EF4-FFF2-40B4-BE49-F238E27FC236}">
-                  <a16:creationId xmlns:a16="http://schemas.microsoft.com/office/drawing/2014/main" id="{20C6C743-32FE-4E24-AA22-45D3B1C7C0A1}"/>
-                </a:ext>
-                <a:ext uri="{C183D7F6-B498-43B3-948B-1728B52AA6E4}">
-                  <adec:decorative xmlns:adec="http://schemas.microsoft.com/office/drawing/2017/decorative" val="1"/>
-                </a:ext>
-              </a:extLst>
-            </p:cNvPr>
-            <p:cNvSpPr/>
-            <p:nvPr>
-              <p:extLst>
-                <p:ext uri="{386F3935-93C4-4BCD-93E2-E3B085C9AB24}">
-                  <p16:designElem xmlns:p16="http://schemas.microsoft.com/office/powerpoint/2015/main" val="1"/>
-                </p:ext>
-              </p:extLst>
-            </p:nvPr>
-          </p:nvSpPr>
-          <p:spPr>
-            <a:xfrm>
-              <a:off x="3825434" y="0"/>
-              <a:ext cx="4303422" cy="1575461"/>
-            </a:xfrm>
-            <a:prstGeom prst="rect">
-              <a:avLst/>
-            </a:prstGeom>
-            <a:gradFill>
-              <a:gsLst>
-                <a:gs pos="0">
-                  <a:schemeClr val="accent1">
-                    <a:alpha val="17000"/>
-                  </a:schemeClr>
-                </a:gs>
-                <a:gs pos="74000">
-                  <a:schemeClr val="accent1">
-                    <a:lumMod val="50000"/>
-                    <a:alpha val="0"/>
-                  </a:schemeClr>
-                </a:gs>
-              </a:gsLst>
-              <a:lin ang="14400000" scaled="0"/>
-            </a:gradFill>
-            <a:ln>
-              <a:noFill/>
-            </a:ln>
-          </p:spPr>
-          <p:style>
-            <a:lnRef idx="2">
-              <a:schemeClr val="accent1">
-                <a:shade val="50000"/>
-              </a:schemeClr>
-            </a:lnRef>
-            <a:fillRef idx="1">
-              <a:schemeClr val="accent1"/>
-            </a:fillRef>
-            <a:effectRef idx="0">
-              <a:schemeClr val="accent1"/>
-            </a:effectRef>
-            <a:fontRef idx="minor">
-              <a:schemeClr val="lt1"/>
-            </a:fontRef>
-          </p:style>
-          <p:txBody>
-            <a:bodyPr rtlCol="0" anchor="ctr"/>
-            <a:lstStyle/>
-            <a:p>
-              <a:pPr algn="ctr"/>
-              <a:endParaRPr lang="en-US"/>
-            </a:p>
-          </p:txBody>
-        </p:sp>
-      </p:grpSp>
+          <a:prstGeom prst="rect">
+            <a:avLst/>
+          </a:prstGeom>
+          <a:solidFill>
+            <a:schemeClr val="bg2"/>
+          </a:solidFill>
+          <a:ln>
+            <a:noFill/>
+          </a:ln>
+        </p:spPr>
+        <p:style>
+          <a:lnRef idx="2">
+            <a:schemeClr val="accent1">
+              <a:shade val="50000"/>
+            </a:schemeClr>
+          </a:lnRef>
+          <a:fillRef idx="1">
+            <a:schemeClr val="accent1"/>
+          </a:fillRef>
+          <a:effectRef idx="0">
+            <a:schemeClr val="accent1"/>
+          </a:effectRef>
+          <a:fontRef idx="minor">
+            <a:schemeClr val="lt1"/>
+          </a:fontRef>
+        </p:style>
+        <p:txBody>
+          <a:bodyPr rtlCol="0" anchor="ctr"/>
+          <a:lstStyle/>
+          <a:p>
+            <a:pPr algn="ctr"/>
+            <a:endParaRPr lang="en-US"/>
+          </a:p>
+        </p:txBody>
+      </p:sp>
+      <p:pic>
+        <p:nvPicPr>
+          <p:cNvPr id="15" name="Graphic 14">
+            <a:extLst>
+              <a:ext uri="{FF2B5EF4-FFF2-40B4-BE49-F238E27FC236}">
+                <a16:creationId xmlns:a16="http://schemas.microsoft.com/office/drawing/2014/main" id="{46E69711-E747-42F0-9063-950BA7BAEB1B}"/>
+              </a:ext>
+              <a:ext uri="{C183D7F6-B498-43B3-948B-1728B52AA6E4}">
+                <adec:decorative xmlns:adec="http://schemas.microsoft.com/office/drawing/2017/decorative" val="1"/>
+              </a:ext>
+            </a:extLst>
+          </p:cNvPr>
+          <p:cNvPicPr>
+            <a:picLocks noGrp="1" noRot="1" noChangeAspect="1" noMove="1" noResize="1" noEditPoints="1" noAdjustHandles="1" noChangeArrowheads="1" noChangeShapeType="1" noCrop="1"/>
+          </p:cNvPicPr>
+          <p:nvPr>
+            <p:extLst>
+              <p:ext uri="{386F3935-93C4-4BCD-93E2-E3B085C9AB24}">
+                <p16:designElem xmlns:p16="http://schemas.microsoft.com/office/powerpoint/2015/main" val="1"/>
+              </p:ext>
+            </p:extLst>
+          </p:nvPr>
+        </p:nvPicPr>
+        <p:blipFill>
+          <a:blip r:embed="rId2">
+            <a:extLst>
+              <a:ext uri="{28A0092B-C50C-407E-A947-70E740481C1C}">
+                <a14:useLocalDpi xmlns:a14="http://schemas.microsoft.com/office/drawing/2010/main" val="0"/>
+              </a:ext>
+              <a:ext uri="{96DAC541-7B7A-43D3-8B79-37D633B846F1}">
+                <asvg:svgBlip xmlns:asvg="http://schemas.microsoft.com/office/drawing/2016/SVG/main" r:embed="rId3"/>
+              </a:ext>
+            </a:extLst>
+          </a:blip>
+          <a:stretch>
+            <a:fillRect/>
+          </a:stretch>
+        </p:blipFill>
+        <p:spPr>
+          <a:xfrm rot="5400000">
+            <a:off x="3360280" y="-1973720"/>
+            <a:ext cx="5486400" cy="12177040"/>
+          </a:xfrm>
+          <a:prstGeom prst="rect">
+            <a:avLst/>
+          </a:prstGeom>
+        </p:spPr>
+      </p:pic>
       <p:sp>
         <p:nvSpPr>
           <p:cNvPr id="2" name="Title 1">
@@ -5816,8 +7365,8 @@
         </p:nvSpPr>
         <p:spPr>
           <a:xfrm>
-            <a:off x="1371600" y="407695"/>
-            <a:ext cx="9724030" cy="834251"/>
+            <a:off x="384048" y="3789400"/>
+            <a:ext cx="5807575" cy="2264392"/>
           </a:xfrm>
           <a:prstGeom prst="rect">
             <a:avLst/>
@@ -5847,17 +7396,13 @@
             </a:lvl1pPr>
           </a:lstStyle>
           <a:p>
-            <a:pPr algn="ctr">
+            <a:pPr>
               <a:spcAft>
                 <a:spcPts val="600"/>
               </a:spcAft>
             </a:pPr>
             <a:r>
-              <a:rPr lang="en-US" sz="4000" dirty="0">
-                <a:solidFill>
-                  <a:srgbClr val="FFFFFF"/>
-                </a:solidFill>
-              </a:rPr>
+              <a:rPr lang="en-US" sz="5000" dirty="0"/>
               <a:t>Learning Curves</a:t>
             </a:r>
           </a:p>
@@ -5865,10 +7410,10 @@
       </p:sp>
       <p:pic>
         <p:nvPicPr>
-          <p:cNvPr id="6" name="Picture 6" descr="A graph of a graph&#10;&#10;Description automatically generated">
+          <p:cNvPr id="4" name="Picture 2" descr="A graph of a graph&#10;&#10;Description automatically generated">
             <a:extLst>
               <a:ext uri="{FF2B5EF4-FFF2-40B4-BE49-F238E27FC236}">
-                <a16:creationId xmlns:a16="http://schemas.microsoft.com/office/drawing/2014/main" id="{09BCA32F-66A9-F45F-2F4F-3C737333B7CE}"/>
+                <a16:creationId xmlns:a16="http://schemas.microsoft.com/office/drawing/2014/main" id="{87F9AC67-056C-94BA-6A79-3E3C355F088C}"/>
               </a:ext>
             </a:extLst>
           </p:cNvPr>
@@ -5878,7 +7423,7 @@
           <p:nvPr/>
         </p:nvPicPr>
         <p:blipFill>
-          <a:blip r:embed="rId2">
+          <a:blip r:embed="rId4">
             <a:extLst>
               <a:ext uri="{28A0092B-C50C-407E-A947-70E740481C1C}">
                 <a14:useLocalDpi xmlns:a14="http://schemas.microsoft.com/office/drawing/2010/main" val="0"/>
@@ -5891,8 +7436,8 @@
         </p:blipFill>
         <p:spPr bwMode="auto">
           <a:xfrm>
-            <a:off x="1499549" y="2200459"/>
-            <a:ext cx="2779153" cy="2133001"/>
+            <a:off x="902752" y="573127"/>
+            <a:ext cx="3420310" cy="2625088"/>
           </a:xfrm>
           <a:prstGeom prst="rect">
             <a:avLst/>
@@ -5924,7 +7469,7 @@
           <p:nvPr/>
         </p:nvPicPr>
         <p:blipFill>
-          <a:blip r:embed="rId3">
+          <a:blip r:embed="rId5">
             <a:extLst>
               <a:ext uri="{28A0092B-C50C-407E-A947-70E740481C1C}">
                 <a14:useLocalDpi xmlns:a14="http://schemas.microsoft.com/office/drawing/2010/main" val="0"/>
@@ -5937,8 +7482,8 @@
         </p:blipFill>
         <p:spPr bwMode="auto">
           <a:xfrm>
-            <a:off x="4713221" y="2200459"/>
-            <a:ext cx="2779153" cy="2133001"/>
+            <a:off x="4397452" y="573996"/>
+            <a:ext cx="3418046" cy="2623350"/>
           </a:xfrm>
           <a:prstGeom prst="rect">
             <a:avLst/>
@@ -5957,10 +7502,10 @@
       </p:pic>
       <p:pic>
         <p:nvPicPr>
-          <p:cNvPr id="4" name="Picture 2" descr="A graph of a graph&#10;&#10;Description automatically generated">
+          <p:cNvPr id="6" name="Picture 6" descr="A graph of a graph&#10;&#10;Description automatically generated">
             <a:extLst>
               <a:ext uri="{FF2B5EF4-FFF2-40B4-BE49-F238E27FC236}">
-                <a16:creationId xmlns:a16="http://schemas.microsoft.com/office/drawing/2014/main" id="{87F9AC67-056C-94BA-6A79-3E3C355F088C}"/>
+                <a16:creationId xmlns:a16="http://schemas.microsoft.com/office/drawing/2014/main" id="{09BCA32F-66A9-F45F-2F4F-3C737333B7CE}"/>
               </a:ext>
             </a:extLst>
           </p:cNvPr>
@@ -5970,7 +7515,7 @@
           <p:nvPr/>
         </p:nvPicPr>
         <p:blipFill>
-          <a:blip r:embed="rId4">
+          <a:blip r:embed="rId6">
             <a:extLst>
               <a:ext uri="{28A0092B-C50C-407E-A947-70E740481C1C}">
                 <a14:useLocalDpi xmlns:a14="http://schemas.microsoft.com/office/drawing/2010/main" val="0"/>
@@ -5983,8 +7528,8 @@
         </p:blipFill>
         <p:spPr bwMode="auto">
           <a:xfrm>
-            <a:off x="7913295" y="2200459"/>
-            <a:ext cx="2779153" cy="2133001"/>
+            <a:off x="7880910" y="573996"/>
+            <a:ext cx="3418046" cy="2623350"/>
           </a:xfrm>
           <a:prstGeom prst="rect">
             <a:avLst/>
@@ -6015,15 +7560,15 @@
         </p:nvSpPr>
         <p:spPr>
           <a:xfrm>
-            <a:off x="1371601" y="4786744"/>
-            <a:ext cx="9448800" cy="1442631"/>
+            <a:off x="6496424" y="3789399"/>
+            <a:ext cx="4675159" cy="2382802"/>
           </a:xfrm>
           <a:prstGeom prst="rect">
             <a:avLst/>
           </a:prstGeom>
         </p:spPr>
         <p:txBody>
-          <a:bodyPr vert="horz" lIns="91440" tIns="45720" rIns="91440" bIns="45720" rtlCol="0">
+          <a:bodyPr vert="horz" lIns="91440" tIns="45720" rIns="91440" bIns="45720" rtlCol="0" anchor="ctr">
             <a:normAutofit/>
           </a:bodyPr>
           <a:lstStyle/>
@@ -6039,9 +7584,75 @@
               <a:buChar char="•"/>
             </a:pPr>
             <a:r>
-              <a:rPr lang="en-US" sz="2000"/>
+              <a:rPr lang="en-US" dirty="0">
+                <a:latin typeface="Helvetica" panose="020B0604020202020204" pitchFamily="34" charset="0"/>
+                <a:cs typeface="Helvetica" panose="020B0604020202020204" pitchFamily="34" charset="0"/>
+              </a:rPr>
               <a:t>Model 3 required more training due to added complexity, but achieved the best overall performance, demonstrating the value of integrating competitor data.</a:t>
             </a:r>
+          </a:p>
+        </p:txBody>
+      </p:sp>
+      <p:sp>
+        <p:nvSpPr>
+          <p:cNvPr id="51" name="Rectangle 50">
+            <a:extLst>
+              <a:ext uri="{FF2B5EF4-FFF2-40B4-BE49-F238E27FC236}">
+                <a16:creationId xmlns:a16="http://schemas.microsoft.com/office/drawing/2014/main" id="{1579AADB-A05D-428E-A1F8-99F0910EE33D}"/>
+              </a:ext>
+              <a:ext uri="{C183D7F6-B498-43B3-948B-1728B52AA6E4}">
+                <adec:decorative xmlns:adec="http://schemas.microsoft.com/office/drawing/2017/decorative" val="1"/>
+              </a:ext>
+            </a:extLst>
+          </p:cNvPr>
+          <p:cNvSpPr>
+            <a:spLocks noGrp="1" noRot="1" noChangeAspect="1" noMove="1" noResize="1" noEditPoints="1" noAdjustHandles="1" noChangeArrowheads="1" noChangeShapeType="1" noTextEdit="1"/>
+          </p:cNvSpPr>
+          <p:nvPr>
+            <p:extLst>
+              <p:ext uri="{386F3935-93C4-4BCD-93E2-E3B085C9AB24}">
+                <p16:designElem xmlns:p16="http://schemas.microsoft.com/office/powerpoint/2015/main" val="1"/>
+              </p:ext>
+            </p:extLst>
+          </p:nvPr>
+        </p:nvSpPr>
+        <p:spPr>
+          <a:xfrm>
+            <a:off x="12073128" y="6172201"/>
+            <a:ext cx="118872" cy="685800"/>
+          </a:xfrm>
+          <a:prstGeom prst="rect">
+            <a:avLst/>
+          </a:prstGeom>
+          <a:solidFill>
+            <a:schemeClr val="accent2"/>
+          </a:solidFill>
+          <a:ln>
+            <a:noFill/>
+          </a:ln>
+        </p:spPr>
+        <p:style>
+          <a:lnRef idx="2">
+            <a:schemeClr val="accent1">
+              <a:shade val="50000"/>
+            </a:schemeClr>
+          </a:lnRef>
+          <a:fillRef idx="1">
+            <a:schemeClr val="accent1"/>
+          </a:fillRef>
+          <a:effectRef idx="0">
+            <a:schemeClr val="accent1"/>
+          </a:effectRef>
+          <a:fontRef idx="minor">
+            <a:schemeClr val="lt1"/>
+          </a:fontRef>
+        </p:style>
+        <p:txBody>
+          <a:bodyPr rtlCol="0" anchor="ctr"/>
+          <a:lstStyle/>
+          <a:p>
+            <a:pPr algn="ctr"/>
+            <a:endParaRPr lang="en-US"/>
           </a:p>
         </p:txBody>
       </p:sp>
@@ -6083,12 +7694,12 @@
           <a:chExt cx="0" cy="0"/>
         </a:xfrm>
       </p:grpSpPr>
-      <p:sp useBgFill="1">
+      <p:sp>
         <p:nvSpPr>
           <p:cNvPr id="3083" name="Rectangle 3082">
             <a:extLst>
               <a:ext uri="{FF2B5EF4-FFF2-40B4-BE49-F238E27FC236}">
-                <a16:creationId xmlns:a16="http://schemas.microsoft.com/office/drawing/2014/main" id="{50D1C5B3-B60D-4696-AE60-100D5EC8AB5D}"/>
+                <a16:creationId xmlns:a16="http://schemas.microsoft.com/office/drawing/2014/main" id="{C3896A03-3945-419A-B66B-4EE266EDD152}"/>
               </a:ext>
               <a:ext uri="{C183D7F6-B498-43B3-948B-1728B52AA6E4}">
                 <adec:decorative xmlns:adec="http://schemas.microsoft.com/office/drawing/2017/decorative" val="1"/>
@@ -6108,31 +7719,21 @@
         </p:nvSpPr>
         <p:spPr>
           <a:xfrm>
-            <a:off x="0" y="0"/>
-            <a:ext cx="12192000" cy="6858000"/>
+            <a:off x="10" y="0"/>
+            <a:ext cx="6095990" cy="6858001"/>
           </a:xfrm>
           <a:prstGeom prst="rect">
             <a:avLst/>
           </a:prstGeom>
-          <a:ln w="12700" cap="flat" cmpd="sng" algn="ctr">
+          <a:solidFill>
+            <a:schemeClr val="tx1">
+              <a:lumMod val="85000"/>
+              <a:lumOff val="15000"/>
+            </a:schemeClr>
+          </a:solidFill>
+          <a:ln>
             <a:noFill/>
-            <a:prstDash val="solid"/>
-            <a:miter lim="800000"/>
           </a:ln>
-          <a:effectLst/>
-          <a:extLst>
-            <a:ext uri="{91240B29-F687-4F45-9708-019B960494DF}">
-              <a14:hiddenLine xmlns:a14="http://schemas.microsoft.com/office/drawing/2010/main" w="12700" cap="flat" cmpd="sng" algn="ctr">
-                <a:solidFill>
-                  <a:schemeClr val="accent1">
-                    <a:shade val="50000"/>
-                  </a:schemeClr>
-                </a:solidFill>
-                <a:prstDash val="solid"/>
-                <a:miter lim="800000"/>
-              </a14:hiddenLine>
-            </a:ext>
-          </a:extLst>
         </p:spPr>
         <p:style>
           <a:lnRef idx="2">
@@ -6159,258 +7760,6 @@
           </a:p>
         </p:txBody>
       </p:sp>
-      <p:grpSp>
-        <p:nvGrpSpPr>
-          <p:cNvPr id="3085" name="Group 3084">
-            <a:extLst>
-              <a:ext uri="{FF2B5EF4-FFF2-40B4-BE49-F238E27FC236}">
-                <a16:creationId xmlns:a16="http://schemas.microsoft.com/office/drawing/2014/main" id="{73EDDF53-0851-48D4-A466-6FE0DCE91E73}"/>
-              </a:ext>
-              <a:ext uri="{C183D7F6-B498-43B3-948B-1728B52AA6E4}">
-                <adec:decorative xmlns:adec="http://schemas.microsoft.com/office/drawing/2017/decorative" val="1"/>
-              </a:ext>
-            </a:extLst>
-          </p:cNvPr>
-          <p:cNvGrpSpPr>
-            <a:grpSpLocks noGrp="1" noUngrp="1" noRot="1" noChangeAspect="1" noMove="1" noResize="1"/>
-          </p:cNvGrpSpPr>
-          <p:nvPr>
-            <p:extLst>
-              <p:ext uri="{386F3935-93C4-4BCD-93E2-E3B085C9AB24}">
-                <p16:designElem xmlns:p16="http://schemas.microsoft.com/office/powerpoint/2015/main" val="1"/>
-              </p:ext>
-            </p:extLst>
-          </p:nvPr>
-        </p:nvGrpSpPr>
-        <p:grpSpPr>
-          <a:xfrm>
-            <a:off x="0" y="0"/>
-            <a:ext cx="12192002" cy="1576446"/>
-            <a:chOff x="0" y="0"/>
-            <a:chExt cx="12192002" cy="1576446"/>
-          </a:xfrm>
-        </p:grpSpPr>
-        <p:sp>
-          <p:nvSpPr>
-            <p:cNvPr id="3086" name="Rectangle 3085">
-              <a:extLst>
-                <a:ext uri="{FF2B5EF4-FFF2-40B4-BE49-F238E27FC236}">
-                  <a16:creationId xmlns:a16="http://schemas.microsoft.com/office/drawing/2014/main" id="{D074D04C-85E8-4A3E-90D7-86A10AE04827}"/>
-                </a:ext>
-                <a:ext uri="{C183D7F6-B498-43B3-948B-1728B52AA6E4}">
-                  <adec:decorative xmlns:adec="http://schemas.microsoft.com/office/drawing/2017/decorative" val="1"/>
-                </a:ext>
-              </a:extLst>
-            </p:cNvPr>
-            <p:cNvSpPr/>
-            <p:nvPr>
-              <p:extLst>
-                <p:ext uri="{386F3935-93C4-4BCD-93E2-E3B085C9AB24}">
-                  <p16:designElem xmlns:p16="http://schemas.microsoft.com/office/powerpoint/2015/main" val="1"/>
-                </p:ext>
-              </p:extLst>
-            </p:nvPr>
-          </p:nvSpPr>
-          <p:spPr>
-            <a:xfrm rot="10800000" flipH="1">
-              <a:off x="2" y="0"/>
-              <a:ext cx="12191998" cy="1575955"/>
-            </a:xfrm>
-            <a:prstGeom prst="rect">
-              <a:avLst/>
-            </a:prstGeom>
-            <a:gradFill>
-              <a:gsLst>
-                <a:gs pos="0">
-                  <a:srgbClr val="000000">
-                    <a:alpha val="96000"/>
-                  </a:srgbClr>
-                </a:gs>
-                <a:gs pos="100000">
-                  <a:schemeClr val="accent1">
-                    <a:lumMod val="75000"/>
-                  </a:schemeClr>
-                </a:gs>
-              </a:gsLst>
-              <a:lin ang="8400000" scaled="0"/>
-            </a:gradFill>
-            <a:ln>
-              <a:noFill/>
-            </a:ln>
-          </p:spPr>
-          <p:style>
-            <a:lnRef idx="2">
-              <a:schemeClr val="accent1">
-                <a:shade val="50000"/>
-              </a:schemeClr>
-            </a:lnRef>
-            <a:fillRef idx="1">
-              <a:schemeClr val="accent1"/>
-            </a:fillRef>
-            <a:effectRef idx="0">
-              <a:schemeClr val="accent1"/>
-            </a:effectRef>
-            <a:fontRef idx="minor">
-              <a:schemeClr val="lt1"/>
-            </a:fontRef>
-          </p:style>
-          <p:txBody>
-            <a:bodyPr rtlCol="0" anchor="ctr"/>
-            <a:lstStyle/>
-            <a:p>
-              <a:pPr algn="ctr"/>
-              <a:endParaRPr lang="en-US"/>
-            </a:p>
-          </p:txBody>
-        </p:sp>
-        <p:sp>
-          <p:nvSpPr>
-            <p:cNvPr id="3087" name="Rectangle 3086">
-              <a:extLst>
-                <a:ext uri="{FF2B5EF4-FFF2-40B4-BE49-F238E27FC236}">
-                  <a16:creationId xmlns:a16="http://schemas.microsoft.com/office/drawing/2014/main" id="{4097020A-86B6-43BD-A2AA-66AE72CA3110}"/>
-                </a:ext>
-                <a:ext uri="{C183D7F6-B498-43B3-948B-1728B52AA6E4}">
-                  <adec:decorative xmlns:adec="http://schemas.microsoft.com/office/drawing/2017/decorative" val="1"/>
-                </a:ext>
-              </a:extLst>
-            </p:cNvPr>
-            <p:cNvSpPr/>
-            <p:nvPr>
-              <p:extLst>
-                <p:ext uri="{386F3935-93C4-4BCD-93E2-E3B085C9AB24}">
-                  <p16:designElem xmlns:p16="http://schemas.microsoft.com/office/powerpoint/2015/main" val="1"/>
-                </p:ext>
-              </p:extLst>
-            </p:nvPr>
-          </p:nvSpPr>
-          <p:spPr>
-            <a:xfrm rot="16200000">
-              <a:off x="5307778" y="-5307778"/>
-              <a:ext cx="1576446" cy="12192002"/>
-            </a:xfrm>
-            <a:prstGeom prst="rect">
-              <a:avLst/>
-            </a:prstGeom>
-            <a:gradFill>
-              <a:gsLst>
-                <a:gs pos="45000">
-                  <a:schemeClr val="accent1">
-                    <a:alpha val="0"/>
-                  </a:schemeClr>
-                </a:gs>
-                <a:gs pos="99000">
-                  <a:srgbClr val="000000">
-                    <a:alpha val="74000"/>
-                  </a:srgbClr>
-                </a:gs>
-              </a:gsLst>
-              <a:lin ang="11400000" scaled="0"/>
-            </a:gradFill>
-            <a:ln>
-              <a:noFill/>
-            </a:ln>
-          </p:spPr>
-          <p:style>
-            <a:lnRef idx="2">
-              <a:schemeClr val="accent1">
-                <a:shade val="50000"/>
-              </a:schemeClr>
-            </a:lnRef>
-            <a:fillRef idx="1">
-              <a:schemeClr val="accent1"/>
-            </a:fillRef>
-            <a:effectRef idx="0">
-              <a:schemeClr val="accent1"/>
-            </a:effectRef>
-            <a:fontRef idx="minor">
-              <a:schemeClr val="lt1"/>
-            </a:fontRef>
-          </p:style>
-          <p:txBody>
-            <a:bodyPr rtlCol="0" anchor="ctr"/>
-            <a:lstStyle/>
-            <a:p>
-              <a:pPr algn="ctr"/>
-              <a:endParaRPr lang="en-US" dirty="0"/>
-            </a:p>
-          </p:txBody>
-        </p:sp>
-        <p:sp>
-          <p:nvSpPr>
-            <p:cNvPr id="3088" name="Rectangle 3087">
-              <a:extLst>
-                <a:ext uri="{FF2B5EF4-FFF2-40B4-BE49-F238E27FC236}">
-                  <a16:creationId xmlns:a16="http://schemas.microsoft.com/office/drawing/2014/main" id="{20C6C743-32FE-4E24-AA22-45D3B1C7C0A1}"/>
-                </a:ext>
-                <a:ext uri="{C183D7F6-B498-43B3-948B-1728B52AA6E4}">
-                  <adec:decorative xmlns:adec="http://schemas.microsoft.com/office/drawing/2017/decorative" val="1"/>
-                </a:ext>
-              </a:extLst>
-            </p:cNvPr>
-            <p:cNvSpPr/>
-            <p:nvPr>
-              <p:extLst>
-                <p:ext uri="{386F3935-93C4-4BCD-93E2-E3B085C9AB24}">
-                  <p16:designElem xmlns:p16="http://schemas.microsoft.com/office/powerpoint/2015/main" val="1"/>
-                </p:ext>
-              </p:extLst>
-            </p:nvPr>
-          </p:nvSpPr>
-          <p:spPr>
-            <a:xfrm>
-              <a:off x="3825434" y="0"/>
-              <a:ext cx="4303422" cy="1575461"/>
-            </a:xfrm>
-            <a:prstGeom prst="rect">
-              <a:avLst/>
-            </a:prstGeom>
-            <a:gradFill>
-              <a:gsLst>
-                <a:gs pos="0">
-                  <a:schemeClr val="accent1">
-                    <a:alpha val="17000"/>
-                  </a:schemeClr>
-                </a:gs>
-                <a:gs pos="74000">
-                  <a:schemeClr val="accent1">
-                    <a:lumMod val="50000"/>
-                    <a:alpha val="0"/>
-                  </a:schemeClr>
-                </a:gs>
-              </a:gsLst>
-              <a:lin ang="14400000" scaled="0"/>
-            </a:gradFill>
-            <a:ln>
-              <a:noFill/>
-            </a:ln>
-          </p:spPr>
-          <p:style>
-            <a:lnRef idx="2">
-              <a:schemeClr val="accent1">
-                <a:shade val="50000"/>
-              </a:schemeClr>
-            </a:lnRef>
-            <a:fillRef idx="1">
-              <a:schemeClr val="accent1"/>
-            </a:fillRef>
-            <a:effectRef idx="0">
-              <a:schemeClr val="accent1"/>
-            </a:effectRef>
-            <a:fontRef idx="minor">
-              <a:schemeClr val="lt1"/>
-            </a:fontRef>
-          </p:style>
-          <p:txBody>
-            <a:bodyPr rtlCol="0" anchor="ctr"/>
-            <a:lstStyle/>
-            <a:p>
-              <a:pPr algn="ctr"/>
-              <a:endParaRPr lang="en-US"/>
-            </a:p>
-          </p:txBody>
-        </p:sp>
-      </p:grpSp>
       <p:sp>
         <p:nvSpPr>
           <p:cNvPr id="4" name="Title 1">
@@ -6427,16 +7776,16 @@
         </p:nvSpPr>
         <p:spPr>
           <a:xfrm>
-            <a:off x="1371600" y="407695"/>
-            <a:ext cx="9724030" cy="834251"/>
+            <a:off x="1155557" y="4551036"/>
+            <a:ext cx="4284420" cy="1687143"/>
           </a:xfrm>
           <a:prstGeom prst="rect">
             <a:avLst/>
           </a:prstGeom>
         </p:spPr>
         <p:txBody>
-          <a:bodyPr vert="horz" lIns="91440" tIns="45720" rIns="91440" bIns="45720" rtlCol="0" anchor="ctr">
-            <a:normAutofit/>
+          <a:bodyPr vert="horz" lIns="91440" tIns="45720" rIns="91440" bIns="45720" rtlCol="0" anchor="t">
+            <a:noAutofit/>
           </a:bodyPr>
           <a:lstStyle>
             <a:lvl1pPr algn="l" defTabSz="914400" rtl="0" eaLnBrk="1" latinLnBrk="0" hangingPunct="1">
@@ -6458,16 +7807,18 @@
             </a:lvl1pPr>
           </a:lstStyle>
           <a:p>
-            <a:pPr algn="ctr">
+            <a:pPr algn="r">
               <a:spcAft>
                 <a:spcPts val="600"/>
               </a:spcAft>
             </a:pPr>
             <a:r>
-              <a:rPr lang="en-US" sz="4000" dirty="0">
+              <a:rPr lang="en-US" sz="5000" dirty="0">
                 <a:solidFill>
-                  <a:srgbClr val="FFFFFF"/>
+                  <a:schemeClr val="bg1"/>
                 </a:solidFill>
+                <a:latin typeface="Helvetica" panose="020B0604020202020204" pitchFamily="34" charset="0"/>
+                <a:cs typeface="Helvetica" panose="020B0604020202020204" pitchFamily="34" charset="0"/>
               </a:rPr>
               <a:t>Line Graphs of Predicted vs Actual</a:t>
             </a:r>
@@ -6476,10 +7827,10 @@
       </p:sp>
       <p:pic>
         <p:nvPicPr>
-          <p:cNvPr id="3076" name="Picture 4" descr="A graph showing the value of a stock market&#10;&#10;Description automatically generated">
+          <p:cNvPr id="3078" name="Picture 6" descr="A graph with numbers and a line&#10;&#10;Description automatically generated">
             <a:extLst>
               <a:ext uri="{FF2B5EF4-FFF2-40B4-BE49-F238E27FC236}">
-                <a16:creationId xmlns:a16="http://schemas.microsoft.com/office/drawing/2014/main" id="{BAAFA876-61E2-D167-E350-1592F09848C1}"/>
+                <a16:creationId xmlns:a16="http://schemas.microsoft.com/office/drawing/2014/main" id="{6D5DCD01-8C48-3A94-F2D5-D79D37461C00}"/>
               </a:ext>
             </a:extLst>
           </p:cNvPr>
@@ -6502,8 +7853,8 @@
         </p:blipFill>
         <p:spPr bwMode="auto">
           <a:xfrm>
-            <a:off x="1216889" y="2200459"/>
-            <a:ext cx="3061813" cy="2104996"/>
+            <a:off x="1155557" y="1240926"/>
+            <a:ext cx="4297680" cy="2976143"/>
           </a:xfrm>
           <a:prstGeom prst="rect">
             <a:avLst/>
@@ -6520,12 +7871,77 @@
           </a:extLst>
         </p:spPr>
       </p:pic>
+      <p:sp>
+        <p:nvSpPr>
+          <p:cNvPr id="3085" name="Rectangle 3084">
+            <a:extLst>
+              <a:ext uri="{FF2B5EF4-FFF2-40B4-BE49-F238E27FC236}">
+                <a16:creationId xmlns:a16="http://schemas.microsoft.com/office/drawing/2014/main" id="{B34F5AD2-EDBD-4BBD-A55C-EAFFD0C7097A}"/>
+              </a:ext>
+              <a:ext uri="{C183D7F6-B498-43B3-948B-1728B52AA6E4}">
+                <adec:decorative xmlns:adec="http://schemas.microsoft.com/office/drawing/2017/decorative" val="1"/>
+              </a:ext>
+            </a:extLst>
+          </p:cNvPr>
+          <p:cNvSpPr>
+            <a:spLocks noGrp="1" noRot="1" noChangeAspect="1" noMove="1" noResize="1" noEditPoints="1" noAdjustHandles="1" noChangeArrowheads="1" noChangeShapeType="1" noTextEdit="1"/>
+          </p:cNvSpPr>
+          <p:nvPr>
+            <p:extLst>
+              <p:ext uri="{386F3935-93C4-4BCD-93E2-E3B085C9AB24}">
+                <p16:designElem xmlns:p16="http://schemas.microsoft.com/office/powerpoint/2015/main" val="1"/>
+              </p:ext>
+            </p:extLst>
+          </p:nvPr>
+        </p:nvSpPr>
+        <p:spPr>
+          <a:xfrm>
+            <a:off x="6096000" y="0"/>
+            <a:ext cx="6095990" cy="6858001"/>
+          </a:xfrm>
+          <a:prstGeom prst="rect">
+            <a:avLst/>
+          </a:prstGeom>
+          <a:solidFill>
+            <a:schemeClr val="bg1">
+              <a:lumMod val="95000"/>
+            </a:schemeClr>
+          </a:solidFill>
+          <a:ln>
+            <a:noFill/>
+          </a:ln>
+        </p:spPr>
+        <p:style>
+          <a:lnRef idx="2">
+            <a:schemeClr val="accent1">
+              <a:shade val="50000"/>
+            </a:schemeClr>
+          </a:lnRef>
+          <a:fillRef idx="1">
+            <a:schemeClr val="accent1"/>
+          </a:fillRef>
+          <a:effectRef idx="0">
+            <a:schemeClr val="accent1"/>
+          </a:effectRef>
+          <a:fontRef idx="minor">
+            <a:schemeClr val="lt1"/>
+          </a:fontRef>
+        </p:style>
+        <p:txBody>
+          <a:bodyPr rtlCol="0" anchor="ctr"/>
+          <a:lstStyle/>
+          <a:p>
+            <a:pPr algn="ctr"/>
+            <a:endParaRPr lang="en-US"/>
+          </a:p>
+        </p:txBody>
+      </p:sp>
       <p:pic>
         <p:nvPicPr>
-          <p:cNvPr id="3078" name="Picture 6" descr="A graph with numbers and a line&#10;&#10;Description automatically generated">
+          <p:cNvPr id="3076" name="Picture 4" descr="A graph showing the value of a stock market&#10;&#10;Description automatically generated">
             <a:extLst>
               <a:ext uri="{FF2B5EF4-FFF2-40B4-BE49-F238E27FC236}">
-                <a16:creationId xmlns:a16="http://schemas.microsoft.com/office/drawing/2014/main" id="{6D5DCD01-8C48-3A94-F2D5-D79D37461C00}"/>
+                <a16:creationId xmlns:a16="http://schemas.microsoft.com/office/drawing/2014/main" id="{BAAFA876-61E2-D167-E350-1592F09848C1}"/>
               </a:ext>
             </a:extLst>
           </p:cNvPr>
@@ -6548,8 +7964,8 @@
         </p:blipFill>
         <p:spPr bwMode="auto">
           <a:xfrm>
-            <a:off x="4599296" y="2200459"/>
-            <a:ext cx="3007003" cy="2082349"/>
+            <a:off x="7598031" y="637762"/>
+            <a:ext cx="2557656" cy="1758389"/>
           </a:xfrm>
           <a:prstGeom prst="rect">
             <a:avLst/>
@@ -6594,8 +8010,8 @@
         </p:blipFill>
         <p:spPr bwMode="auto">
           <a:xfrm>
-            <a:off x="7913295" y="2200459"/>
-            <a:ext cx="3061813" cy="2104996"/>
+            <a:off x="7666522" y="2557023"/>
+            <a:ext cx="2420674" cy="1664214"/>
           </a:xfrm>
           <a:prstGeom prst="rect">
             <a:avLst/>
@@ -6614,6 +8030,69 @@
       </p:pic>
       <p:sp>
         <p:nvSpPr>
+          <p:cNvPr id="3080" name="Rectangle 3079">
+            <a:extLst>
+              <a:ext uri="{FF2B5EF4-FFF2-40B4-BE49-F238E27FC236}">
+                <a16:creationId xmlns:a16="http://schemas.microsoft.com/office/drawing/2014/main" id="{450D3AD2-FA80-415F-A9CE-54D884561CD7}"/>
+              </a:ext>
+              <a:ext uri="{C183D7F6-B498-43B3-948B-1728B52AA6E4}">
+                <adec:decorative xmlns:adec="http://schemas.microsoft.com/office/drawing/2017/decorative" val="1"/>
+              </a:ext>
+            </a:extLst>
+          </p:cNvPr>
+          <p:cNvSpPr>
+            <a:spLocks noGrp="1" noRot="1" noChangeAspect="1" noMove="1" noResize="1" noEditPoints="1" noAdjustHandles="1" noChangeArrowheads="1" noChangeShapeType="1" noTextEdit="1"/>
+          </p:cNvSpPr>
+          <p:nvPr>
+            <p:extLst>
+              <p:ext uri="{386F3935-93C4-4BCD-93E2-E3B085C9AB24}">
+                <p16:designElem xmlns:p16="http://schemas.microsoft.com/office/powerpoint/2015/main" val="1"/>
+              </p:ext>
+            </p:extLst>
+          </p:nvPr>
+        </p:nvSpPr>
+        <p:spPr>
+          <a:xfrm>
+            <a:off x="6734650" y="4552052"/>
+            <a:ext cx="457200" cy="45720"/>
+          </a:xfrm>
+          <a:prstGeom prst="rect">
+            <a:avLst/>
+          </a:prstGeom>
+          <a:solidFill>
+            <a:schemeClr val="tx1"/>
+          </a:solidFill>
+          <a:ln>
+            <a:noFill/>
+          </a:ln>
+        </p:spPr>
+        <p:style>
+          <a:lnRef idx="2">
+            <a:schemeClr val="accent1">
+              <a:shade val="50000"/>
+            </a:schemeClr>
+          </a:lnRef>
+          <a:fillRef idx="1">
+            <a:schemeClr val="accent1"/>
+          </a:fillRef>
+          <a:effectRef idx="0">
+            <a:schemeClr val="accent1"/>
+          </a:effectRef>
+          <a:fontRef idx="minor">
+            <a:schemeClr val="lt1"/>
+          </a:fontRef>
+        </p:style>
+        <p:txBody>
+          <a:bodyPr rtlCol="0" anchor="ctr"/>
+          <a:lstStyle/>
+          <a:p>
+            <a:pPr algn="ctr"/>
+            <a:endParaRPr lang="en-US"/>
+          </a:p>
+        </p:txBody>
+      </p:sp>
+      <p:sp>
+        <p:nvSpPr>
           <p:cNvPr id="5" name="TextBox 4">
             <a:extLst>
               <a:ext uri="{FF2B5EF4-FFF2-40B4-BE49-F238E27FC236}">
@@ -6626,8 +8105,8 @@
         </p:nvSpPr>
         <p:spPr>
           <a:xfrm>
-            <a:off x="1371601" y="4786744"/>
-            <a:ext cx="9448800" cy="1442631"/>
+            <a:off x="6734649" y="4758638"/>
+            <a:ext cx="4284420" cy="1455891"/>
           </a:xfrm>
           <a:prstGeom prst="rect">
             <a:avLst/>
@@ -6650,7 +8129,10 @@
               <a:buChar char="•"/>
             </a:pPr>
             <a:r>
-              <a:rPr lang="en-US" sz="2000"/>
+              <a:rPr lang="en-US" dirty="0">
+                <a:latin typeface="Helvetica" panose="020B0604020202020204" pitchFamily="34" charset="0"/>
+                <a:cs typeface="Helvetica" panose="020B0604020202020204" pitchFamily="34" charset="0"/>
+              </a:rPr>
               <a:t>Model 3 closely matches actual prices, especially in the short term, making it the most effective for real-world financial forecasting.</a:t>
             </a:r>
           </a:p>
@@ -6694,21 +8176,70 @@
           <a:chExt cx="0" cy="0"/>
         </a:xfrm>
       </p:grpSpPr>
-      <p:sp useBgFill="1">
-        <p:nvSpPr>
-          <p:cNvPr id="14" name="Rectangle 13">
+      <p:sp>
+        <p:nvSpPr>
+          <p:cNvPr id="13" name="TextBox 12">
             <a:extLst>
               <a:ext uri="{FF2B5EF4-FFF2-40B4-BE49-F238E27FC236}">
-                <a16:creationId xmlns:a16="http://schemas.microsoft.com/office/drawing/2014/main" id="{09588DA8-065E-4F6F-8EFD-43104AB2E0CF}"/>
+                <a16:creationId xmlns:a16="http://schemas.microsoft.com/office/drawing/2014/main" id="{DD2C3AB2-FDE9-270F-C2FF-C0EC9C72E7C7}"/>
+              </a:ext>
+            </a:extLst>
+          </p:cNvPr>
+          <p:cNvSpPr txBox="1"/>
+          <p:nvPr/>
+        </p:nvSpPr>
+        <p:spPr>
+          <a:xfrm>
+            <a:off x="800100" y="3582293"/>
+            <a:ext cx="4165795" cy="2738607"/>
+          </a:xfrm>
+          <a:prstGeom prst="rect">
+            <a:avLst/>
+          </a:prstGeom>
+        </p:spPr>
+        <p:txBody>
+          <a:bodyPr vert="horz" lIns="91440" tIns="45720" rIns="91440" bIns="45720" rtlCol="0" anchor="t">
+            <a:normAutofit/>
+          </a:bodyPr>
+          <a:lstStyle/>
+          <a:p>
+            <a:pPr algn="r" defTabSz="914400">
+              <a:lnSpc>
+                <a:spcPct val="90000"/>
+              </a:lnSpc>
+              <a:spcBef>
+                <a:spcPct val="0"/>
+              </a:spcBef>
+              <a:spcAft>
+                <a:spcPts val="600"/>
+              </a:spcAft>
+            </a:pPr>
+            <a:r>
+              <a:rPr lang="en-US" sz="5000" dirty="0">
+                <a:latin typeface="Helvetica" panose="020B0604020202020204" pitchFamily="34" charset="0"/>
+                <a:ea typeface="+mj-ea"/>
+                <a:cs typeface="Helvetica" panose="020B0604020202020204" pitchFamily="34" charset="0"/>
+              </a:rPr>
+              <a:t>Model Results and Metrics</a:t>
+            </a:r>
+          </a:p>
+        </p:txBody>
+      </p:sp>
+      <p:cxnSp>
+        <p:nvCxnSpPr>
+          <p:cNvPr id="1037" name="Straight Connector 1036">
+            <a:extLst>
+              <a:ext uri="{FF2B5EF4-FFF2-40B4-BE49-F238E27FC236}">
+                <a16:creationId xmlns:a16="http://schemas.microsoft.com/office/drawing/2014/main" id="{D553F50E-1DB9-1304-55CF-733DDC6C9B46}"/>
               </a:ext>
               <a:ext uri="{C183D7F6-B498-43B3-948B-1728B52AA6E4}">
                 <adec:decorative xmlns:adec="http://schemas.microsoft.com/office/drawing/2017/decorative" val="1"/>
               </a:ext>
             </a:extLst>
           </p:cNvPr>
-          <p:cNvSpPr>
-            <a:spLocks noGrp="1" noRot="1" noChangeAspect="1" noMove="1" noResize="1" noEditPoints="1" noAdjustHandles="1" noChangeArrowheads="1" noChangeShapeType="1" noTextEdit="1"/>
-          </p:cNvSpPr>
+          <p:cNvCxnSpPr>
+            <a:cxnSpLocks noGrp="1" noRot="1" noChangeAspect="1" noMove="1" noResize="1" noEditPoints="1" noAdjustHandles="1" noChangeArrowheads="1" noChangeShapeType="1"/>
+          </p:cNvCxnSpPr>
           <p:nvPr>
             <p:extLst>
               <p:ext uri="{386F3935-93C4-4BCD-93E2-E3B085C9AB24}">
@@ -6716,760 +8247,36 @@
               </p:ext>
             </p:extLst>
           </p:nvPr>
-        </p:nvSpPr>
+        </p:nvCxnSpPr>
         <p:spPr>
           <a:xfrm>
-            <a:off x="0" y="0"/>
-            <a:ext cx="12192000" cy="6858000"/>
+            <a:off x="865140" y="871146"/>
+            <a:ext cx="736939" cy="0"/>
           </a:xfrm>
-          <a:prstGeom prst="rect">
+          <a:prstGeom prst="line">
             <a:avLst/>
           </a:prstGeom>
-          <a:ln w="12700" cap="flat" cmpd="sng" algn="ctr">
-            <a:noFill/>
-            <a:prstDash val="solid"/>
-            <a:miter lim="800000"/>
+          <a:ln w="57150">
+            <a:solidFill>
+              <a:schemeClr val="accent4"/>
+            </a:solidFill>
           </a:ln>
-          <a:effectLst/>
-          <a:extLst>
-            <a:ext uri="{91240B29-F687-4F45-9708-019B960494DF}">
-              <a14:hiddenLine xmlns:a14="http://schemas.microsoft.com/office/drawing/2010/main" w="12700" cap="flat" cmpd="sng" algn="ctr">
-                <a:solidFill>
-                  <a:schemeClr val="accent1">
-                    <a:shade val="50000"/>
-                  </a:schemeClr>
-                </a:solidFill>
-                <a:prstDash val="solid"/>
-                <a:miter lim="800000"/>
-              </a14:hiddenLine>
-            </a:ext>
-          </a:extLst>
         </p:spPr>
         <p:style>
-          <a:lnRef idx="2">
-            <a:schemeClr val="accent1">
-              <a:shade val="50000"/>
-            </a:schemeClr>
+          <a:lnRef idx="1">
+            <a:schemeClr val="accent1"/>
           </a:lnRef>
-          <a:fillRef idx="1">
+          <a:fillRef idx="0">
             <a:schemeClr val="accent1"/>
           </a:fillRef>
           <a:effectRef idx="0">
             <a:schemeClr val="accent1"/>
           </a:effectRef>
           <a:fontRef idx="minor">
-            <a:schemeClr val="lt1"/>
+            <a:schemeClr val="tx1"/>
           </a:fontRef>
         </p:style>
-        <p:txBody>
-          <a:bodyPr rtlCol="0" anchor="ctr"/>
-          <a:lstStyle/>
-          <a:p>
-            <a:pPr algn="ctr"/>
-            <a:endParaRPr lang="en-US"/>
-          </a:p>
-        </p:txBody>
-      </p:sp>
-      <p:sp useBgFill="1">
-        <p:nvSpPr>
-          <p:cNvPr id="16" name="Rectangle 15">
-            <a:extLst>
-              <a:ext uri="{FF2B5EF4-FFF2-40B4-BE49-F238E27FC236}">
-                <a16:creationId xmlns:a16="http://schemas.microsoft.com/office/drawing/2014/main" id="{C4285719-470E-454C-AF62-8323075F1F5B}"/>
-              </a:ext>
-              <a:ext uri="{C183D7F6-B498-43B3-948B-1728B52AA6E4}">
-                <adec:decorative xmlns:adec="http://schemas.microsoft.com/office/drawing/2017/decorative" val="1"/>
-              </a:ext>
-            </a:extLst>
-          </p:cNvPr>
-          <p:cNvSpPr>
-            <a:spLocks noGrp="1" noRot="1" noChangeAspect="1" noMove="1" noResize="1" noEditPoints="1" noAdjustHandles="1" noChangeArrowheads="1" noChangeShapeType="1" noTextEdit="1"/>
-          </p:cNvSpPr>
-          <p:nvPr>
-            <p:extLst>
-              <p:ext uri="{386F3935-93C4-4BCD-93E2-E3B085C9AB24}">
-                <p16:designElem xmlns:p16="http://schemas.microsoft.com/office/powerpoint/2015/main" val="1"/>
-              </p:ext>
-            </p:extLst>
-          </p:nvPr>
-        </p:nvSpPr>
-        <p:spPr>
-          <a:xfrm>
-            <a:off x="0" y="0"/>
-            <a:ext cx="12188952" cy="6858000"/>
-          </a:xfrm>
-          <a:prstGeom prst="rect">
-            <a:avLst/>
-          </a:prstGeom>
-          <a:ln w="12700" cap="flat" cmpd="sng" algn="ctr">
-            <a:noFill/>
-            <a:prstDash val="solid"/>
-            <a:miter lim="800000"/>
-          </a:ln>
-          <a:effectLst/>
-          <a:extLst>
-            <a:ext uri="{91240B29-F687-4F45-9708-019B960494DF}">
-              <a14:hiddenLine xmlns:a14="http://schemas.microsoft.com/office/drawing/2010/main" w="12700" cap="flat" cmpd="sng" algn="ctr">
-                <a:solidFill>
-                  <a:schemeClr val="accent1">
-                    <a:shade val="50000"/>
-                  </a:schemeClr>
-                </a:solidFill>
-                <a:prstDash val="solid"/>
-                <a:miter lim="800000"/>
-              </a14:hiddenLine>
-            </a:ext>
-          </a:extLst>
-        </p:spPr>
-        <p:style>
-          <a:lnRef idx="2">
-            <a:schemeClr val="accent1">
-              <a:shade val="50000"/>
-            </a:schemeClr>
-          </a:lnRef>
-          <a:fillRef idx="1">
-            <a:schemeClr val="accent1"/>
-          </a:fillRef>
-          <a:effectRef idx="0">
-            <a:schemeClr val="accent1"/>
-          </a:effectRef>
-          <a:fontRef idx="minor">
-            <a:schemeClr val="lt1"/>
-          </a:fontRef>
-        </p:style>
-        <p:txBody>
-          <a:bodyPr rtlCol="0" anchor="ctr"/>
-          <a:lstStyle/>
-          <a:p>
-            <a:pPr algn="ctr"/>
-            <a:endParaRPr lang="en-US"/>
-          </a:p>
-        </p:txBody>
-      </p:sp>
-      <p:sp>
-        <p:nvSpPr>
-          <p:cNvPr id="18" name="Rectangle 17">
-            <a:extLst>
-              <a:ext uri="{FF2B5EF4-FFF2-40B4-BE49-F238E27FC236}">
-                <a16:creationId xmlns:a16="http://schemas.microsoft.com/office/drawing/2014/main" id="{CD9FE4EF-C4D8-49A0-B2FF-81D8DB7D8A24}"/>
-              </a:ext>
-              <a:ext uri="{C183D7F6-B498-43B3-948B-1728B52AA6E4}">
-                <adec:decorative xmlns:adec="http://schemas.microsoft.com/office/drawing/2017/decorative" val="1"/>
-              </a:ext>
-            </a:extLst>
-          </p:cNvPr>
-          <p:cNvSpPr>
-            <a:spLocks noGrp="1" noRot="1" noChangeAspect="1" noMove="1" noResize="1" noEditPoints="1" noAdjustHandles="1" noChangeArrowheads="1" noChangeShapeType="1" noTextEdit="1"/>
-          </p:cNvSpPr>
-          <p:nvPr>
-            <p:extLst>
-              <p:ext uri="{386F3935-93C4-4BCD-93E2-E3B085C9AB24}">
-                <p16:designElem xmlns:p16="http://schemas.microsoft.com/office/powerpoint/2015/main" val="1"/>
-              </p:ext>
-            </p:extLst>
-          </p:nvPr>
-        </p:nvSpPr>
-        <p:spPr>
-          <a:xfrm rot="5400000" flipH="1">
-            <a:off x="-1410084" y="1410082"/>
-            <a:ext cx="6858000" cy="4037836"/>
-          </a:xfrm>
-          <a:prstGeom prst="rect">
-            <a:avLst/>
-          </a:prstGeom>
-          <a:gradFill>
-            <a:gsLst>
-              <a:gs pos="8000">
-                <a:srgbClr val="000000"/>
-              </a:gs>
-              <a:gs pos="100000">
-                <a:schemeClr val="accent1">
-                  <a:lumMod val="75000"/>
-                </a:schemeClr>
-              </a:gs>
-            </a:gsLst>
-            <a:lin ang="3000000" scaled="0"/>
-          </a:gradFill>
-          <a:ln>
-            <a:noFill/>
-          </a:ln>
-        </p:spPr>
-        <p:style>
-          <a:lnRef idx="2">
-            <a:schemeClr val="accent1">
-              <a:shade val="50000"/>
-            </a:schemeClr>
-          </a:lnRef>
-          <a:fillRef idx="1">
-            <a:schemeClr val="accent1"/>
-          </a:fillRef>
-          <a:effectRef idx="0">
-            <a:schemeClr val="accent1"/>
-          </a:effectRef>
-          <a:fontRef idx="minor">
-            <a:schemeClr val="lt1"/>
-          </a:fontRef>
-        </p:style>
-        <p:txBody>
-          <a:bodyPr rtlCol="0" anchor="ctr"/>
-          <a:lstStyle/>
-          <a:p>
-            <a:pPr algn="ctr"/>
-            <a:endParaRPr lang="en-US"/>
-          </a:p>
-        </p:txBody>
-      </p:sp>
-      <p:sp>
-        <p:nvSpPr>
-          <p:cNvPr id="20" name="Rectangle 19">
-            <a:extLst>
-              <a:ext uri="{FF2B5EF4-FFF2-40B4-BE49-F238E27FC236}">
-                <a16:creationId xmlns:a16="http://schemas.microsoft.com/office/drawing/2014/main" id="{4300840D-0A0B-4512-BACA-B439D5B9C57C}"/>
-              </a:ext>
-              <a:ext uri="{C183D7F6-B498-43B3-948B-1728B52AA6E4}">
-                <adec:decorative xmlns:adec="http://schemas.microsoft.com/office/drawing/2017/decorative" val="1"/>
-              </a:ext>
-            </a:extLst>
-          </p:cNvPr>
-          <p:cNvSpPr>
-            <a:spLocks noGrp="1" noRot="1" noChangeAspect="1" noMove="1" noResize="1" noEditPoints="1" noAdjustHandles="1" noChangeArrowheads="1" noChangeShapeType="1" noTextEdit="1"/>
-          </p:cNvSpPr>
-          <p:nvPr>
-            <p:extLst>
-              <p:ext uri="{386F3935-93C4-4BCD-93E2-E3B085C9AB24}">
-                <p16:designElem xmlns:p16="http://schemas.microsoft.com/office/powerpoint/2015/main" val="1"/>
-              </p:ext>
-            </p:extLst>
-          </p:nvPr>
-        </p:nvSpPr>
-        <p:spPr>
-          <a:xfrm rot="5400000" flipH="1">
-            <a:off x="-1410085" y="1420219"/>
-            <a:ext cx="6857999" cy="4037839"/>
-          </a:xfrm>
-          <a:prstGeom prst="rect">
-            <a:avLst/>
-          </a:prstGeom>
-          <a:gradFill>
-            <a:gsLst>
-              <a:gs pos="0">
-                <a:srgbClr val="000000">
-                  <a:alpha val="0"/>
-                </a:srgbClr>
-              </a:gs>
-              <a:gs pos="99000">
-                <a:schemeClr val="accent1">
-                  <a:alpha val="46000"/>
-                </a:schemeClr>
-              </a:gs>
-            </a:gsLst>
-            <a:lin ang="1800000" scaled="0"/>
-          </a:gradFill>
-          <a:ln>
-            <a:noFill/>
-          </a:ln>
-        </p:spPr>
-        <p:style>
-          <a:lnRef idx="2">
-            <a:schemeClr val="accent1">
-              <a:shade val="50000"/>
-            </a:schemeClr>
-          </a:lnRef>
-          <a:fillRef idx="1">
-            <a:schemeClr val="accent1"/>
-          </a:fillRef>
-          <a:effectRef idx="0">
-            <a:schemeClr val="accent1"/>
-          </a:effectRef>
-          <a:fontRef idx="minor">
-            <a:schemeClr val="lt1"/>
-          </a:fontRef>
-        </p:style>
-        <p:txBody>
-          <a:bodyPr rtlCol="0" anchor="ctr"/>
-          <a:lstStyle/>
-          <a:p>
-            <a:pPr algn="ctr"/>
-            <a:endParaRPr lang="en-US"/>
-          </a:p>
-        </p:txBody>
-      </p:sp>
-      <p:sp>
-        <p:nvSpPr>
-          <p:cNvPr id="22" name="Rectangle 21">
-            <a:extLst>
-              <a:ext uri="{FF2B5EF4-FFF2-40B4-BE49-F238E27FC236}">
-                <a16:creationId xmlns:a16="http://schemas.microsoft.com/office/drawing/2014/main" id="{D2B78728-A580-49A7-84F9-6EF6F583ADE0}"/>
-              </a:ext>
-              <a:ext uri="{C183D7F6-B498-43B3-948B-1728B52AA6E4}">
-                <adec:decorative xmlns:adec="http://schemas.microsoft.com/office/drawing/2017/decorative" val="1"/>
-              </a:ext>
-            </a:extLst>
-          </p:cNvPr>
-          <p:cNvSpPr>
-            <a:spLocks noGrp="1" noRot="1" noChangeAspect="1" noMove="1" noResize="1" noEditPoints="1" noAdjustHandles="1" noChangeArrowheads="1" noChangeShapeType="1" noTextEdit="1"/>
-          </p:cNvSpPr>
-          <p:nvPr>
-            <p:extLst>
-              <p:ext uri="{386F3935-93C4-4BCD-93E2-E3B085C9AB24}">
-                <p16:designElem xmlns:p16="http://schemas.microsoft.com/office/powerpoint/2015/main" val="1"/>
-              </p:ext>
-            </p:extLst>
-          </p:nvPr>
-        </p:nvSpPr>
-        <p:spPr>
-          <a:xfrm rot="5400000" flipH="1">
-            <a:off x="767923" y="3588085"/>
-            <a:ext cx="2501979" cy="4037841"/>
-          </a:xfrm>
-          <a:prstGeom prst="rect">
-            <a:avLst/>
-          </a:prstGeom>
-          <a:gradFill>
-            <a:gsLst>
-              <a:gs pos="2000">
-                <a:schemeClr val="accent1">
-                  <a:alpha val="29000"/>
-                </a:schemeClr>
-              </a:gs>
-              <a:gs pos="100000">
-                <a:srgbClr val="000000">
-                  <a:alpha val="30000"/>
-                </a:srgbClr>
-              </a:gs>
-            </a:gsLst>
-            <a:lin ang="7800000" scaled="0"/>
-          </a:gradFill>
-          <a:ln>
-            <a:noFill/>
-          </a:ln>
-        </p:spPr>
-        <p:style>
-          <a:lnRef idx="2">
-            <a:schemeClr val="accent1">
-              <a:shade val="50000"/>
-            </a:schemeClr>
-          </a:lnRef>
-          <a:fillRef idx="1">
-            <a:schemeClr val="accent1"/>
-          </a:fillRef>
-          <a:effectRef idx="0">
-            <a:schemeClr val="accent1"/>
-          </a:effectRef>
-          <a:fontRef idx="minor">
-            <a:schemeClr val="lt1"/>
-          </a:fontRef>
-        </p:style>
-        <p:txBody>
-          <a:bodyPr rtlCol="0" anchor="ctr"/>
-          <a:lstStyle/>
-          <a:p>
-            <a:pPr algn="ctr"/>
-            <a:endParaRPr lang="en-US" dirty="0"/>
-          </a:p>
-        </p:txBody>
-      </p:sp>
-      <p:sp>
-        <p:nvSpPr>
-          <p:cNvPr id="24" name="Freeform: Shape 23">
-            <a:extLst>
-              <a:ext uri="{FF2B5EF4-FFF2-40B4-BE49-F238E27FC236}">
-                <a16:creationId xmlns:a16="http://schemas.microsoft.com/office/drawing/2014/main" id="{38FAA1A1-D861-433F-88FA-1E9D6FD31D11}"/>
-              </a:ext>
-              <a:ext uri="{C183D7F6-B498-43B3-948B-1728B52AA6E4}">
-                <adec:decorative xmlns:adec="http://schemas.microsoft.com/office/drawing/2017/decorative" val="1"/>
-              </a:ext>
-            </a:extLst>
-          </p:cNvPr>
-          <p:cNvSpPr>
-            <a:spLocks noGrp="1" noRot="1" noChangeAspect="1" noMove="1" noResize="1" noEditPoints="1" noAdjustHandles="1" noChangeArrowheads="1" noChangeShapeType="1" noTextEdit="1"/>
-          </p:cNvSpPr>
-          <p:nvPr>
-            <p:extLst>
-              <p:ext uri="{386F3935-93C4-4BCD-93E2-E3B085C9AB24}">
-                <p16:designElem xmlns:p16="http://schemas.microsoft.com/office/powerpoint/2015/main" val="1"/>
-              </p:ext>
-            </p:extLst>
-          </p:nvPr>
-        </p:nvSpPr>
-        <p:spPr>
-          <a:xfrm rot="20635413">
-            <a:off x="-501737" y="969718"/>
-            <a:ext cx="3900357" cy="4178958"/>
-          </a:xfrm>
-          <a:custGeom>
-            <a:avLst/>
-            <a:gdLst>
-              <a:gd name="connsiteX0" fmla="*/ 2432225 w 3900357"/>
-              <a:gd name="connsiteY0" fmla="*/ 93939 h 4178958"/>
-              <a:gd name="connsiteX1" fmla="*/ 3900357 w 3900357"/>
-              <a:gd name="connsiteY1" fmla="*/ 2089479 h 4178958"/>
-              <a:gd name="connsiteX2" fmla="*/ 1810878 w 3900357"/>
-              <a:gd name="connsiteY2" fmla="*/ 4178958 h 4178958"/>
-              <a:gd name="connsiteX3" fmla="*/ 78249 w 3900357"/>
-              <a:gd name="connsiteY3" fmla="*/ 3257727 h 4178958"/>
-              <a:gd name="connsiteX4" fmla="*/ 0 w 3900357"/>
-              <a:gd name="connsiteY4" fmla="*/ 3128923 h 4178958"/>
-              <a:gd name="connsiteX5" fmla="*/ 831324 w 3900357"/>
-              <a:gd name="connsiteY5" fmla="*/ 244281 h 4178958"/>
-              <a:gd name="connsiteX6" fmla="*/ 997559 w 3900357"/>
-              <a:gd name="connsiteY6" fmla="*/ 164202 h 4178958"/>
-              <a:gd name="connsiteX7" fmla="*/ 1810878 w 3900357"/>
-              <a:gd name="connsiteY7" fmla="*/ 0 h 4178958"/>
-              <a:gd name="connsiteX8" fmla="*/ 2432225 w 3900357"/>
-              <a:gd name="connsiteY8" fmla="*/ 93939 h 4178958"/>
-            </a:gdLst>
-            <a:ahLst/>
-            <a:cxnLst>
-              <a:cxn ang="0">
-                <a:pos x="connsiteX0" y="connsiteY0"/>
-              </a:cxn>
-              <a:cxn ang="0">
-                <a:pos x="connsiteX1" y="connsiteY1"/>
-              </a:cxn>
-              <a:cxn ang="0">
-                <a:pos x="connsiteX2" y="connsiteY2"/>
-              </a:cxn>
-              <a:cxn ang="0">
-                <a:pos x="connsiteX3" y="connsiteY3"/>
-              </a:cxn>
-              <a:cxn ang="0">
-                <a:pos x="connsiteX4" y="connsiteY4"/>
-              </a:cxn>
-              <a:cxn ang="0">
-                <a:pos x="connsiteX5" y="connsiteY5"/>
-              </a:cxn>
-              <a:cxn ang="0">
-                <a:pos x="connsiteX6" y="connsiteY6"/>
-              </a:cxn>
-              <a:cxn ang="0">
-                <a:pos x="connsiteX7" y="connsiteY7"/>
-              </a:cxn>
-              <a:cxn ang="0">
-                <a:pos x="connsiteX8" y="connsiteY8"/>
-              </a:cxn>
-            </a:cxnLst>
-            <a:rect l="l" t="t" r="r" b="b"/>
-            <a:pathLst>
-              <a:path w="3900357" h="4178958">
-                <a:moveTo>
-                  <a:pt x="2432225" y="93939"/>
-                </a:moveTo>
-                <a:cubicBezTo>
-                  <a:pt x="3282786" y="358491"/>
-                  <a:pt x="3900357" y="1151865"/>
-                  <a:pt x="3900357" y="2089479"/>
-                </a:cubicBezTo>
-                <a:cubicBezTo>
-                  <a:pt x="3900357" y="3243466"/>
-                  <a:pt x="2964865" y="4178958"/>
-                  <a:pt x="1810878" y="4178958"/>
-                </a:cubicBezTo>
-                <a:cubicBezTo>
-                  <a:pt x="1089636" y="4178958"/>
-                  <a:pt x="453744" y="3813531"/>
-                  <a:pt x="78249" y="3257727"/>
-                </a:cubicBezTo>
-                <a:lnTo>
-                  <a:pt x="0" y="3128923"/>
-                </a:lnTo>
-                <a:lnTo>
-                  <a:pt x="831324" y="244281"/>
-                </a:lnTo>
-                <a:lnTo>
-                  <a:pt x="997559" y="164202"/>
-                </a:lnTo>
-                <a:cubicBezTo>
-                  <a:pt x="1247540" y="58468"/>
-                  <a:pt x="1522381" y="0"/>
-                  <a:pt x="1810878" y="0"/>
-                </a:cubicBezTo>
-                <a:cubicBezTo>
-                  <a:pt x="2027251" y="0"/>
-                  <a:pt x="2235942" y="32888"/>
-                  <a:pt x="2432225" y="93939"/>
-                </a:cubicBezTo>
-                <a:close/>
-              </a:path>
-            </a:pathLst>
-          </a:custGeom>
-          <a:gradFill>
-            <a:gsLst>
-              <a:gs pos="29000">
-                <a:srgbClr val="000000">
-                  <a:alpha val="0"/>
-                </a:srgbClr>
-              </a:gs>
-              <a:gs pos="100000">
-                <a:schemeClr val="accent1">
-                  <a:alpha val="43000"/>
-                </a:schemeClr>
-              </a:gs>
-            </a:gsLst>
-            <a:lin ang="1800000" scaled="0"/>
-          </a:gradFill>
-          <a:ln>
-            <a:noFill/>
-          </a:ln>
-        </p:spPr>
-        <p:style>
-          <a:lnRef idx="2">
-            <a:schemeClr val="accent1">
-              <a:shade val="50000"/>
-            </a:schemeClr>
-          </a:lnRef>
-          <a:fillRef idx="1">
-            <a:schemeClr val="accent1"/>
-          </a:fillRef>
-          <a:effectRef idx="0">
-            <a:schemeClr val="accent1"/>
-          </a:effectRef>
-          <a:fontRef idx="minor">
-            <a:schemeClr val="lt1"/>
-          </a:fontRef>
-        </p:style>
-        <p:txBody>
-          <a:bodyPr wrap="square" rtlCol="0" anchor="ctr">
-            <a:noAutofit/>
-          </a:bodyPr>
-          <a:lstStyle/>
-          <a:p>
-            <a:pPr algn="ctr"/>
-            <a:endParaRPr lang="en-US" dirty="0"/>
-          </a:p>
-        </p:txBody>
-      </p:sp>
-      <p:sp>
-        <p:nvSpPr>
-          <p:cNvPr id="26" name="Rectangle 25">
-            <a:extLst>
-              <a:ext uri="{FF2B5EF4-FFF2-40B4-BE49-F238E27FC236}">
-                <a16:creationId xmlns:a16="http://schemas.microsoft.com/office/drawing/2014/main" id="{8D71EDA1-87BF-4D5D-AB79-F346FD19278A}"/>
-              </a:ext>
-              <a:ext uri="{C183D7F6-B498-43B3-948B-1728B52AA6E4}">
-                <adec:decorative xmlns:adec="http://schemas.microsoft.com/office/drawing/2017/decorative" val="1"/>
-              </a:ext>
-            </a:extLst>
-          </p:cNvPr>
-          <p:cNvSpPr>
-            <a:spLocks noGrp="1" noRot="1" noChangeAspect="1" noMove="1" noResize="1" noEditPoints="1" noAdjustHandles="1" noChangeArrowheads="1" noChangeShapeType="1" noTextEdit="1"/>
-          </p:cNvSpPr>
-          <p:nvPr>
-            <p:extLst>
-              <p:ext uri="{386F3935-93C4-4BCD-93E2-E3B085C9AB24}">
-                <p16:designElem xmlns:p16="http://schemas.microsoft.com/office/powerpoint/2015/main" val="1"/>
-              </p:ext>
-            </p:extLst>
-          </p:nvPr>
-        </p:nvSpPr>
-        <p:spPr>
-          <a:xfrm rot="5400000" flipH="1">
-            <a:off x="-1410093" y="1399943"/>
-            <a:ext cx="6858003" cy="4037835"/>
-          </a:xfrm>
-          <a:prstGeom prst="rect">
-            <a:avLst/>
-          </a:prstGeom>
-          <a:gradFill>
-            <a:gsLst>
-              <a:gs pos="0">
-                <a:srgbClr val="000000">
-                  <a:alpha val="0"/>
-                </a:srgbClr>
-              </a:gs>
-              <a:gs pos="99000">
-                <a:schemeClr val="accent1">
-                  <a:lumMod val="60000"/>
-                  <a:lumOff val="40000"/>
-                  <a:alpha val="11000"/>
-                </a:schemeClr>
-              </a:gs>
-            </a:gsLst>
-            <a:lin ang="7200000" scaled="0"/>
-          </a:gradFill>
-          <a:ln>
-            <a:noFill/>
-          </a:ln>
-        </p:spPr>
-        <p:style>
-          <a:lnRef idx="2">
-            <a:schemeClr val="accent1">
-              <a:shade val="50000"/>
-            </a:schemeClr>
-          </a:lnRef>
-          <a:fillRef idx="1">
-            <a:schemeClr val="accent1"/>
-          </a:fillRef>
-          <a:effectRef idx="0">
-            <a:schemeClr val="accent1"/>
-          </a:effectRef>
-          <a:fontRef idx="minor">
-            <a:schemeClr val="lt1"/>
-          </a:fontRef>
-        </p:style>
-        <p:txBody>
-          <a:bodyPr rtlCol="0" anchor="ctr"/>
-          <a:lstStyle/>
-          <a:p>
-            <a:pPr algn="ctr"/>
-            <a:endParaRPr lang="en-US"/>
-          </a:p>
-        </p:txBody>
-      </p:sp>
-      <p:sp>
-        <p:nvSpPr>
-          <p:cNvPr id="8" name="Title 1">
-            <a:extLst>
-              <a:ext uri="{FF2B5EF4-FFF2-40B4-BE49-F238E27FC236}">
-                <a16:creationId xmlns:a16="http://schemas.microsoft.com/office/drawing/2014/main" id="{59A2B651-35E2-A073-1307-92A5336CBF28}"/>
-              </a:ext>
-            </a:extLst>
-          </p:cNvPr>
-          <p:cNvSpPr txBox="1">
-            <a:spLocks/>
-          </p:cNvSpPr>
-          <p:nvPr/>
-        </p:nvSpPr>
-        <p:spPr>
-          <a:xfrm>
-            <a:off x="466722" y="586855"/>
-            <a:ext cx="3201366" cy="3387497"/>
-          </a:xfrm>
-          <a:prstGeom prst="rect">
-            <a:avLst/>
-          </a:prstGeom>
-        </p:spPr>
-        <p:txBody>
-          <a:bodyPr vert="horz" lIns="91440" tIns="45720" rIns="91440" bIns="45720" rtlCol="0" anchor="b">
-            <a:normAutofit/>
-          </a:bodyPr>
-          <a:lstStyle>
-            <a:lvl1pPr algn="l" defTabSz="914400" rtl="0" eaLnBrk="1" latinLnBrk="0" hangingPunct="1">
-              <a:lnSpc>
-                <a:spcPct val="90000"/>
-              </a:lnSpc>
-              <a:spcBef>
-                <a:spcPct val="0"/>
-              </a:spcBef>
-              <a:buNone/>
-              <a:defRPr sz="4400" kern="1200">
-                <a:solidFill>
-                  <a:schemeClr val="tx1"/>
-                </a:solidFill>
-                <a:latin typeface="+mj-lt"/>
-                <a:ea typeface="+mj-ea"/>
-                <a:cs typeface="+mj-cs"/>
-              </a:defRPr>
-            </a:lvl1pPr>
-          </a:lstStyle>
-          <a:p>
-            <a:pPr algn="r">
-              <a:spcAft>
-                <a:spcPts val="600"/>
-              </a:spcAft>
-            </a:pPr>
-            <a:endParaRPr lang="en-US" sz="4000" kern="1200">
-              <a:solidFill>
-                <a:srgbClr val="FFFFFF"/>
-              </a:solidFill>
-              <a:latin typeface="+mj-lt"/>
-              <a:ea typeface="+mj-ea"/>
-              <a:cs typeface="+mj-cs"/>
-            </a:endParaRPr>
-          </a:p>
-          <a:p>
-            <a:pPr algn="r">
-              <a:spcAft>
-                <a:spcPts val="600"/>
-              </a:spcAft>
-            </a:pPr>
-            <a:r>
-              <a:rPr lang="en-US" sz="4000" kern="1200">
-                <a:solidFill>
-                  <a:srgbClr val="FFFFFF"/>
-                </a:solidFill>
-                <a:latin typeface="+mj-lt"/>
-                <a:ea typeface="+mj-ea"/>
-                <a:cs typeface="+mj-cs"/>
-              </a:rPr>
-              <a:t>Results</a:t>
-            </a:r>
-          </a:p>
-        </p:txBody>
-      </p:sp>
-      <p:sp>
-        <p:nvSpPr>
-          <p:cNvPr id="9" name="TextBox 8">
-            <a:extLst>
-              <a:ext uri="{FF2B5EF4-FFF2-40B4-BE49-F238E27FC236}">
-                <a16:creationId xmlns:a16="http://schemas.microsoft.com/office/drawing/2014/main" id="{8FCDC436-B9A9-90A1-2F2B-68011A329D4F}"/>
-              </a:ext>
-            </a:extLst>
-          </p:cNvPr>
-          <p:cNvSpPr txBox="1"/>
-          <p:nvPr/>
-        </p:nvSpPr>
-        <p:spPr>
-          <a:xfrm>
-            <a:off x="4698858" y="470258"/>
-            <a:ext cx="6555347" cy="2877491"/>
-          </a:xfrm>
-          <a:prstGeom prst="rect">
-            <a:avLst/>
-          </a:prstGeom>
-        </p:spPr>
-        <p:txBody>
-          <a:bodyPr vert="horz" lIns="91440" tIns="45720" rIns="91440" bIns="45720" rtlCol="0" anchor="ctr">
-            <a:normAutofit/>
-          </a:bodyPr>
-          <a:lstStyle/>
-          <a:p>
-            <a:pPr marL="285750" indent="-228600" defTabSz="914400">
-              <a:lnSpc>
-                <a:spcPct val="90000"/>
-              </a:lnSpc>
-              <a:spcAft>
-                <a:spcPts val="600"/>
-              </a:spcAft>
-              <a:buFont typeface="Arial" panose="020B0604020202020204" pitchFamily="34" charset="0"/>
-              <a:buChar char="•"/>
-            </a:pPr>
-            <a:r>
-              <a:rPr lang="en-US" sz="2000" dirty="0"/>
-              <a:t>Model 3’s accuracy demonstrates the value of understanding competitor relationships. Businesses in competitive industries can use these insights to better anticipate market trends and refine strategies.</a:t>
-            </a:r>
-          </a:p>
-          <a:p>
-            <a:pPr marL="285750" indent="-228600" defTabSz="914400">
-              <a:lnSpc>
-                <a:spcPct val="90000"/>
-              </a:lnSpc>
-              <a:spcAft>
-                <a:spcPts val="600"/>
-              </a:spcAft>
-              <a:buFont typeface="Arial" panose="020B0604020202020204" pitchFamily="34" charset="0"/>
-              <a:buChar char="•"/>
-            </a:pPr>
-            <a:endParaRPr lang="en-US" sz="2000" dirty="0"/>
-          </a:p>
-          <a:p>
-            <a:pPr marL="285750" indent="-228600" defTabSz="914400">
-              <a:lnSpc>
-                <a:spcPct val="90000"/>
-              </a:lnSpc>
-              <a:spcAft>
-                <a:spcPts val="600"/>
-              </a:spcAft>
-              <a:buFont typeface="Arial" panose="020B0604020202020204" pitchFamily="34" charset="0"/>
-              <a:buChar char="•"/>
-            </a:pPr>
-            <a:r>
-              <a:rPr lang="en-US" sz="2000" dirty="0"/>
-              <a:t>Model 3 outperforms all others with the lowest error (Test RMSE ~ 0.56, within $1 of actual prices) and minimal overfitting, making it ideal for practical use.</a:t>
-            </a:r>
-          </a:p>
-        </p:txBody>
-      </p:sp>
+      </p:cxnSp>
       <p:pic>
         <p:nvPicPr>
           <p:cNvPr id="1026" name="Picture 2" descr="User uploaded image">
@@ -7492,15 +8299,14 @@
               </a:ext>
             </a:extLst>
           </a:blip>
-          <a:srcRect/>
           <a:stretch>
             <a:fillRect/>
           </a:stretch>
         </p:blipFill>
         <p:spPr bwMode="auto">
           <a:xfrm>
-            <a:off x="4301496" y="3626600"/>
-            <a:ext cx="7722544" cy="1066800"/>
+            <a:off x="1602079" y="630157"/>
+            <a:ext cx="8686800" cy="722045"/>
           </a:xfrm>
           <a:prstGeom prst="rect">
             <a:avLst/>
@@ -7539,15 +8345,14 @@
               </a:ext>
             </a:extLst>
           </a:blip>
-          <a:srcRect/>
           <a:stretch>
             <a:fillRect/>
           </a:stretch>
         </p:blipFill>
         <p:spPr bwMode="auto">
           <a:xfrm>
-            <a:off x="4301496" y="4791565"/>
-            <a:ext cx="7746043" cy="781050"/>
+            <a:off x="1602080" y="1626760"/>
+            <a:ext cx="8686799" cy="722044"/>
           </a:xfrm>
           <a:prstGeom prst="rect">
             <a:avLst/>
@@ -7586,15 +8391,14 @@
               </a:ext>
             </a:extLst>
           </a:blip>
-          <a:srcRect/>
           <a:stretch>
             <a:fillRect/>
           </a:stretch>
         </p:blipFill>
         <p:spPr bwMode="auto">
           <a:xfrm>
-            <a:off x="4301496" y="5768945"/>
-            <a:ext cx="7746043" cy="781050"/>
+            <a:off x="1602079" y="2569369"/>
+            <a:ext cx="8686799" cy="601085"/>
           </a:xfrm>
           <a:prstGeom prst="rect">
             <a:avLst/>
@@ -7611,6 +8415,88 @@
           </a:extLst>
         </p:spPr>
       </p:pic>
+      <p:cxnSp>
+        <p:nvCxnSpPr>
+          <p:cNvPr id="1039" name="Straight Connector 1038">
+            <a:extLst>
+              <a:ext uri="{FF2B5EF4-FFF2-40B4-BE49-F238E27FC236}">
+                <a16:creationId xmlns:a16="http://schemas.microsoft.com/office/drawing/2014/main" id="{249EDD1B-F94D-B4E6-ACAA-566B9A26FDE3}"/>
+              </a:ext>
+              <a:ext uri="{C183D7F6-B498-43B3-948B-1728B52AA6E4}">
+                <adec:decorative xmlns:adec="http://schemas.microsoft.com/office/drawing/2017/decorative" val="1"/>
+              </a:ext>
+            </a:extLst>
+          </p:cNvPr>
+          <p:cNvCxnSpPr>
+            <a:cxnSpLocks noGrp="1" noRot="1" noChangeAspect="1" noMove="1" noResize="1" noEditPoints="1" noAdjustHandles="1" noChangeArrowheads="1" noChangeShapeType="1"/>
+          </p:cNvCxnSpPr>
+          <p:nvPr>
+            <p:extLst>
+              <p:ext uri="{386F3935-93C4-4BCD-93E2-E3B085C9AB24}">
+                <p16:designElem xmlns:p16="http://schemas.microsoft.com/office/powerpoint/2015/main" val="1"/>
+              </p:ext>
+            </p:extLst>
+          </p:nvPr>
+        </p:nvCxnSpPr>
+        <p:spPr>
+          <a:xfrm>
+            <a:off x="909670" y="3307734"/>
+            <a:ext cx="10459156" cy="0"/>
+          </a:xfrm>
+          <a:prstGeom prst="line">
+            <a:avLst/>
+          </a:prstGeom>
+          <a:ln w="12700">
+            <a:solidFill>
+              <a:schemeClr val="bg2">
+                <a:lumMod val="90000"/>
+              </a:schemeClr>
+            </a:solidFill>
+          </a:ln>
+        </p:spPr>
+        <p:style>
+          <a:lnRef idx="1">
+            <a:schemeClr val="accent1"/>
+          </a:lnRef>
+          <a:fillRef idx="0">
+            <a:schemeClr val="accent1"/>
+          </a:fillRef>
+          <a:effectRef idx="0">
+            <a:schemeClr val="accent1"/>
+          </a:effectRef>
+          <a:fontRef idx="minor">
+            <a:schemeClr val="tx1"/>
+          </a:fontRef>
+        </p:style>
+      </p:cxnSp>
+      <p:graphicFrame>
+        <p:nvGraphicFramePr>
+          <p:cNvPr id="1032" name="TextBox 8">
+            <a:extLst>
+              <a:ext uri="{FF2B5EF4-FFF2-40B4-BE49-F238E27FC236}">
+                <a16:creationId xmlns:a16="http://schemas.microsoft.com/office/drawing/2014/main" id="{4855C481-1FD2-4FE6-C2CE-259A0D047365}"/>
+              </a:ext>
+            </a:extLst>
+          </p:cNvPr>
+          <p:cNvGraphicFramePr/>
+          <p:nvPr>
+            <p:extLst>
+              <p:ext uri="{D42A27DB-BD31-4B8C-83A1-F6EECF244321}">
+                <p14:modId xmlns:p14="http://schemas.microsoft.com/office/powerpoint/2010/main" val="2824024305"/>
+              </p:ext>
+            </p:extLst>
+          </p:nvPr>
+        </p:nvGraphicFramePr>
+        <p:xfrm>
+          <a:off x="5455685" y="3582294"/>
+          <a:ext cx="5898115" cy="2738606"/>
+        </p:xfrm>
+        <a:graphic>
+          <a:graphicData uri="http://schemas.openxmlformats.org/drawingml/2006/diagram">
+            <dgm:relIds xmlns:dgm="http://schemas.openxmlformats.org/drawingml/2006/diagram" xmlns:r="http://schemas.openxmlformats.org/officeDocument/2006/relationships" r:dm="rId5" r:lo="rId6" r:qs="rId7" r:cs="rId8"/>
+          </a:graphicData>
+        </a:graphic>
+      </p:graphicFrame>
     </p:spTree>
     <p:extLst>
       <p:ext uri="{BB962C8B-B14F-4D97-AF65-F5344CB8AC3E}">
@@ -7649,12 +8535,12 @@
           <a:chExt cx="0" cy="0"/>
         </a:xfrm>
       </p:grpSpPr>
-      <p:sp useBgFill="1">
-        <p:nvSpPr>
-          <p:cNvPr id="202" name="Rectangle 201">
+      <p:sp>
+        <p:nvSpPr>
+          <p:cNvPr id="8" name="Rectangle 7">
             <a:extLst>
               <a:ext uri="{FF2B5EF4-FFF2-40B4-BE49-F238E27FC236}">
-                <a16:creationId xmlns:a16="http://schemas.microsoft.com/office/drawing/2014/main" id="{09588DA8-065E-4F6F-8EFD-43104AB2E0CF}"/>
+                <a16:creationId xmlns:a16="http://schemas.microsoft.com/office/drawing/2014/main" id="{70DFC902-7D23-471A-B557-B6B6917D7A0D}"/>
               </a:ext>
               <a:ext uri="{C183D7F6-B498-43B3-948B-1728B52AA6E4}">
                 <adec:decorative xmlns:adec="http://schemas.microsoft.com/office/drawing/2017/decorative" val="1"/>
@@ -7674,177 +8560,18 @@
         </p:nvSpPr>
         <p:spPr>
           <a:xfrm>
-            <a:off x="0" y="0"/>
-            <a:ext cx="12192000" cy="6858000"/>
+            <a:off x="10" y="-5705"/>
+            <a:ext cx="12191990" cy="1694346"/>
           </a:xfrm>
           <a:prstGeom prst="rect">
             <a:avLst/>
           </a:prstGeom>
-          <a:ln w="12700" cap="flat" cmpd="sng" algn="ctr">
-            <a:noFill/>
-            <a:prstDash val="solid"/>
-            <a:miter lim="800000"/>
-          </a:ln>
-          <a:effectLst/>
-          <a:extLst>
-            <a:ext uri="{91240B29-F687-4F45-9708-019B960494DF}">
-              <a14:hiddenLine xmlns:a14="http://schemas.microsoft.com/office/drawing/2010/main" w="12700" cap="flat" cmpd="sng" algn="ctr">
-                <a:solidFill>
-                  <a:schemeClr val="accent1">
-                    <a:shade val="50000"/>
-                  </a:schemeClr>
-                </a:solidFill>
-                <a:prstDash val="solid"/>
-                <a:miter lim="800000"/>
-              </a14:hiddenLine>
-            </a:ext>
-          </a:extLst>
-        </p:spPr>
-        <p:style>
-          <a:lnRef idx="2">
-            <a:schemeClr val="accent1">
-              <a:shade val="50000"/>
+          <a:solidFill>
+            <a:schemeClr val="tx1">
+              <a:lumMod val="85000"/>
+              <a:lumOff val="15000"/>
             </a:schemeClr>
-          </a:lnRef>
-          <a:fillRef idx="1">
-            <a:schemeClr val="accent1"/>
-          </a:fillRef>
-          <a:effectRef idx="0">
-            <a:schemeClr val="accent1"/>
-          </a:effectRef>
-          <a:fontRef idx="minor">
-            <a:schemeClr val="lt1"/>
-          </a:fontRef>
-        </p:style>
-        <p:txBody>
-          <a:bodyPr rtlCol="0" anchor="ctr"/>
-          <a:lstStyle/>
-          <a:p>
-            <a:pPr algn="ctr"/>
-            <a:endParaRPr lang="en-US"/>
-          </a:p>
-        </p:txBody>
-      </p:sp>
-      <p:sp useBgFill="1">
-        <p:nvSpPr>
-          <p:cNvPr id="204" name="Rectangle 203">
-            <a:extLst>
-              <a:ext uri="{FF2B5EF4-FFF2-40B4-BE49-F238E27FC236}">
-                <a16:creationId xmlns:a16="http://schemas.microsoft.com/office/drawing/2014/main" id="{C4285719-470E-454C-AF62-8323075F1F5B}"/>
-              </a:ext>
-              <a:ext uri="{C183D7F6-B498-43B3-948B-1728B52AA6E4}">
-                <adec:decorative xmlns:adec="http://schemas.microsoft.com/office/drawing/2017/decorative" val="1"/>
-              </a:ext>
-            </a:extLst>
-          </p:cNvPr>
-          <p:cNvSpPr>
-            <a:spLocks noGrp="1" noRot="1" noChangeAspect="1" noMove="1" noResize="1" noEditPoints="1" noAdjustHandles="1" noChangeArrowheads="1" noChangeShapeType="1" noTextEdit="1"/>
-          </p:cNvSpPr>
-          <p:nvPr>
-            <p:extLst>
-              <p:ext uri="{386F3935-93C4-4BCD-93E2-E3B085C9AB24}">
-                <p16:designElem xmlns:p16="http://schemas.microsoft.com/office/powerpoint/2015/main" val="1"/>
-              </p:ext>
-            </p:extLst>
-          </p:nvPr>
-        </p:nvSpPr>
-        <p:spPr>
-          <a:xfrm>
-            <a:off x="0" y="0"/>
-            <a:ext cx="12188952" cy="6858000"/>
-          </a:xfrm>
-          <a:prstGeom prst="rect">
-            <a:avLst/>
-          </a:prstGeom>
-          <a:ln w="12700" cap="flat" cmpd="sng" algn="ctr">
-            <a:noFill/>
-            <a:prstDash val="solid"/>
-            <a:miter lim="800000"/>
-          </a:ln>
-          <a:effectLst/>
-          <a:extLst>
-            <a:ext uri="{91240B29-F687-4F45-9708-019B960494DF}">
-              <a14:hiddenLine xmlns:a14="http://schemas.microsoft.com/office/drawing/2010/main" w="12700" cap="flat" cmpd="sng" algn="ctr">
-                <a:solidFill>
-                  <a:schemeClr val="accent1">
-                    <a:shade val="50000"/>
-                  </a:schemeClr>
-                </a:solidFill>
-                <a:prstDash val="solid"/>
-                <a:miter lim="800000"/>
-              </a14:hiddenLine>
-            </a:ext>
-          </a:extLst>
-        </p:spPr>
-        <p:style>
-          <a:lnRef idx="2">
-            <a:schemeClr val="accent1">
-              <a:shade val="50000"/>
-            </a:schemeClr>
-          </a:lnRef>
-          <a:fillRef idx="1">
-            <a:schemeClr val="accent1"/>
-          </a:fillRef>
-          <a:effectRef idx="0">
-            <a:schemeClr val="accent1"/>
-          </a:effectRef>
-          <a:fontRef idx="minor">
-            <a:schemeClr val="lt1"/>
-          </a:fontRef>
-        </p:style>
-        <p:txBody>
-          <a:bodyPr rtlCol="0" anchor="ctr"/>
-          <a:lstStyle/>
-          <a:p>
-            <a:pPr algn="ctr"/>
-            <a:endParaRPr lang="en-US"/>
-          </a:p>
-        </p:txBody>
-      </p:sp>
-      <p:sp>
-        <p:nvSpPr>
-          <p:cNvPr id="206" name="Rectangle 205">
-            <a:extLst>
-              <a:ext uri="{FF2B5EF4-FFF2-40B4-BE49-F238E27FC236}">
-                <a16:creationId xmlns:a16="http://schemas.microsoft.com/office/drawing/2014/main" id="{CD9FE4EF-C4D8-49A0-B2FF-81D8DB7D8A24}"/>
-              </a:ext>
-              <a:ext uri="{C183D7F6-B498-43B3-948B-1728B52AA6E4}">
-                <adec:decorative xmlns:adec="http://schemas.microsoft.com/office/drawing/2017/decorative" val="1"/>
-              </a:ext>
-            </a:extLst>
-          </p:cNvPr>
-          <p:cNvSpPr>
-            <a:spLocks noGrp="1" noRot="1" noChangeAspect="1" noMove="1" noResize="1" noEditPoints="1" noAdjustHandles="1" noChangeArrowheads="1" noChangeShapeType="1" noTextEdit="1"/>
-          </p:cNvSpPr>
-          <p:nvPr>
-            <p:extLst>
-              <p:ext uri="{386F3935-93C4-4BCD-93E2-E3B085C9AB24}">
-                <p16:designElem xmlns:p16="http://schemas.microsoft.com/office/powerpoint/2015/main" val="1"/>
-              </p:ext>
-            </p:extLst>
-          </p:nvPr>
-        </p:nvSpPr>
-        <p:spPr>
-          <a:xfrm rot="5400000" flipH="1">
-            <a:off x="-1410084" y="1410082"/>
-            <a:ext cx="6858000" cy="4037836"/>
-          </a:xfrm>
-          <a:prstGeom prst="rect">
-            <a:avLst/>
-          </a:prstGeom>
-          <a:gradFill>
-            <a:gsLst>
-              <a:gs pos="8000">
-                <a:srgbClr val="000000"/>
-              </a:gs>
-              <a:gs pos="100000">
-                <a:schemeClr val="accent1">
-                  <a:lumMod val="75000"/>
-                </a:schemeClr>
-              </a:gs>
-            </a:gsLst>
-            <a:lin ang="3000000" scaled="0"/>
-          </a:gradFill>
+          </a:solidFill>
           <a:ln>
             <a:noFill/>
           </a:ln>
@@ -7876,10 +8603,52 @@
       </p:sp>
       <p:sp>
         <p:nvSpPr>
-          <p:cNvPr id="208" name="Rectangle 207">
+          <p:cNvPr id="2" name="Title 1">
             <a:extLst>
               <a:ext uri="{FF2B5EF4-FFF2-40B4-BE49-F238E27FC236}">
-                <a16:creationId xmlns:a16="http://schemas.microsoft.com/office/drawing/2014/main" id="{4300840D-0A0B-4512-BACA-B439D5B9C57C}"/>
+                <a16:creationId xmlns:a16="http://schemas.microsoft.com/office/drawing/2014/main" id="{F4787284-22B3-D435-87DB-680335877D05}"/>
+              </a:ext>
+            </a:extLst>
+          </p:cNvPr>
+          <p:cNvSpPr>
+            <a:spLocks noGrp="1"/>
+          </p:cNvSpPr>
+          <p:nvPr>
+            <p:ph type="title"/>
+          </p:nvPr>
+        </p:nvSpPr>
+        <p:spPr>
+          <a:xfrm>
+            <a:off x="1156851" y="637762"/>
+            <a:ext cx="9888496" cy="900131"/>
+          </a:xfrm>
+        </p:spPr>
+        <p:txBody>
+          <a:bodyPr vert="horz" lIns="91440" tIns="45720" rIns="91440" bIns="45720" rtlCol="0" anchor="t">
+            <a:normAutofit/>
+          </a:bodyPr>
+          <a:lstStyle/>
+          <a:p>
+            <a:pPr algn="ctr"/>
+            <a:r>
+              <a:rPr lang="en-US" sz="5000" dirty="0">
+                <a:solidFill>
+                  <a:schemeClr val="bg1"/>
+                </a:solidFill>
+                <a:latin typeface="Helvetica" panose="020B0604020202020204" pitchFamily="34" charset="0"/>
+                <a:cs typeface="Helvetica" panose="020B0604020202020204" pitchFamily="34" charset="0"/>
+              </a:rPr>
+              <a:t>Conclusion</a:t>
+            </a:r>
+          </a:p>
+        </p:txBody>
+      </p:sp>
+      <p:sp>
+        <p:nvSpPr>
+          <p:cNvPr id="10" name="Rectangle 9">
+            <a:extLst>
+              <a:ext uri="{FF2B5EF4-FFF2-40B4-BE49-F238E27FC236}">
+                <a16:creationId xmlns:a16="http://schemas.microsoft.com/office/drawing/2014/main" id="{A55D5633-D557-4DCA-982C-FF36EB7A1C00}"/>
               </a:ext>
               <a:ext uri="{C183D7F6-B498-43B3-948B-1728B52AA6E4}">
                 <adec:decorative xmlns:adec="http://schemas.microsoft.com/office/drawing/2017/decorative" val="1"/>
@@ -7898,28 +8667,18 @@
           </p:nvPr>
         </p:nvSpPr>
         <p:spPr>
-          <a:xfrm rot="5400000" flipH="1">
-            <a:off x="-1410085" y="1420219"/>
-            <a:ext cx="6857999" cy="4037839"/>
+          <a:xfrm>
+            <a:off x="0" y="1688641"/>
+            <a:ext cx="12191990" cy="5169359"/>
           </a:xfrm>
           <a:prstGeom prst="rect">
             <a:avLst/>
           </a:prstGeom>
-          <a:gradFill>
-            <a:gsLst>
-              <a:gs pos="0">
-                <a:srgbClr val="000000">
-                  <a:alpha val="0"/>
-                </a:srgbClr>
-              </a:gs>
-              <a:gs pos="99000">
-                <a:schemeClr val="accent1">
-                  <a:alpha val="46000"/>
-                </a:schemeClr>
-              </a:gs>
-            </a:gsLst>
-            <a:lin ang="1800000" scaled="0"/>
-          </a:gradFill>
+          <a:solidFill>
+            <a:schemeClr val="bg1">
+              <a:lumMod val="95000"/>
+            </a:schemeClr>
+          </a:solidFill>
           <a:ln>
             <a:noFill/>
           </a:ln>
@@ -7951,10 +8710,10 @@
       </p:sp>
       <p:sp>
         <p:nvSpPr>
-          <p:cNvPr id="210" name="Rectangle 209">
+          <p:cNvPr id="12" name="Rectangle 11">
             <a:extLst>
               <a:ext uri="{FF2B5EF4-FFF2-40B4-BE49-F238E27FC236}">
-                <a16:creationId xmlns:a16="http://schemas.microsoft.com/office/drawing/2014/main" id="{D2B78728-A580-49A7-84F9-6EF6F583ADE0}"/>
+                <a16:creationId xmlns:a16="http://schemas.microsoft.com/office/drawing/2014/main" id="{450D3AD2-FA80-415F-A9CE-54D884561CD7}"/>
               </a:ext>
               <a:ext uri="{C183D7F6-B498-43B3-948B-1728B52AA6E4}">
                 <adec:decorative xmlns:adec="http://schemas.microsoft.com/office/drawing/2017/decorative" val="1"/>
@@ -7973,28 +8732,16 @@
           </p:nvPr>
         </p:nvSpPr>
         <p:spPr>
-          <a:xfrm rot="5400000" flipH="1">
-            <a:off x="767923" y="3588085"/>
-            <a:ext cx="2501979" cy="4037841"/>
+          <a:xfrm>
+            <a:off x="1156851" y="2010758"/>
+            <a:ext cx="457190" cy="45719"/>
           </a:xfrm>
           <a:prstGeom prst="rect">
             <a:avLst/>
           </a:prstGeom>
-          <a:gradFill>
-            <a:gsLst>
-              <a:gs pos="2000">
-                <a:schemeClr val="accent1">
-                  <a:alpha val="29000"/>
-                </a:schemeClr>
-              </a:gs>
-              <a:gs pos="100000">
-                <a:srgbClr val="000000">
-                  <a:alpha val="30000"/>
-                </a:srgbClr>
-              </a:gs>
-            </a:gsLst>
-            <a:lin ang="7800000" scaled="0"/>
-          </a:gradFill>
+          <a:solidFill>
+            <a:schemeClr val="tx1"/>
+          </a:solidFill>
           <a:ln>
             <a:noFill/>
           </a:ln>
@@ -8020,263 +8767,16 @@
           <a:lstStyle/>
           <a:p>
             <a:pPr algn="ctr"/>
-            <a:endParaRPr lang="en-US" dirty="0"/>
-          </a:p>
-        </p:txBody>
-      </p:sp>
-      <p:sp>
-        <p:nvSpPr>
-          <p:cNvPr id="212" name="Freeform: Shape 211">
+            <a:endParaRPr lang="en-US"/>
+          </a:p>
+        </p:txBody>
+      </p:sp>
+      <p:sp>
+        <p:nvSpPr>
+          <p:cNvPr id="3" name="Content Placeholder 2">
             <a:extLst>
               <a:ext uri="{FF2B5EF4-FFF2-40B4-BE49-F238E27FC236}">
-                <a16:creationId xmlns:a16="http://schemas.microsoft.com/office/drawing/2014/main" id="{38FAA1A1-D861-433F-88FA-1E9D6FD31D11}"/>
-              </a:ext>
-              <a:ext uri="{C183D7F6-B498-43B3-948B-1728B52AA6E4}">
-                <adec:decorative xmlns:adec="http://schemas.microsoft.com/office/drawing/2017/decorative" val="1"/>
-              </a:ext>
-            </a:extLst>
-          </p:cNvPr>
-          <p:cNvSpPr>
-            <a:spLocks noGrp="1" noRot="1" noChangeAspect="1" noMove="1" noResize="1" noEditPoints="1" noAdjustHandles="1" noChangeArrowheads="1" noChangeShapeType="1" noTextEdit="1"/>
-          </p:cNvSpPr>
-          <p:nvPr>
-            <p:extLst>
-              <p:ext uri="{386F3935-93C4-4BCD-93E2-E3B085C9AB24}">
-                <p16:designElem xmlns:p16="http://schemas.microsoft.com/office/powerpoint/2015/main" val="1"/>
-              </p:ext>
-            </p:extLst>
-          </p:nvPr>
-        </p:nvSpPr>
-        <p:spPr>
-          <a:xfrm rot="20635413">
-            <a:off x="-501737" y="969718"/>
-            <a:ext cx="3900357" cy="4178958"/>
-          </a:xfrm>
-          <a:custGeom>
-            <a:avLst/>
-            <a:gdLst>
-              <a:gd name="connsiteX0" fmla="*/ 2432225 w 3900357"/>
-              <a:gd name="connsiteY0" fmla="*/ 93939 h 4178958"/>
-              <a:gd name="connsiteX1" fmla="*/ 3900357 w 3900357"/>
-              <a:gd name="connsiteY1" fmla="*/ 2089479 h 4178958"/>
-              <a:gd name="connsiteX2" fmla="*/ 1810878 w 3900357"/>
-              <a:gd name="connsiteY2" fmla="*/ 4178958 h 4178958"/>
-              <a:gd name="connsiteX3" fmla="*/ 78249 w 3900357"/>
-              <a:gd name="connsiteY3" fmla="*/ 3257727 h 4178958"/>
-              <a:gd name="connsiteX4" fmla="*/ 0 w 3900357"/>
-              <a:gd name="connsiteY4" fmla="*/ 3128923 h 4178958"/>
-              <a:gd name="connsiteX5" fmla="*/ 831324 w 3900357"/>
-              <a:gd name="connsiteY5" fmla="*/ 244281 h 4178958"/>
-              <a:gd name="connsiteX6" fmla="*/ 997559 w 3900357"/>
-              <a:gd name="connsiteY6" fmla="*/ 164202 h 4178958"/>
-              <a:gd name="connsiteX7" fmla="*/ 1810878 w 3900357"/>
-              <a:gd name="connsiteY7" fmla="*/ 0 h 4178958"/>
-              <a:gd name="connsiteX8" fmla="*/ 2432225 w 3900357"/>
-              <a:gd name="connsiteY8" fmla="*/ 93939 h 4178958"/>
-            </a:gdLst>
-            <a:ahLst/>
-            <a:cxnLst>
-              <a:cxn ang="0">
-                <a:pos x="connsiteX0" y="connsiteY0"/>
-              </a:cxn>
-              <a:cxn ang="0">
-                <a:pos x="connsiteX1" y="connsiteY1"/>
-              </a:cxn>
-              <a:cxn ang="0">
-                <a:pos x="connsiteX2" y="connsiteY2"/>
-              </a:cxn>
-              <a:cxn ang="0">
-                <a:pos x="connsiteX3" y="connsiteY3"/>
-              </a:cxn>
-              <a:cxn ang="0">
-                <a:pos x="connsiteX4" y="connsiteY4"/>
-              </a:cxn>
-              <a:cxn ang="0">
-                <a:pos x="connsiteX5" y="connsiteY5"/>
-              </a:cxn>
-              <a:cxn ang="0">
-                <a:pos x="connsiteX6" y="connsiteY6"/>
-              </a:cxn>
-              <a:cxn ang="0">
-                <a:pos x="connsiteX7" y="connsiteY7"/>
-              </a:cxn>
-              <a:cxn ang="0">
-                <a:pos x="connsiteX8" y="connsiteY8"/>
-              </a:cxn>
-            </a:cxnLst>
-            <a:rect l="l" t="t" r="r" b="b"/>
-            <a:pathLst>
-              <a:path w="3900357" h="4178958">
-                <a:moveTo>
-                  <a:pt x="2432225" y="93939"/>
-                </a:moveTo>
-                <a:cubicBezTo>
-                  <a:pt x="3282786" y="358491"/>
-                  <a:pt x="3900357" y="1151865"/>
-                  <a:pt x="3900357" y="2089479"/>
-                </a:cubicBezTo>
-                <a:cubicBezTo>
-                  <a:pt x="3900357" y="3243466"/>
-                  <a:pt x="2964865" y="4178958"/>
-                  <a:pt x="1810878" y="4178958"/>
-                </a:cubicBezTo>
-                <a:cubicBezTo>
-                  <a:pt x="1089636" y="4178958"/>
-                  <a:pt x="453744" y="3813531"/>
-                  <a:pt x="78249" y="3257727"/>
-                </a:cubicBezTo>
-                <a:lnTo>
-                  <a:pt x="0" y="3128923"/>
-                </a:lnTo>
-                <a:lnTo>
-                  <a:pt x="831324" y="244281"/>
-                </a:lnTo>
-                <a:lnTo>
-                  <a:pt x="997559" y="164202"/>
-                </a:lnTo>
-                <a:cubicBezTo>
-                  <a:pt x="1247540" y="58468"/>
-                  <a:pt x="1522381" y="0"/>
-                  <a:pt x="1810878" y="0"/>
-                </a:cubicBezTo>
-                <a:cubicBezTo>
-                  <a:pt x="2027251" y="0"/>
-                  <a:pt x="2235942" y="32888"/>
-                  <a:pt x="2432225" y="93939"/>
-                </a:cubicBezTo>
-                <a:close/>
-              </a:path>
-            </a:pathLst>
-          </a:custGeom>
-          <a:gradFill>
-            <a:gsLst>
-              <a:gs pos="29000">
-                <a:srgbClr val="000000">
-                  <a:alpha val="0"/>
-                </a:srgbClr>
-              </a:gs>
-              <a:gs pos="100000">
-                <a:schemeClr val="accent1">
-                  <a:alpha val="43000"/>
-                </a:schemeClr>
-              </a:gs>
-            </a:gsLst>
-            <a:lin ang="1800000" scaled="0"/>
-          </a:gradFill>
-          <a:ln>
-            <a:noFill/>
-          </a:ln>
-        </p:spPr>
-        <p:style>
-          <a:lnRef idx="2">
-            <a:schemeClr val="accent1">
-              <a:shade val="50000"/>
-            </a:schemeClr>
-          </a:lnRef>
-          <a:fillRef idx="1">
-            <a:schemeClr val="accent1"/>
-          </a:fillRef>
-          <a:effectRef idx="0">
-            <a:schemeClr val="accent1"/>
-          </a:effectRef>
-          <a:fontRef idx="minor">
-            <a:schemeClr val="lt1"/>
-          </a:fontRef>
-        </p:style>
-        <p:txBody>
-          <a:bodyPr wrap="square" rtlCol="0" anchor="ctr">
-            <a:noAutofit/>
-          </a:bodyPr>
-          <a:lstStyle/>
-          <a:p>
-            <a:pPr algn="ctr"/>
-            <a:endParaRPr lang="en-US" dirty="0"/>
-          </a:p>
-        </p:txBody>
-      </p:sp>
-      <p:sp>
-        <p:nvSpPr>
-          <p:cNvPr id="214" name="Rectangle 213">
-            <a:extLst>
-              <a:ext uri="{FF2B5EF4-FFF2-40B4-BE49-F238E27FC236}">
-                <a16:creationId xmlns:a16="http://schemas.microsoft.com/office/drawing/2014/main" id="{8D71EDA1-87BF-4D5D-AB79-F346FD19278A}"/>
-              </a:ext>
-              <a:ext uri="{C183D7F6-B498-43B3-948B-1728B52AA6E4}">
-                <adec:decorative xmlns:adec="http://schemas.microsoft.com/office/drawing/2017/decorative" val="1"/>
-              </a:ext>
-            </a:extLst>
-          </p:cNvPr>
-          <p:cNvSpPr>
-            <a:spLocks noGrp="1" noRot="1" noChangeAspect="1" noMove="1" noResize="1" noEditPoints="1" noAdjustHandles="1" noChangeArrowheads="1" noChangeShapeType="1" noTextEdit="1"/>
-          </p:cNvSpPr>
-          <p:nvPr>
-            <p:extLst>
-              <p:ext uri="{386F3935-93C4-4BCD-93E2-E3B085C9AB24}">
-                <p16:designElem xmlns:p16="http://schemas.microsoft.com/office/powerpoint/2015/main" val="1"/>
-              </p:ext>
-            </p:extLst>
-          </p:nvPr>
-        </p:nvSpPr>
-        <p:spPr>
-          <a:xfrm rot="5400000" flipH="1">
-            <a:off x="-1410093" y="1399943"/>
-            <a:ext cx="6858003" cy="4037835"/>
-          </a:xfrm>
-          <a:prstGeom prst="rect">
-            <a:avLst/>
-          </a:prstGeom>
-          <a:gradFill>
-            <a:gsLst>
-              <a:gs pos="0">
-                <a:srgbClr val="000000">
-                  <a:alpha val="0"/>
-                </a:srgbClr>
-              </a:gs>
-              <a:gs pos="99000">
-                <a:schemeClr val="accent1">
-                  <a:lumMod val="60000"/>
-                  <a:lumOff val="40000"/>
-                  <a:alpha val="11000"/>
-                </a:schemeClr>
-              </a:gs>
-            </a:gsLst>
-            <a:lin ang="7200000" scaled="0"/>
-          </a:gradFill>
-          <a:ln>
-            <a:noFill/>
-          </a:ln>
-        </p:spPr>
-        <p:style>
-          <a:lnRef idx="2">
-            <a:schemeClr val="accent1">
-              <a:shade val="50000"/>
-            </a:schemeClr>
-          </a:lnRef>
-          <a:fillRef idx="1">
-            <a:schemeClr val="accent1"/>
-          </a:fillRef>
-          <a:effectRef idx="0">
-            <a:schemeClr val="accent1"/>
-          </a:effectRef>
-          <a:fontRef idx="minor">
-            <a:schemeClr val="lt1"/>
-          </a:fontRef>
-        </p:style>
-        <p:txBody>
-          <a:bodyPr rtlCol="0" anchor="ctr"/>
-          <a:lstStyle/>
-          <a:p>
-            <a:pPr algn="ctr"/>
-            <a:endParaRPr lang="en-US"/>
-          </a:p>
-        </p:txBody>
-      </p:sp>
-      <p:sp>
-        <p:nvSpPr>
-          <p:cNvPr id="2" name="Title 1">
-            <a:extLst>
-              <a:ext uri="{FF2B5EF4-FFF2-40B4-BE49-F238E27FC236}">
-                <a16:creationId xmlns:a16="http://schemas.microsoft.com/office/drawing/2014/main" id="{F4787284-22B3-D435-87DB-680335877D05}"/>
+                <a16:creationId xmlns:a16="http://schemas.microsoft.com/office/drawing/2014/main" id="{9DE338C6-0596-F694-7E4D-76A12A504693}"/>
               </a:ext>
             </a:extLst>
           </p:cNvPr>
@@ -8284,95 +8784,40 @@
             <a:spLocks noGrp="1"/>
           </p:cNvSpPr>
           <p:nvPr>
-            <p:ph type="title"/>
+            <p:ph idx="1"/>
           </p:nvPr>
         </p:nvSpPr>
         <p:spPr>
           <a:xfrm>
-            <a:off x="466722" y="586855"/>
-            <a:ext cx="3201366" cy="3387497"/>
+            <a:off x="1155548" y="2217343"/>
+            <a:ext cx="9880893" cy="3959619"/>
           </a:xfrm>
         </p:spPr>
         <p:txBody>
-          <a:bodyPr vert="horz" lIns="91440" tIns="45720" rIns="91440" bIns="45720" rtlCol="0" anchor="b">
+          <a:bodyPr vert="horz" lIns="91440" tIns="45720" rIns="91440" bIns="45720" rtlCol="0">
             <a:normAutofit/>
           </a:bodyPr>
           <a:lstStyle/>
           <a:p>
-            <a:pPr algn="r"/>
             <a:r>
-              <a:rPr lang="en-US" sz="4000" kern="1200">
-                <a:solidFill>
-                  <a:srgbClr val="FFFFFF"/>
-                </a:solidFill>
-                <a:latin typeface="+mj-lt"/>
-                <a:ea typeface="+mj-ea"/>
-                <a:cs typeface="+mj-cs"/>
-              </a:rPr>
-              <a:t>Conclusion</a:t>
-            </a:r>
-          </a:p>
-        </p:txBody>
-      </p:sp>
-      <p:sp>
-        <p:nvSpPr>
-          <p:cNvPr id="3" name="Content Placeholder 2">
-            <a:extLst>
-              <a:ext uri="{FF2B5EF4-FFF2-40B4-BE49-F238E27FC236}">
-                <a16:creationId xmlns:a16="http://schemas.microsoft.com/office/drawing/2014/main" id="{9DE338C6-0596-F694-7E4D-76A12A504693}"/>
-              </a:ext>
-            </a:extLst>
-          </p:cNvPr>
-          <p:cNvSpPr>
-            <a:spLocks noGrp="1"/>
-          </p:cNvSpPr>
-          <p:nvPr>
-            <p:ph idx="1"/>
-          </p:nvPr>
-        </p:nvSpPr>
-        <p:spPr>
-          <a:xfrm>
-            <a:off x="4810259" y="649480"/>
-            <a:ext cx="6555347" cy="5546047"/>
-          </a:xfrm>
-        </p:spPr>
-        <p:txBody>
-          <a:bodyPr vert="horz" lIns="91440" tIns="45720" rIns="91440" bIns="45720" rtlCol="0" anchor="ctr">
-            <a:normAutofit/>
-          </a:bodyPr>
-          <a:lstStyle/>
-          <a:p>
-            <a:pPr marL="0" indent="0">
-              <a:buNone/>
-            </a:pPr>
-            <a:r>
-              <a:rPr lang="en-US" sz="2000" kern="1200">
-                <a:latin typeface="+mn-lt"/>
-                <a:ea typeface="+mn-ea"/>
-                <a:cs typeface="+mn-cs"/>
+              <a:rPr lang="en-US" sz="1800" dirty="0">
+                <a:latin typeface="Helvetica" panose="020B0604020202020204" pitchFamily="34" charset="0"/>
+                <a:cs typeface="Helvetica" panose="020B0604020202020204" pitchFamily="34" charset="0"/>
               </a:rPr>
               <a:t>This project highlights the importance of external factors, like competitor performance, in forecasting. For businesses, especially in tech, these models can support better decision-making, from investment strategies to understanding market dynamics.</a:t>
             </a:r>
           </a:p>
           <a:p>
-            <a:pPr marL="0" indent="0">
-              <a:buNone/>
-            </a:pPr>
-            <a:endParaRPr lang="en-US" sz="2000" kern="1200">
-              <a:latin typeface="+mn-lt"/>
-              <a:ea typeface="+mn-ea"/>
-              <a:cs typeface="+mn-cs"/>
+            <a:endParaRPr lang="en-US" sz="1800" dirty="0">
+              <a:latin typeface="Helvetica" panose="020B0604020202020204" pitchFamily="34" charset="0"/>
+              <a:cs typeface="Helvetica" panose="020B0604020202020204" pitchFamily="34" charset="0"/>
             </a:endParaRPr>
           </a:p>
           <a:p>
-            <a:pPr marL="0" indent="0">
-              <a:buNone/>
-            </a:pPr>
             <a:r>
-              <a:rPr lang="en-US" sz="2000" kern="1200">
-                <a:latin typeface="+mn-lt"/>
-                <a:ea typeface="+mn-ea"/>
-                <a:cs typeface="+mn-cs"/>
+              <a:rPr lang="en-US" sz="1800" dirty="0">
+                <a:latin typeface="Helvetica" panose="020B0604020202020204" pitchFamily="34" charset="0"/>
+                <a:cs typeface="Helvetica" panose="020B0604020202020204" pitchFamily="34" charset="0"/>
               </a:rPr>
               <a:t>Including Google Data in Model 3 significantly improved prediction accuracy and reduced overfitting, showing how external marketing factors can enhance financial forecasting.</a:t>
             </a:r>
